--- a/presentaciones/Howy_Maquinaria_Nopal_2026.pptx
+++ b/presentaciones/Howy_Maquinaria_Nopal_2026.pptx
@@ -3937,7 +3937,7 @@
         <p:spPr>
           <a:xfrm>
             <a:off x="713232" y="1280160"/>
-            <a:ext cx="10771632" cy="2212848"/>
+            <a:ext cx="10771632" cy="2286000"/>
           </a:xfrm>
           <a:prstGeom prst="roundRect">
             <a:avLst>
@@ -3983,7 +3983,7 @@
         <p:spPr>
           <a:xfrm>
             <a:off x="713232" y="1280160"/>
-            <a:ext cx="2788920" cy="2212848"/>
+            <a:ext cx="2788920" cy="2286000"/>
           </a:xfrm>
           <a:prstGeom prst="roundRect">
             <a:avLst>
@@ -4029,7 +4029,7 @@
         <p:spPr>
           <a:xfrm>
             <a:off x="3374136" y="1298448"/>
-            <a:ext cx="128016" cy="2176272"/>
+            <a:ext cx="128016" cy="2249424"/>
           </a:xfrm>
           <a:prstGeom prst="rect">
             <a:avLst/>
@@ -4064,16 +4064,94 @@
           </a:p>
         </p:txBody>
       </p:sp>
-      <p:sp>
-        <p:nvSpPr>
-          <p:cNvPr id="11" name="TextBox 10"/>
-          <p:cNvSpPr txBox="1"/>
-          <p:nvPr/>
-        </p:nvSpPr>
-        <p:spPr>
-          <a:xfrm>
-            <a:off x="914400" y="1463040"/>
-            <a:ext cx="2404872" cy="1005840"/>
+      <p:pic>
+        <p:nvPicPr>
+          <p:cNvPr id="11" name="Picture 10" descr="no_deshid_charolas.png"/>
+          <p:cNvPicPr>
+            <a:picLocks noChangeAspect="1"/>
+          </p:cNvPicPr>
+          <p:nvPr/>
+        </p:nvPicPr>
+        <p:blipFill>
+          <a:blip r:embed="rId2"/>
+          <a:stretch>
+            <a:fillRect/>
+          </a:stretch>
+        </p:blipFill>
+        <p:spPr>
+          <a:xfrm>
+            <a:off x="969264" y="1426464"/>
+            <a:ext cx="2286000" cy="1413662"/>
+          </a:xfrm>
+          <a:prstGeom prst="rect">
+            <a:avLst/>
+          </a:prstGeom>
+        </p:spPr>
+      </p:pic>
+      <p:sp>
+        <p:nvSpPr>
+          <p:cNvPr id="12" name="TextBox 11"/>
+          <p:cNvSpPr txBox="1"/>
+          <p:nvPr/>
+        </p:nvSpPr>
+        <p:spPr>
+          <a:xfrm>
+            <a:off x="877824" y="3182112"/>
+            <a:ext cx="2514600" cy="292608"/>
+          </a:xfrm>
+          <a:prstGeom prst="rect">
+            <a:avLst/>
+          </a:prstGeom>
+          <a:noFill/>
+        </p:spPr>
+        <p:txBody>
+          <a:bodyPr wrap="square" anchor="ctr" lIns="0" rIns="0" tIns="0" bIns="0">
+            <a:spAutoFit/>
+          </a:bodyPr>
+          <a:lstStyle/>
+          <a:p>
+            <a:pPr algn="ctr">
+              <a:lnSpc>
+                <a:spcPct val="100000"/>
+              </a:lnSpc>
+              <a:spcBef>
+                <a:spcPts val="0"/>
+              </a:spcBef>
+              <a:spcAft>
+                <a:spcPts val="300"/>
+              </a:spcAft>
+            </a:pPr>
+            <a:r>
+              <a:rPr sz="900" b="0" i="0">
+                <a:solidFill>
+                  <a:srgbClr val="FFFFFF"/>
+                </a:solidFill>
+                <a:latin typeface="Calibri"/>
+              </a:rPr>
+              <a:t>● </a:t>
+            </a:r>
+            <a:r>
+              <a:rPr sz="1000" b="0" i="0">
+                <a:solidFill>
+                  <a:srgbClr val="FFFFFF"/>
+                </a:solidFill>
+                <a:latin typeface="Calibri"/>
+              </a:rPr>
+              <a:t>México · Puebla</a:t>
+            </a:r>
+          </a:p>
+        </p:txBody>
+      </p:sp>
+      <p:sp>
+        <p:nvSpPr>
+          <p:cNvPr id="13" name="TextBox 12"/>
+          <p:cNvSpPr txBox="1"/>
+          <p:nvPr/>
+        </p:nvSpPr>
+        <p:spPr>
+          <a:xfrm>
+            <a:off x="3703320" y="1408176"/>
+            <a:ext cx="7543800" cy="457200"/>
           </a:xfrm>
           <a:prstGeom prst="rect">
             <a:avLst/>
@@ -4088,19 +4166,19 @@
           <a:p>
             <a:pPr algn="l">
               <a:lnSpc>
-                <a:spcPct val="102000"/>
-              </a:lnSpc>
-              <a:spcBef>
-                <a:spcPts val="0"/>
-              </a:spcBef>
-              <a:spcAft>
-                <a:spcPts val="300"/>
-              </a:spcAft>
-            </a:pPr>
-            <a:r>
-              <a:rPr sz="1500" b="1" i="0">
-                <a:solidFill>
-                  <a:srgbClr val="FFFFFF"/>
+                <a:spcPct val="100000"/>
+              </a:lnSpc>
+              <a:spcBef>
+                <a:spcPts val="0"/>
+              </a:spcBef>
+              <a:spcAft>
+                <a:spcPts val="300"/>
+              </a:spcAft>
+            </a:pPr>
+            <a:r>
+              <a:rPr sz="1400" b="1" i="0">
+                <a:solidFill>
+                  <a:srgbClr val="0E213A"/>
                 </a:solidFill>
                 <a:latin typeface="Calibri"/>
               </a:rPr>
@@ -4111,127 +4189,28 @@
       </p:sp>
       <p:sp>
         <p:nvSpPr>
-          <p:cNvPr id="12" name="TextBox 11"/>
-          <p:cNvSpPr txBox="1"/>
-          <p:nvPr/>
-        </p:nvSpPr>
-        <p:spPr>
-          <a:xfrm>
-            <a:off x="914400" y="2962656"/>
-            <a:ext cx="2404872" cy="365760"/>
-          </a:xfrm>
-          <a:prstGeom prst="rect">
-            <a:avLst/>
-          </a:prstGeom>
-          <a:noFill/>
-        </p:spPr>
-        <p:txBody>
-          <a:bodyPr wrap="square" anchor="ctr" lIns="0" rIns="0" tIns="0" bIns="0">
+          <p:cNvPr id="14" name="TextBox 13"/>
+          <p:cNvSpPr txBox="1"/>
+          <p:nvPr/>
+        </p:nvSpPr>
+        <p:spPr>
+          <a:xfrm>
+            <a:off x="3703320" y="1920240"/>
+            <a:ext cx="7543800" cy="457200"/>
+          </a:xfrm>
+          <a:prstGeom prst="rect">
+            <a:avLst/>
+          </a:prstGeom>
+          <a:noFill/>
+        </p:spPr>
+        <p:txBody>
+          <a:bodyPr wrap="square" anchor="t" lIns="0" rIns="0" tIns="0" bIns="0">
             <a:spAutoFit/>
           </a:bodyPr>
           <a:lstStyle/>
           <a:p>
             <a:pPr algn="l">
               <a:lnSpc>
-                <a:spcPct val="100000"/>
-              </a:lnSpc>
-              <a:spcBef>
-                <a:spcPts val="0"/>
-              </a:spcBef>
-              <a:spcAft>
-                <a:spcPts val="300"/>
-              </a:spcAft>
-            </a:pPr>
-            <a:r>
-              <a:rPr sz="1000" b="0" i="0">
-                <a:solidFill>
-                  <a:srgbClr val="FFFFFF"/>
-                </a:solidFill>
-                <a:latin typeface="Calibri"/>
-              </a:rPr>
-              <a:t>● </a:t>
-            </a:r>
-            <a:r>
-              <a:rPr sz="1050" b="0" i="0">
-                <a:solidFill>
-                  <a:srgbClr val="FFFFFF"/>
-                </a:solidFill>
-                <a:latin typeface="Calibri"/>
-              </a:rPr>
-              <a:t>México · Puebla</a:t>
-            </a:r>
-          </a:p>
-        </p:txBody>
-      </p:sp>
-      <p:sp>
-        <p:nvSpPr>
-          <p:cNvPr id="13" name="TextBox 12"/>
-          <p:cNvSpPr txBox="1"/>
-          <p:nvPr/>
-        </p:nvSpPr>
-        <p:spPr>
-          <a:xfrm>
-            <a:off x="3685032" y="1426464"/>
-            <a:ext cx="7543800" cy="219456"/>
-          </a:xfrm>
-          <a:prstGeom prst="rect">
-            <a:avLst/>
-          </a:prstGeom>
-          <a:noFill/>
-        </p:spPr>
-        <p:txBody>
-          <a:bodyPr wrap="square" anchor="t" lIns="0" rIns="0" tIns="0" bIns="0">
-            <a:spAutoFit/>
-          </a:bodyPr>
-          <a:lstStyle/>
-          <a:p>
-            <a:pPr algn="l">
-              <a:lnSpc>
-                <a:spcPct val="100000"/>
-              </a:lnSpc>
-              <a:spcBef>
-                <a:spcPts val="0"/>
-              </a:spcBef>
-              <a:spcAft>
-                <a:spcPts val="300"/>
-              </a:spcAft>
-            </a:pPr>
-            <a:r>
-              <a:rPr sz="950" b="1" i="0">
-                <a:solidFill>
-                  <a:srgbClr val="F5A623"/>
-                </a:solidFill>
-                <a:latin typeface="Calibri"/>
-              </a:rPr>
-              <a:t>FUNCIÓN</a:t>
-            </a:r>
-          </a:p>
-        </p:txBody>
-      </p:sp>
-      <p:sp>
-        <p:nvSpPr>
-          <p:cNvPr id="14" name="TextBox 13"/>
-          <p:cNvSpPr txBox="1"/>
-          <p:nvPr/>
-        </p:nvSpPr>
-        <p:spPr>
-          <a:xfrm>
-            <a:off x="3685032" y="1645920"/>
-            <a:ext cx="7543800" cy="566928"/>
-          </a:xfrm>
-          <a:prstGeom prst="rect">
-            <a:avLst/>
-          </a:prstGeom>
-          <a:noFill/>
-        </p:spPr>
-        <p:txBody>
-          <a:bodyPr wrap="square" anchor="t" lIns="0" rIns="0" tIns="0" bIns="0">
-            <a:spAutoFit/>
-          </a:bodyPr>
-          <a:lstStyle/>
-          <a:p>
-            <a:pPr algn="l">
-              <a:lnSpc>
                 <a:spcPct val="105000"/>
               </a:lnSpc>
               <a:spcBef>
@@ -4242,7 +4221,7 @@
               </a:spcAft>
             </a:pPr>
             <a:r>
-              <a:rPr sz="1150" b="0" i="0">
+              <a:rPr sz="1100" b="0" i="0">
                 <a:solidFill>
                   <a:srgbClr val="1A2432"/>
                 </a:solidFill>
@@ -4261,7 +4240,7 @@
         </p:nvSpPr>
         <p:spPr>
           <a:xfrm>
-            <a:off x="3685032" y="2295144"/>
+            <a:off x="3703320" y="2459736"/>
             <a:ext cx="118872" cy="118872"/>
           </a:xfrm>
           <a:prstGeom prst="roundRect">
@@ -4307,8 +4286,8 @@
         </p:nvSpPr>
         <p:spPr>
           <a:xfrm>
-            <a:off x="3941064" y="2249424"/>
-            <a:ext cx="7269480" cy="310896"/>
+            <a:off x="3959352" y="2414016"/>
+            <a:ext cx="7269480" cy="292608"/>
           </a:xfrm>
           <a:prstGeom prst="rect">
             <a:avLst/>
@@ -4333,7 +4312,7 @@
               </a:spcAft>
             </a:pPr>
             <a:r>
-              <a:rPr sz="1080" b="0" i="0">
+              <a:rPr sz="1050" b="0" i="0">
                 <a:solidFill>
                   <a:srgbClr val="5B6674"/>
                 </a:solidFill>
@@ -4352,7 +4331,7 @@
         </p:nvSpPr>
         <p:spPr>
           <a:xfrm>
-            <a:off x="3685032" y="2601468"/>
+            <a:off x="3703320" y="2734056"/>
             <a:ext cx="118872" cy="118872"/>
           </a:xfrm>
           <a:prstGeom prst="roundRect">
@@ -4398,8 +4377,8 @@
         </p:nvSpPr>
         <p:spPr>
           <a:xfrm>
-            <a:off x="3941064" y="2555748"/>
-            <a:ext cx="7269480" cy="310896"/>
+            <a:off x="3959352" y="2688336"/>
+            <a:ext cx="7269480" cy="292608"/>
           </a:xfrm>
           <a:prstGeom prst="rect">
             <a:avLst/>
@@ -4424,7 +4403,7 @@
               </a:spcAft>
             </a:pPr>
             <a:r>
-              <a:rPr sz="1080" b="0" i="0">
+              <a:rPr sz="1050" b="0" i="0">
                 <a:solidFill>
                   <a:srgbClr val="5B6674"/>
                 </a:solidFill>
@@ -4443,7 +4422,7 @@
         </p:nvSpPr>
         <p:spPr>
           <a:xfrm>
-            <a:off x="3685032" y="2907792"/>
+            <a:off x="3703320" y="3008376"/>
             <a:ext cx="118872" cy="118872"/>
           </a:xfrm>
           <a:prstGeom prst="roundRect">
@@ -4489,8 +4468,8 @@
         </p:nvSpPr>
         <p:spPr>
           <a:xfrm>
-            <a:off x="3941064" y="2862072"/>
-            <a:ext cx="7269480" cy="310896"/>
+            <a:off x="3959352" y="2962656"/>
+            <a:ext cx="7269480" cy="292608"/>
           </a:xfrm>
           <a:prstGeom prst="rect">
             <a:avLst/>
@@ -4515,7 +4494,7 @@
               </a:spcAft>
             </a:pPr>
             <a:r>
-              <a:rPr sz="1080" b="0" i="0">
+              <a:rPr sz="1050" b="0" i="0">
                 <a:solidFill>
                   <a:srgbClr val="5B6674"/>
                 </a:solidFill>
@@ -4534,8 +4513,8 @@
         </p:nvSpPr>
         <p:spPr>
           <a:xfrm>
-            <a:off x="3685032" y="3090672"/>
-            <a:ext cx="3931920" cy="347472"/>
+            <a:off x="3703320" y="3273552"/>
+            <a:ext cx="3931920" cy="292608"/>
           </a:xfrm>
           <a:prstGeom prst="rect">
             <a:avLst/>
@@ -4588,8 +4567,8 @@
         </p:nvSpPr>
         <p:spPr>
           <a:xfrm>
-            <a:off x="7662671" y="3090672"/>
-            <a:ext cx="3566160" cy="347472"/>
+            <a:off x="7680959" y="3273552"/>
+            <a:ext cx="3566160" cy="292608"/>
           </a:xfrm>
           <a:prstGeom prst="rect">
             <a:avLst/>
@@ -4643,7 +4622,7 @@
         <p:spPr>
           <a:xfrm>
             <a:off x="713232" y="3703320"/>
-            <a:ext cx="10771632" cy="2212848"/>
+            <a:ext cx="10771632" cy="2286000"/>
           </a:xfrm>
           <a:prstGeom prst="roundRect">
             <a:avLst>
@@ -4689,7 +4668,7 @@
         <p:spPr>
           <a:xfrm>
             <a:off x="713232" y="3703320"/>
-            <a:ext cx="2788920" cy="2212848"/>
+            <a:ext cx="2788920" cy="2286000"/>
           </a:xfrm>
           <a:prstGeom prst="roundRect">
             <a:avLst>
@@ -4735,7 +4714,7 @@
         <p:spPr>
           <a:xfrm>
             <a:off x="3374136" y="3721608"/>
-            <a:ext cx="128016" cy="2176272"/>
+            <a:ext cx="128016" cy="2249424"/>
           </a:xfrm>
           <a:prstGeom prst="rect">
             <a:avLst/>
@@ -4770,16 +4749,94 @@
           </a:p>
         </p:txBody>
       </p:sp>
-      <p:sp>
-        <p:nvSpPr>
-          <p:cNvPr id="26" name="TextBox 25"/>
-          <p:cNvSpPr txBox="1"/>
-          <p:nvPr/>
-        </p:nvSpPr>
-        <p:spPr>
-          <a:xfrm>
-            <a:off x="914400" y="3886200"/>
-            <a:ext cx="2404872" cy="1005840"/>
+      <p:pic>
+        <p:nvPicPr>
+          <p:cNvPr id="26" name="Picture 25" descr="no_deshid_solar.png"/>
+          <p:cNvPicPr>
+            <a:picLocks noChangeAspect="1"/>
+          </p:cNvPicPr>
+          <p:nvPr/>
+        </p:nvPicPr>
+        <p:blipFill>
+          <a:blip r:embed="rId3"/>
+          <a:stretch>
+            <a:fillRect/>
+          </a:stretch>
+        </p:blipFill>
+        <p:spPr>
+          <a:xfrm>
+            <a:off x="969264" y="3849624"/>
+            <a:ext cx="2286000" cy="1413662"/>
+          </a:xfrm>
+          <a:prstGeom prst="rect">
+            <a:avLst/>
+          </a:prstGeom>
+        </p:spPr>
+      </p:pic>
+      <p:sp>
+        <p:nvSpPr>
+          <p:cNvPr id="27" name="TextBox 26"/>
+          <p:cNvSpPr txBox="1"/>
+          <p:nvPr/>
+        </p:nvSpPr>
+        <p:spPr>
+          <a:xfrm>
+            <a:off x="877824" y="5605272"/>
+            <a:ext cx="2514600" cy="292608"/>
+          </a:xfrm>
+          <a:prstGeom prst="rect">
+            <a:avLst/>
+          </a:prstGeom>
+          <a:noFill/>
+        </p:spPr>
+        <p:txBody>
+          <a:bodyPr wrap="square" anchor="ctr" lIns="0" rIns="0" tIns="0" bIns="0">
+            <a:spAutoFit/>
+          </a:bodyPr>
+          <a:lstStyle/>
+          <a:p>
+            <a:pPr algn="ctr">
+              <a:lnSpc>
+                <a:spcPct val="100000"/>
+              </a:lnSpc>
+              <a:spcBef>
+                <a:spcPts val="0"/>
+              </a:spcBef>
+              <a:spcAft>
+                <a:spcPts val="300"/>
+              </a:spcAft>
+            </a:pPr>
+            <a:r>
+              <a:rPr sz="900" b="0" i="0">
+                <a:solidFill>
+                  <a:srgbClr val="FFFFFF"/>
+                </a:solidFill>
+                <a:latin typeface="Calibri"/>
+              </a:rPr>
+              <a:t>● </a:t>
+            </a:r>
+            <a:r>
+              <a:rPr sz="1000" b="0" i="0">
+                <a:solidFill>
+                  <a:srgbClr val="FFFFFF"/>
+                </a:solidFill>
+                <a:latin typeface="Calibri"/>
+              </a:rPr>
+              <a:t>México (UNAM / IPN)</a:t>
+            </a:r>
+          </a:p>
+        </p:txBody>
+      </p:sp>
+      <p:sp>
+        <p:nvSpPr>
+          <p:cNvPr id="28" name="TextBox 27"/>
+          <p:cNvSpPr txBox="1"/>
+          <p:nvPr/>
+        </p:nvSpPr>
+        <p:spPr>
+          <a:xfrm>
+            <a:off x="3703320" y="3831336"/>
+            <a:ext cx="7543800" cy="457200"/>
           </a:xfrm>
           <a:prstGeom prst="rect">
             <a:avLst/>
@@ -4794,19 +4851,19 @@
           <a:p>
             <a:pPr algn="l">
               <a:lnSpc>
-                <a:spcPct val="102000"/>
-              </a:lnSpc>
-              <a:spcBef>
-                <a:spcPts val="0"/>
-              </a:spcBef>
-              <a:spcAft>
-                <a:spcPts val="300"/>
-              </a:spcAft>
-            </a:pPr>
-            <a:r>
-              <a:rPr sz="1500" b="1" i="0">
-                <a:solidFill>
-                  <a:srgbClr val="FFFFFF"/>
+                <a:spcPct val="100000"/>
+              </a:lnSpc>
+              <a:spcBef>
+                <a:spcPts val="0"/>
+              </a:spcBef>
+              <a:spcAft>
+                <a:spcPts val="300"/>
+              </a:spcAft>
+            </a:pPr>
+            <a:r>
+              <a:rPr sz="1400" b="1" i="0">
+                <a:solidFill>
+                  <a:srgbClr val="0E213A"/>
                 </a:solidFill>
                 <a:latin typeface="Calibri"/>
               </a:rPr>
@@ -4817,127 +4874,28 @@
       </p:sp>
       <p:sp>
         <p:nvSpPr>
-          <p:cNvPr id="27" name="TextBox 26"/>
-          <p:cNvSpPr txBox="1"/>
-          <p:nvPr/>
-        </p:nvSpPr>
-        <p:spPr>
-          <a:xfrm>
-            <a:off x="914400" y="5385816"/>
-            <a:ext cx="2404872" cy="365760"/>
-          </a:xfrm>
-          <a:prstGeom prst="rect">
-            <a:avLst/>
-          </a:prstGeom>
-          <a:noFill/>
-        </p:spPr>
-        <p:txBody>
-          <a:bodyPr wrap="square" anchor="ctr" lIns="0" rIns="0" tIns="0" bIns="0">
+          <p:cNvPr id="29" name="TextBox 28"/>
+          <p:cNvSpPr txBox="1"/>
+          <p:nvPr/>
+        </p:nvSpPr>
+        <p:spPr>
+          <a:xfrm>
+            <a:off x="3703320" y="4343400"/>
+            <a:ext cx="7543800" cy="457200"/>
+          </a:xfrm>
+          <a:prstGeom prst="rect">
+            <a:avLst/>
+          </a:prstGeom>
+          <a:noFill/>
+        </p:spPr>
+        <p:txBody>
+          <a:bodyPr wrap="square" anchor="t" lIns="0" rIns="0" tIns="0" bIns="0">
             <a:spAutoFit/>
           </a:bodyPr>
           <a:lstStyle/>
           <a:p>
             <a:pPr algn="l">
               <a:lnSpc>
-                <a:spcPct val="100000"/>
-              </a:lnSpc>
-              <a:spcBef>
-                <a:spcPts val="0"/>
-              </a:spcBef>
-              <a:spcAft>
-                <a:spcPts val="300"/>
-              </a:spcAft>
-            </a:pPr>
-            <a:r>
-              <a:rPr sz="1000" b="0" i="0">
-                <a:solidFill>
-                  <a:srgbClr val="FFFFFF"/>
-                </a:solidFill>
-                <a:latin typeface="Calibri"/>
-              </a:rPr>
-              <a:t>● </a:t>
-            </a:r>
-            <a:r>
-              <a:rPr sz="1050" b="0" i="0">
-                <a:solidFill>
-                  <a:srgbClr val="FFFFFF"/>
-                </a:solidFill>
-                <a:latin typeface="Calibri"/>
-              </a:rPr>
-              <a:t>México (UNAM / IPN)</a:t>
-            </a:r>
-          </a:p>
-        </p:txBody>
-      </p:sp>
-      <p:sp>
-        <p:nvSpPr>
-          <p:cNvPr id="28" name="TextBox 27"/>
-          <p:cNvSpPr txBox="1"/>
-          <p:nvPr/>
-        </p:nvSpPr>
-        <p:spPr>
-          <a:xfrm>
-            <a:off x="3685032" y="3849624"/>
-            <a:ext cx="7543800" cy="219456"/>
-          </a:xfrm>
-          <a:prstGeom prst="rect">
-            <a:avLst/>
-          </a:prstGeom>
-          <a:noFill/>
-        </p:spPr>
-        <p:txBody>
-          <a:bodyPr wrap="square" anchor="t" lIns="0" rIns="0" tIns="0" bIns="0">
-            <a:spAutoFit/>
-          </a:bodyPr>
-          <a:lstStyle/>
-          <a:p>
-            <a:pPr algn="l">
-              <a:lnSpc>
-                <a:spcPct val="100000"/>
-              </a:lnSpc>
-              <a:spcBef>
-                <a:spcPts val="0"/>
-              </a:spcBef>
-              <a:spcAft>
-                <a:spcPts val="300"/>
-              </a:spcAft>
-            </a:pPr>
-            <a:r>
-              <a:rPr sz="950" b="1" i="0">
-                <a:solidFill>
-                  <a:srgbClr val="F5A623"/>
-                </a:solidFill>
-                <a:latin typeface="Calibri"/>
-              </a:rPr>
-              <a:t>FUNCIÓN</a:t>
-            </a:r>
-          </a:p>
-        </p:txBody>
-      </p:sp>
-      <p:sp>
-        <p:nvSpPr>
-          <p:cNvPr id="29" name="TextBox 28"/>
-          <p:cNvSpPr txBox="1"/>
-          <p:nvPr/>
-        </p:nvSpPr>
-        <p:spPr>
-          <a:xfrm>
-            <a:off x="3685032" y="4069080"/>
-            <a:ext cx="7543800" cy="566928"/>
-          </a:xfrm>
-          <a:prstGeom prst="rect">
-            <a:avLst/>
-          </a:prstGeom>
-          <a:noFill/>
-        </p:spPr>
-        <p:txBody>
-          <a:bodyPr wrap="square" anchor="t" lIns="0" rIns="0" tIns="0" bIns="0">
-            <a:spAutoFit/>
-          </a:bodyPr>
-          <a:lstStyle/>
-          <a:p>
-            <a:pPr algn="l">
-              <a:lnSpc>
                 <a:spcPct val="105000"/>
               </a:lnSpc>
               <a:spcBef>
@@ -4948,7 +4906,7 @@
               </a:spcAft>
             </a:pPr>
             <a:r>
-              <a:rPr sz="1150" b="0" i="0">
+              <a:rPr sz="1100" b="0" i="0">
                 <a:solidFill>
                   <a:srgbClr val="1A2432"/>
                 </a:solidFill>
@@ -4967,7 +4925,7 @@
         </p:nvSpPr>
         <p:spPr>
           <a:xfrm>
-            <a:off x="3685032" y="4718304"/>
+            <a:off x="3703320" y="4882896"/>
             <a:ext cx="118872" cy="118872"/>
           </a:xfrm>
           <a:prstGeom prst="roundRect">
@@ -5013,8 +4971,8 @@
         </p:nvSpPr>
         <p:spPr>
           <a:xfrm>
-            <a:off x="3941064" y="4672584"/>
-            <a:ext cx="7269480" cy="310896"/>
+            <a:off x="3959352" y="4837176"/>
+            <a:ext cx="7269480" cy="292608"/>
           </a:xfrm>
           <a:prstGeom prst="rect">
             <a:avLst/>
@@ -5039,7 +4997,7 @@
               </a:spcAft>
             </a:pPr>
             <a:r>
-              <a:rPr sz="1080" b="0" i="0">
+              <a:rPr sz="1050" b="0" i="0">
                 <a:solidFill>
                   <a:srgbClr val="5B6674"/>
                 </a:solidFill>
@@ -5058,7 +5016,7 @@
         </p:nvSpPr>
         <p:spPr>
           <a:xfrm>
-            <a:off x="3685032" y="5024628"/>
+            <a:off x="3703320" y="5157216"/>
             <a:ext cx="118872" cy="118872"/>
           </a:xfrm>
           <a:prstGeom prst="roundRect">
@@ -5104,8 +5062,8 @@
         </p:nvSpPr>
         <p:spPr>
           <a:xfrm>
-            <a:off x="3941064" y="4978908"/>
-            <a:ext cx="7269480" cy="310896"/>
+            <a:off x="3959352" y="5111496"/>
+            <a:ext cx="7269480" cy="292608"/>
           </a:xfrm>
           <a:prstGeom prst="rect">
             <a:avLst/>
@@ -5130,7 +5088,7 @@
               </a:spcAft>
             </a:pPr>
             <a:r>
-              <a:rPr sz="1080" b="0" i="0">
+              <a:rPr sz="1050" b="0" i="0">
                 <a:solidFill>
                   <a:srgbClr val="5B6674"/>
                 </a:solidFill>
@@ -5149,7 +5107,7 @@
         </p:nvSpPr>
         <p:spPr>
           <a:xfrm>
-            <a:off x="3685032" y="5330952"/>
+            <a:off x="3703320" y="5431536"/>
             <a:ext cx="118872" cy="118872"/>
           </a:xfrm>
           <a:prstGeom prst="roundRect">
@@ -5195,8 +5153,8 @@
         </p:nvSpPr>
         <p:spPr>
           <a:xfrm>
-            <a:off x="3941064" y="5285232"/>
-            <a:ext cx="7269480" cy="310896"/>
+            <a:off x="3959352" y="5385816"/>
+            <a:ext cx="7269480" cy="292608"/>
           </a:xfrm>
           <a:prstGeom prst="rect">
             <a:avLst/>
@@ -5221,7 +5179,7 @@
               </a:spcAft>
             </a:pPr>
             <a:r>
-              <a:rPr sz="1080" b="0" i="0">
+              <a:rPr sz="1050" b="0" i="0">
                 <a:solidFill>
                   <a:srgbClr val="5B6674"/>
                 </a:solidFill>
@@ -5240,8 +5198,8 @@
         </p:nvSpPr>
         <p:spPr>
           <a:xfrm>
-            <a:off x="3685032" y="5513832"/>
-            <a:ext cx="3931920" cy="347472"/>
+            <a:off x="3703320" y="5696712"/>
+            <a:ext cx="3931920" cy="292608"/>
           </a:xfrm>
           <a:prstGeom prst="rect">
             <a:avLst/>
@@ -5294,8 +5252,8 @@
         </p:nvSpPr>
         <p:spPr>
           <a:xfrm>
-            <a:off x="7662671" y="5513832"/>
-            <a:ext cx="3566160" cy="347472"/>
+            <a:off x="7680959" y="5696712"/>
+            <a:ext cx="3566160" cy="292608"/>
           </a:xfrm>
           <a:prstGeom prst="rect">
             <a:avLst/>
@@ -5644,7 +5602,7 @@
         <p:spPr>
           <a:xfrm>
             <a:off x="713232" y="1280160"/>
-            <a:ext cx="10771632" cy="2212848"/>
+            <a:ext cx="10771632" cy="2286000"/>
           </a:xfrm>
           <a:prstGeom prst="roundRect">
             <a:avLst>
@@ -5690,7 +5648,7 @@
         <p:spPr>
           <a:xfrm>
             <a:off x="713232" y="1280160"/>
-            <a:ext cx="2788920" cy="2212848"/>
+            <a:ext cx="2788920" cy="2286000"/>
           </a:xfrm>
           <a:prstGeom prst="roundRect">
             <a:avLst>
@@ -5736,7 +5694,7 @@
         <p:spPr>
           <a:xfrm>
             <a:off x="3374136" y="1298448"/>
-            <a:ext cx="128016" cy="2176272"/>
+            <a:ext cx="128016" cy="2249424"/>
           </a:xfrm>
           <a:prstGeom prst="rect">
             <a:avLst/>
@@ -5771,16 +5729,94 @@
           </a:p>
         </p:txBody>
       </p:sp>
-      <p:sp>
-        <p:nvSpPr>
-          <p:cNvPr id="11" name="TextBox 10"/>
-          <p:cNvSpPr txBox="1"/>
-          <p:nvPr/>
-        </p:nvSpPr>
-        <p:spPr>
-          <a:xfrm>
-            <a:off x="914400" y="1463040"/>
-            <a:ext cx="2404872" cy="1005840"/>
+      <p:pic>
+        <p:nvPicPr>
+          <p:cNvPr id="11" name="Picture 10" descr="no_molino.png"/>
+          <p:cNvPicPr>
+            <a:picLocks noChangeAspect="1"/>
+          </p:cNvPicPr>
+          <p:nvPr/>
+        </p:nvPicPr>
+        <p:blipFill>
+          <a:blip r:embed="rId2"/>
+          <a:stretch>
+            <a:fillRect/>
+          </a:stretch>
+        </p:blipFill>
+        <p:spPr>
+          <a:xfrm>
+            <a:off x="969264" y="1426464"/>
+            <a:ext cx="2286000" cy="1413662"/>
+          </a:xfrm>
+          <a:prstGeom prst="rect">
+            <a:avLst/>
+          </a:prstGeom>
+        </p:spPr>
+      </p:pic>
+      <p:sp>
+        <p:nvSpPr>
+          <p:cNvPr id="12" name="TextBox 11"/>
+          <p:cNvSpPr txBox="1"/>
+          <p:nvPr/>
+        </p:nvSpPr>
+        <p:spPr>
+          <a:xfrm>
+            <a:off x="877824" y="3182112"/>
+            <a:ext cx="2514600" cy="292608"/>
+          </a:xfrm>
+          <a:prstGeom prst="rect">
+            <a:avLst/>
+          </a:prstGeom>
+          <a:noFill/>
+        </p:spPr>
+        <p:txBody>
+          <a:bodyPr wrap="square" anchor="ctr" lIns="0" rIns="0" tIns="0" bIns="0">
+            <a:spAutoFit/>
+          </a:bodyPr>
+          <a:lstStyle/>
+          <a:p>
+            <a:pPr algn="ctr">
+              <a:lnSpc>
+                <a:spcPct val="100000"/>
+              </a:lnSpc>
+              <a:spcBef>
+                <a:spcPts val="0"/>
+              </a:spcBef>
+              <a:spcAft>
+                <a:spcPts val="300"/>
+              </a:spcAft>
+            </a:pPr>
+            <a:r>
+              <a:rPr sz="900" b="0" i="0">
+                <a:solidFill>
+                  <a:srgbClr val="FFFFFF"/>
+                </a:solidFill>
+                <a:latin typeface="Calibri"/>
+              </a:rPr>
+              <a:t>● </a:t>
+            </a:r>
+            <a:r>
+              <a:rPr sz="1000" b="0" i="0">
+                <a:solidFill>
+                  <a:srgbClr val="FFFFFF"/>
+                </a:solidFill>
+                <a:latin typeface="Calibri"/>
+              </a:rPr>
+              <a:t>México</a:t>
+            </a:r>
+          </a:p>
+        </p:txBody>
+      </p:sp>
+      <p:sp>
+        <p:nvSpPr>
+          <p:cNvPr id="13" name="TextBox 12"/>
+          <p:cNvSpPr txBox="1"/>
+          <p:nvPr/>
+        </p:nvSpPr>
+        <p:spPr>
+          <a:xfrm>
+            <a:off x="3703320" y="1408176"/>
+            <a:ext cx="7543800" cy="457200"/>
           </a:xfrm>
           <a:prstGeom prst="rect">
             <a:avLst/>
@@ -5795,19 +5831,19 @@
           <a:p>
             <a:pPr algn="l">
               <a:lnSpc>
-                <a:spcPct val="102000"/>
-              </a:lnSpc>
-              <a:spcBef>
-                <a:spcPts val="0"/>
-              </a:spcBef>
-              <a:spcAft>
-                <a:spcPts val="300"/>
-              </a:spcAft>
-            </a:pPr>
-            <a:r>
-              <a:rPr sz="1500" b="1" i="0">
-                <a:solidFill>
-                  <a:srgbClr val="FFFFFF"/>
+                <a:spcPct val="100000"/>
+              </a:lnSpc>
+              <a:spcBef>
+                <a:spcPts val="0"/>
+              </a:spcBef>
+              <a:spcAft>
+                <a:spcPts val="300"/>
+              </a:spcAft>
+            </a:pPr>
+            <a:r>
+              <a:rPr sz="1400" b="1" i="0">
+                <a:solidFill>
+                  <a:srgbClr val="0E213A"/>
                 </a:solidFill>
                 <a:latin typeface="Calibri"/>
               </a:rPr>
@@ -5818,127 +5854,28 @@
       </p:sp>
       <p:sp>
         <p:nvSpPr>
-          <p:cNvPr id="12" name="TextBox 11"/>
-          <p:cNvSpPr txBox="1"/>
-          <p:nvPr/>
-        </p:nvSpPr>
-        <p:spPr>
-          <a:xfrm>
-            <a:off x="914400" y="2962656"/>
-            <a:ext cx="2404872" cy="365760"/>
-          </a:xfrm>
-          <a:prstGeom prst="rect">
-            <a:avLst/>
-          </a:prstGeom>
-          <a:noFill/>
-        </p:spPr>
-        <p:txBody>
-          <a:bodyPr wrap="square" anchor="ctr" lIns="0" rIns="0" tIns="0" bIns="0">
+          <p:cNvPr id="14" name="TextBox 13"/>
+          <p:cNvSpPr txBox="1"/>
+          <p:nvPr/>
+        </p:nvSpPr>
+        <p:spPr>
+          <a:xfrm>
+            <a:off x="3703320" y="1920240"/>
+            <a:ext cx="7543800" cy="457200"/>
+          </a:xfrm>
+          <a:prstGeom prst="rect">
+            <a:avLst/>
+          </a:prstGeom>
+          <a:noFill/>
+        </p:spPr>
+        <p:txBody>
+          <a:bodyPr wrap="square" anchor="t" lIns="0" rIns="0" tIns="0" bIns="0">
             <a:spAutoFit/>
           </a:bodyPr>
           <a:lstStyle/>
           <a:p>
             <a:pPr algn="l">
               <a:lnSpc>
-                <a:spcPct val="100000"/>
-              </a:lnSpc>
-              <a:spcBef>
-                <a:spcPts val="0"/>
-              </a:spcBef>
-              <a:spcAft>
-                <a:spcPts val="300"/>
-              </a:spcAft>
-            </a:pPr>
-            <a:r>
-              <a:rPr sz="1000" b="0" i="0">
-                <a:solidFill>
-                  <a:srgbClr val="FFFFFF"/>
-                </a:solidFill>
-                <a:latin typeface="Calibri"/>
-              </a:rPr>
-              <a:t>● </a:t>
-            </a:r>
-            <a:r>
-              <a:rPr sz="1050" b="0" i="0">
-                <a:solidFill>
-                  <a:srgbClr val="FFFFFF"/>
-                </a:solidFill>
-                <a:latin typeface="Calibri"/>
-              </a:rPr>
-              <a:t>México</a:t>
-            </a:r>
-          </a:p>
-        </p:txBody>
-      </p:sp>
-      <p:sp>
-        <p:nvSpPr>
-          <p:cNvPr id="13" name="TextBox 12"/>
-          <p:cNvSpPr txBox="1"/>
-          <p:nvPr/>
-        </p:nvSpPr>
-        <p:spPr>
-          <a:xfrm>
-            <a:off x="3685032" y="1426464"/>
-            <a:ext cx="7543800" cy="219456"/>
-          </a:xfrm>
-          <a:prstGeom prst="rect">
-            <a:avLst/>
-          </a:prstGeom>
-          <a:noFill/>
-        </p:spPr>
-        <p:txBody>
-          <a:bodyPr wrap="square" anchor="t" lIns="0" rIns="0" tIns="0" bIns="0">
-            <a:spAutoFit/>
-          </a:bodyPr>
-          <a:lstStyle/>
-          <a:p>
-            <a:pPr algn="l">
-              <a:lnSpc>
-                <a:spcPct val="100000"/>
-              </a:lnSpc>
-              <a:spcBef>
-                <a:spcPts val="0"/>
-              </a:spcBef>
-              <a:spcAft>
-                <a:spcPts val="300"/>
-              </a:spcAft>
-            </a:pPr>
-            <a:r>
-              <a:rPr sz="950" b="1" i="0">
-                <a:solidFill>
-                  <a:srgbClr val="F5A623"/>
-                </a:solidFill>
-                <a:latin typeface="Calibri"/>
-              </a:rPr>
-              <a:t>FUNCIÓN</a:t>
-            </a:r>
-          </a:p>
-        </p:txBody>
-      </p:sp>
-      <p:sp>
-        <p:nvSpPr>
-          <p:cNvPr id="14" name="TextBox 13"/>
-          <p:cNvSpPr txBox="1"/>
-          <p:nvPr/>
-        </p:nvSpPr>
-        <p:spPr>
-          <a:xfrm>
-            <a:off x="3685032" y="1645920"/>
-            <a:ext cx="7543800" cy="566928"/>
-          </a:xfrm>
-          <a:prstGeom prst="rect">
-            <a:avLst/>
-          </a:prstGeom>
-          <a:noFill/>
-        </p:spPr>
-        <p:txBody>
-          <a:bodyPr wrap="square" anchor="t" lIns="0" rIns="0" tIns="0" bIns="0">
-            <a:spAutoFit/>
-          </a:bodyPr>
-          <a:lstStyle/>
-          <a:p>
-            <a:pPr algn="l">
-              <a:lnSpc>
                 <a:spcPct val="105000"/>
               </a:lnSpc>
               <a:spcBef>
@@ -5949,7 +5886,7 @@
               </a:spcAft>
             </a:pPr>
             <a:r>
-              <a:rPr sz="1150" b="0" i="0">
+              <a:rPr sz="1100" b="0" i="0">
                 <a:solidFill>
                   <a:srgbClr val="1A2432"/>
                 </a:solidFill>
@@ -5968,7 +5905,7 @@
         </p:nvSpPr>
         <p:spPr>
           <a:xfrm>
-            <a:off x="3685032" y="2295144"/>
+            <a:off x="3703320" y="2459736"/>
             <a:ext cx="118872" cy="118872"/>
           </a:xfrm>
           <a:prstGeom prst="roundRect">
@@ -6014,8 +5951,8 @@
         </p:nvSpPr>
         <p:spPr>
           <a:xfrm>
-            <a:off x="3941064" y="2249424"/>
-            <a:ext cx="7269480" cy="310896"/>
+            <a:off x="3959352" y="2414016"/>
+            <a:ext cx="7269480" cy="292608"/>
           </a:xfrm>
           <a:prstGeom prst="rect">
             <a:avLst/>
@@ -6040,7 +5977,7 @@
               </a:spcAft>
             </a:pPr>
             <a:r>
-              <a:rPr sz="1080" b="0" i="0">
+              <a:rPr sz="1050" b="0" i="0">
                 <a:solidFill>
                   <a:srgbClr val="5B6674"/>
                 </a:solidFill>
@@ -6059,7 +5996,7 @@
         </p:nvSpPr>
         <p:spPr>
           <a:xfrm>
-            <a:off x="3685032" y="2601468"/>
+            <a:off x="3703320" y="2734056"/>
             <a:ext cx="118872" cy="118872"/>
           </a:xfrm>
           <a:prstGeom prst="roundRect">
@@ -6105,8 +6042,8 @@
         </p:nvSpPr>
         <p:spPr>
           <a:xfrm>
-            <a:off x="3941064" y="2555748"/>
-            <a:ext cx="7269480" cy="310896"/>
+            <a:off x="3959352" y="2688336"/>
+            <a:ext cx="7269480" cy="292608"/>
           </a:xfrm>
           <a:prstGeom prst="rect">
             <a:avLst/>
@@ -6131,7 +6068,7 @@
               </a:spcAft>
             </a:pPr>
             <a:r>
-              <a:rPr sz="1080" b="0" i="0">
+              <a:rPr sz="1050" b="0" i="0">
                 <a:solidFill>
                   <a:srgbClr val="5B6674"/>
                 </a:solidFill>
@@ -6150,7 +6087,7 @@
         </p:nvSpPr>
         <p:spPr>
           <a:xfrm>
-            <a:off x="3685032" y="2907792"/>
+            <a:off x="3703320" y="3008376"/>
             <a:ext cx="118872" cy="118872"/>
           </a:xfrm>
           <a:prstGeom prst="roundRect">
@@ -6196,8 +6133,8 @@
         </p:nvSpPr>
         <p:spPr>
           <a:xfrm>
-            <a:off x="3941064" y="2862072"/>
-            <a:ext cx="7269480" cy="310896"/>
+            <a:off x="3959352" y="2962656"/>
+            <a:ext cx="7269480" cy="292608"/>
           </a:xfrm>
           <a:prstGeom prst="rect">
             <a:avLst/>
@@ -6222,7 +6159,7 @@
               </a:spcAft>
             </a:pPr>
             <a:r>
-              <a:rPr sz="1080" b="0" i="0">
+              <a:rPr sz="1050" b="0" i="0">
                 <a:solidFill>
                   <a:srgbClr val="5B6674"/>
                 </a:solidFill>
@@ -6241,8 +6178,8 @@
         </p:nvSpPr>
         <p:spPr>
           <a:xfrm>
-            <a:off x="3685032" y="3090672"/>
-            <a:ext cx="3931920" cy="347472"/>
+            <a:off x="3703320" y="3273552"/>
+            <a:ext cx="3931920" cy="292608"/>
           </a:xfrm>
           <a:prstGeom prst="rect">
             <a:avLst/>
@@ -6295,8 +6232,8 @@
         </p:nvSpPr>
         <p:spPr>
           <a:xfrm>
-            <a:off x="7662671" y="3090672"/>
-            <a:ext cx="3566160" cy="347472"/>
+            <a:off x="7680959" y="3273552"/>
+            <a:ext cx="3566160" cy="292608"/>
           </a:xfrm>
           <a:prstGeom prst="rect">
             <a:avLst/>
@@ -6350,7 +6287,7 @@
         <p:spPr>
           <a:xfrm>
             <a:off x="713232" y="3703320"/>
-            <a:ext cx="10771632" cy="2212848"/>
+            <a:ext cx="10771632" cy="2286000"/>
           </a:xfrm>
           <a:prstGeom prst="roundRect">
             <a:avLst>
@@ -6396,7 +6333,7 @@
         <p:spPr>
           <a:xfrm>
             <a:off x="713232" y="3703320"/>
-            <a:ext cx="2788920" cy="2212848"/>
+            <a:ext cx="2788920" cy="2286000"/>
           </a:xfrm>
           <a:prstGeom prst="roundRect">
             <a:avLst>
@@ -6442,7 +6379,7 @@
         <p:spPr>
           <a:xfrm>
             <a:off x="3374136" y="3721608"/>
-            <a:ext cx="128016" cy="2176272"/>
+            <a:ext cx="128016" cy="2249424"/>
           </a:xfrm>
           <a:prstGeom prst="rect">
             <a:avLst/>
@@ -6477,16 +6414,94 @@
           </a:p>
         </p:txBody>
       </p:sp>
-      <p:sp>
-        <p:nvSpPr>
-          <p:cNvPr id="26" name="TextBox 25"/>
-          <p:cNvSpPr txBox="1"/>
-          <p:nvPr/>
-        </p:nvSpPr>
-        <p:spPr>
-          <a:xfrm>
-            <a:off x="914400" y="3886200"/>
-            <a:ext cx="2404872" cy="1005840"/>
+      <p:pic>
+        <p:nvPicPr>
+          <p:cNvPr id="26" name="Picture 25" descr="no_tamizado.png"/>
+          <p:cNvPicPr>
+            <a:picLocks noChangeAspect="1"/>
+          </p:cNvPicPr>
+          <p:nvPr/>
+        </p:nvPicPr>
+        <p:blipFill>
+          <a:blip r:embed="rId3"/>
+          <a:stretch>
+            <a:fillRect/>
+          </a:stretch>
+        </p:blipFill>
+        <p:spPr>
+          <a:xfrm>
+            <a:off x="969264" y="3849624"/>
+            <a:ext cx="2286000" cy="1413662"/>
+          </a:xfrm>
+          <a:prstGeom prst="rect">
+            <a:avLst/>
+          </a:prstGeom>
+        </p:spPr>
+      </p:pic>
+      <p:sp>
+        <p:nvSpPr>
+          <p:cNvPr id="27" name="TextBox 26"/>
+          <p:cNvSpPr txBox="1"/>
+          <p:nvPr/>
+        </p:nvSpPr>
+        <p:spPr>
+          <a:xfrm>
+            <a:off x="877824" y="5605272"/>
+            <a:ext cx="2514600" cy="292608"/>
+          </a:xfrm>
+          <a:prstGeom prst="rect">
+            <a:avLst/>
+          </a:prstGeom>
+          <a:noFill/>
+        </p:spPr>
+        <p:txBody>
+          <a:bodyPr wrap="square" anchor="ctr" lIns="0" rIns="0" tIns="0" bIns="0">
+            <a:spAutoFit/>
+          </a:bodyPr>
+          <a:lstStyle/>
+          <a:p>
+            <a:pPr algn="ctr">
+              <a:lnSpc>
+                <a:spcPct val="100000"/>
+              </a:lnSpc>
+              <a:spcBef>
+                <a:spcPts val="0"/>
+              </a:spcBef>
+              <a:spcAft>
+                <a:spcPts val="300"/>
+              </a:spcAft>
+            </a:pPr>
+            <a:r>
+              <a:rPr sz="900" b="0" i="0">
+                <a:solidFill>
+                  <a:srgbClr val="FFFFFF"/>
+                </a:solidFill>
+                <a:latin typeface="Calibri"/>
+              </a:rPr>
+              <a:t>● </a:t>
+            </a:r>
+            <a:r>
+              <a:rPr sz="1000" b="0" i="0">
+                <a:solidFill>
+                  <a:srgbClr val="FFFFFF"/>
+                </a:solidFill>
+                <a:latin typeface="Calibri"/>
+              </a:rPr>
+              <a:t>México</a:t>
+            </a:r>
+          </a:p>
+        </p:txBody>
+      </p:sp>
+      <p:sp>
+        <p:nvSpPr>
+          <p:cNvPr id="28" name="TextBox 27"/>
+          <p:cNvSpPr txBox="1"/>
+          <p:nvPr/>
+        </p:nvSpPr>
+        <p:spPr>
+          <a:xfrm>
+            <a:off x="3703320" y="3831336"/>
+            <a:ext cx="7543800" cy="457200"/>
           </a:xfrm>
           <a:prstGeom prst="rect">
             <a:avLst/>
@@ -6501,19 +6516,19 @@
           <a:p>
             <a:pPr algn="l">
               <a:lnSpc>
-                <a:spcPct val="102000"/>
-              </a:lnSpc>
-              <a:spcBef>
-                <a:spcPts val="0"/>
-              </a:spcBef>
-              <a:spcAft>
-                <a:spcPts val="300"/>
-              </a:spcAft>
-            </a:pPr>
-            <a:r>
-              <a:rPr sz="1500" b="1" i="0">
-                <a:solidFill>
-                  <a:srgbClr val="FFFFFF"/>
+                <a:spcPct val="100000"/>
+              </a:lnSpc>
+              <a:spcBef>
+                <a:spcPts val="0"/>
+              </a:spcBef>
+              <a:spcAft>
+                <a:spcPts val="300"/>
+              </a:spcAft>
+            </a:pPr>
+            <a:r>
+              <a:rPr sz="1400" b="1" i="0">
+                <a:solidFill>
+                  <a:srgbClr val="0E213A"/>
                 </a:solidFill>
                 <a:latin typeface="Calibri"/>
               </a:rPr>
@@ -6524,127 +6539,28 @@
       </p:sp>
       <p:sp>
         <p:nvSpPr>
-          <p:cNvPr id="27" name="TextBox 26"/>
-          <p:cNvSpPr txBox="1"/>
-          <p:nvPr/>
-        </p:nvSpPr>
-        <p:spPr>
-          <a:xfrm>
-            <a:off x="914400" y="5385816"/>
-            <a:ext cx="2404872" cy="365760"/>
-          </a:xfrm>
-          <a:prstGeom prst="rect">
-            <a:avLst/>
-          </a:prstGeom>
-          <a:noFill/>
-        </p:spPr>
-        <p:txBody>
-          <a:bodyPr wrap="square" anchor="ctr" lIns="0" rIns="0" tIns="0" bIns="0">
+          <p:cNvPr id="29" name="TextBox 28"/>
+          <p:cNvSpPr txBox="1"/>
+          <p:nvPr/>
+        </p:nvSpPr>
+        <p:spPr>
+          <a:xfrm>
+            <a:off x="3703320" y="4343400"/>
+            <a:ext cx="7543800" cy="457200"/>
+          </a:xfrm>
+          <a:prstGeom prst="rect">
+            <a:avLst/>
+          </a:prstGeom>
+          <a:noFill/>
+        </p:spPr>
+        <p:txBody>
+          <a:bodyPr wrap="square" anchor="t" lIns="0" rIns="0" tIns="0" bIns="0">
             <a:spAutoFit/>
           </a:bodyPr>
           <a:lstStyle/>
           <a:p>
             <a:pPr algn="l">
               <a:lnSpc>
-                <a:spcPct val="100000"/>
-              </a:lnSpc>
-              <a:spcBef>
-                <a:spcPts val="0"/>
-              </a:spcBef>
-              <a:spcAft>
-                <a:spcPts val="300"/>
-              </a:spcAft>
-            </a:pPr>
-            <a:r>
-              <a:rPr sz="1000" b="0" i="0">
-                <a:solidFill>
-                  <a:srgbClr val="FFFFFF"/>
-                </a:solidFill>
-                <a:latin typeface="Calibri"/>
-              </a:rPr>
-              <a:t>● </a:t>
-            </a:r>
-            <a:r>
-              <a:rPr sz="1050" b="0" i="0">
-                <a:solidFill>
-                  <a:srgbClr val="FFFFFF"/>
-                </a:solidFill>
-                <a:latin typeface="Calibri"/>
-              </a:rPr>
-              <a:t>México</a:t>
-            </a:r>
-          </a:p>
-        </p:txBody>
-      </p:sp>
-      <p:sp>
-        <p:nvSpPr>
-          <p:cNvPr id="28" name="TextBox 27"/>
-          <p:cNvSpPr txBox="1"/>
-          <p:nvPr/>
-        </p:nvSpPr>
-        <p:spPr>
-          <a:xfrm>
-            <a:off x="3685032" y="3849624"/>
-            <a:ext cx="7543800" cy="219456"/>
-          </a:xfrm>
-          <a:prstGeom prst="rect">
-            <a:avLst/>
-          </a:prstGeom>
-          <a:noFill/>
-        </p:spPr>
-        <p:txBody>
-          <a:bodyPr wrap="square" anchor="t" lIns="0" rIns="0" tIns="0" bIns="0">
-            <a:spAutoFit/>
-          </a:bodyPr>
-          <a:lstStyle/>
-          <a:p>
-            <a:pPr algn="l">
-              <a:lnSpc>
-                <a:spcPct val="100000"/>
-              </a:lnSpc>
-              <a:spcBef>
-                <a:spcPts val="0"/>
-              </a:spcBef>
-              <a:spcAft>
-                <a:spcPts val="300"/>
-              </a:spcAft>
-            </a:pPr>
-            <a:r>
-              <a:rPr sz="950" b="1" i="0">
-                <a:solidFill>
-                  <a:srgbClr val="F5A623"/>
-                </a:solidFill>
-                <a:latin typeface="Calibri"/>
-              </a:rPr>
-              <a:t>FUNCIÓN</a:t>
-            </a:r>
-          </a:p>
-        </p:txBody>
-      </p:sp>
-      <p:sp>
-        <p:nvSpPr>
-          <p:cNvPr id="29" name="TextBox 28"/>
-          <p:cNvSpPr txBox="1"/>
-          <p:nvPr/>
-        </p:nvSpPr>
-        <p:spPr>
-          <a:xfrm>
-            <a:off x="3685032" y="4069080"/>
-            <a:ext cx="7543800" cy="566928"/>
-          </a:xfrm>
-          <a:prstGeom prst="rect">
-            <a:avLst/>
-          </a:prstGeom>
-          <a:noFill/>
-        </p:spPr>
-        <p:txBody>
-          <a:bodyPr wrap="square" anchor="t" lIns="0" rIns="0" tIns="0" bIns="0">
-            <a:spAutoFit/>
-          </a:bodyPr>
-          <a:lstStyle/>
-          <a:p>
-            <a:pPr algn="l">
-              <a:lnSpc>
                 <a:spcPct val="105000"/>
               </a:lnSpc>
               <a:spcBef>
@@ -6655,7 +6571,7 @@
               </a:spcAft>
             </a:pPr>
             <a:r>
-              <a:rPr sz="1150" b="0" i="0">
+              <a:rPr sz="1100" b="0" i="0">
                 <a:solidFill>
                   <a:srgbClr val="1A2432"/>
                 </a:solidFill>
@@ -6674,7 +6590,7 @@
         </p:nvSpPr>
         <p:spPr>
           <a:xfrm>
-            <a:off x="3685032" y="4718304"/>
+            <a:off x="3703320" y="4882896"/>
             <a:ext cx="118872" cy="118872"/>
           </a:xfrm>
           <a:prstGeom prst="roundRect">
@@ -6720,8 +6636,8 @@
         </p:nvSpPr>
         <p:spPr>
           <a:xfrm>
-            <a:off x="3941064" y="4672584"/>
-            <a:ext cx="7269480" cy="310896"/>
+            <a:off x="3959352" y="4837176"/>
+            <a:ext cx="7269480" cy="292608"/>
           </a:xfrm>
           <a:prstGeom prst="rect">
             <a:avLst/>
@@ -6746,7 +6662,7 @@
               </a:spcAft>
             </a:pPr>
             <a:r>
-              <a:rPr sz="1080" b="0" i="0">
+              <a:rPr sz="1050" b="0" i="0">
                 <a:solidFill>
                   <a:srgbClr val="5B6674"/>
                 </a:solidFill>
@@ -6765,7 +6681,7 @@
         </p:nvSpPr>
         <p:spPr>
           <a:xfrm>
-            <a:off x="3685032" y="5024628"/>
+            <a:off x="3703320" y="5157216"/>
             <a:ext cx="118872" cy="118872"/>
           </a:xfrm>
           <a:prstGeom prst="roundRect">
@@ -6811,8 +6727,8 @@
         </p:nvSpPr>
         <p:spPr>
           <a:xfrm>
-            <a:off x="3941064" y="4978908"/>
-            <a:ext cx="7269480" cy="310896"/>
+            <a:off x="3959352" y="5111496"/>
+            <a:ext cx="7269480" cy="292608"/>
           </a:xfrm>
           <a:prstGeom prst="rect">
             <a:avLst/>
@@ -6837,7 +6753,7 @@
               </a:spcAft>
             </a:pPr>
             <a:r>
-              <a:rPr sz="1080" b="0" i="0">
+              <a:rPr sz="1050" b="0" i="0">
                 <a:solidFill>
                   <a:srgbClr val="5B6674"/>
                 </a:solidFill>
@@ -6856,7 +6772,7 @@
         </p:nvSpPr>
         <p:spPr>
           <a:xfrm>
-            <a:off x="3685032" y="5330952"/>
+            <a:off x="3703320" y="5431536"/>
             <a:ext cx="118872" cy="118872"/>
           </a:xfrm>
           <a:prstGeom prst="roundRect">
@@ -6902,8 +6818,8 @@
         </p:nvSpPr>
         <p:spPr>
           <a:xfrm>
-            <a:off x="3941064" y="5285232"/>
-            <a:ext cx="7269480" cy="310896"/>
+            <a:off x="3959352" y="5385816"/>
+            <a:ext cx="7269480" cy="292608"/>
           </a:xfrm>
           <a:prstGeom prst="rect">
             <a:avLst/>
@@ -6928,7 +6844,7 @@
               </a:spcAft>
             </a:pPr>
             <a:r>
-              <a:rPr sz="1080" b="0" i="0">
+              <a:rPr sz="1050" b="0" i="0">
                 <a:solidFill>
                   <a:srgbClr val="5B6674"/>
                 </a:solidFill>
@@ -6947,8 +6863,8 @@
         </p:nvSpPr>
         <p:spPr>
           <a:xfrm>
-            <a:off x="3685032" y="5513832"/>
-            <a:ext cx="3931920" cy="347472"/>
+            <a:off x="3703320" y="5696712"/>
+            <a:ext cx="3931920" cy="292608"/>
           </a:xfrm>
           <a:prstGeom prst="rect">
             <a:avLst/>
@@ -7001,8 +6917,8 @@
         </p:nvSpPr>
         <p:spPr>
           <a:xfrm>
-            <a:off x="7662671" y="5513832"/>
-            <a:ext cx="3566160" cy="347472"/>
+            <a:off x="7680959" y="5696712"/>
+            <a:ext cx="3566160" cy="292608"/>
           </a:xfrm>
           <a:prstGeom prst="rect">
             <a:avLst/>
@@ -7351,7 +7267,7 @@
         <p:spPr>
           <a:xfrm>
             <a:off x="713232" y="1280160"/>
-            <a:ext cx="10771632" cy="2212848"/>
+            <a:ext cx="10771632" cy="2286000"/>
           </a:xfrm>
           <a:prstGeom prst="roundRect">
             <a:avLst>
@@ -7397,7 +7313,7 @@
         <p:spPr>
           <a:xfrm>
             <a:off x="713232" y="1280160"/>
-            <a:ext cx="2788920" cy="2212848"/>
+            <a:ext cx="2788920" cy="2286000"/>
           </a:xfrm>
           <a:prstGeom prst="roundRect">
             <a:avLst>
@@ -7443,7 +7359,7 @@
         <p:spPr>
           <a:xfrm>
             <a:off x="3374136" y="1298448"/>
-            <a:ext cx="128016" cy="2176272"/>
+            <a:ext cx="128016" cy="2249424"/>
           </a:xfrm>
           <a:prstGeom prst="rect">
             <a:avLst/>
@@ -7478,16 +7394,94 @@
           </a:p>
         </p:txBody>
       </p:sp>
-      <p:sp>
-        <p:nvSpPr>
-          <p:cNvPr id="11" name="TextBox 10"/>
-          <p:cNvSpPr txBox="1"/>
-          <p:nvPr/>
-        </p:nvSpPr>
-        <p:spPr>
-          <a:xfrm>
-            <a:off x="914400" y="1463040"/>
-            <a:ext cx="2404872" cy="1005840"/>
+      <p:pic>
+        <p:nvPicPr>
+          <p:cNvPr id="11" name="Picture 10" descr="no_despulpadora.png"/>
+          <p:cNvPicPr>
+            <a:picLocks noChangeAspect="1"/>
+          </p:cNvPicPr>
+          <p:nvPr/>
+        </p:nvPicPr>
+        <p:blipFill>
+          <a:blip r:embed="rId2"/>
+          <a:stretch>
+            <a:fillRect/>
+          </a:stretch>
+        </p:blipFill>
+        <p:spPr>
+          <a:xfrm>
+            <a:off x="969264" y="1426464"/>
+            <a:ext cx="2286000" cy="1413662"/>
+          </a:xfrm>
+          <a:prstGeom prst="rect">
+            <a:avLst/>
+          </a:prstGeom>
+        </p:spPr>
+      </p:pic>
+      <p:sp>
+        <p:nvSpPr>
+          <p:cNvPr id="12" name="TextBox 11"/>
+          <p:cNvSpPr txBox="1"/>
+          <p:nvPr/>
+        </p:nvSpPr>
+        <p:spPr>
+          <a:xfrm>
+            <a:off x="877824" y="3182112"/>
+            <a:ext cx="2514600" cy="292608"/>
+          </a:xfrm>
+          <a:prstGeom prst="rect">
+            <a:avLst/>
+          </a:prstGeom>
+          <a:noFill/>
+        </p:spPr>
+        <p:txBody>
+          <a:bodyPr wrap="square" anchor="ctr" lIns="0" rIns="0" tIns="0" bIns="0">
+            <a:spAutoFit/>
+          </a:bodyPr>
+          <a:lstStyle/>
+          <a:p>
+            <a:pPr algn="ctr">
+              <a:lnSpc>
+                <a:spcPct val="100000"/>
+              </a:lnSpc>
+              <a:spcBef>
+                <a:spcPts val="0"/>
+              </a:spcBef>
+              <a:spcAft>
+                <a:spcPts val="300"/>
+              </a:spcAft>
+            </a:pPr>
+            <a:r>
+              <a:rPr sz="900" b="0" i="0">
+                <a:solidFill>
+                  <a:srgbClr val="FFFFFF"/>
+                </a:solidFill>
+                <a:latin typeface="Calibri"/>
+              </a:rPr>
+              <a:t>● </a:t>
+            </a:r>
+            <a:r>
+              <a:rPr sz="1000" b="0" i="0">
+                <a:solidFill>
+                  <a:srgbClr val="FFFFFF"/>
+                </a:solidFill>
+                <a:latin typeface="Calibri"/>
+              </a:rPr>
+              <a:t>México · CDMX / Edo. Méx.</a:t>
+            </a:r>
+          </a:p>
+        </p:txBody>
+      </p:sp>
+      <p:sp>
+        <p:nvSpPr>
+          <p:cNvPr id="13" name="TextBox 12"/>
+          <p:cNvSpPr txBox="1"/>
+          <p:nvPr/>
+        </p:nvSpPr>
+        <p:spPr>
+          <a:xfrm>
+            <a:off x="3703320" y="1408176"/>
+            <a:ext cx="7543800" cy="457200"/>
           </a:xfrm>
           <a:prstGeom prst="rect">
             <a:avLst/>
@@ -7502,19 +7496,19 @@
           <a:p>
             <a:pPr algn="l">
               <a:lnSpc>
-                <a:spcPct val="102000"/>
-              </a:lnSpc>
-              <a:spcBef>
-                <a:spcPts val="0"/>
-              </a:spcBef>
-              <a:spcAft>
-                <a:spcPts val="300"/>
-              </a:spcAft>
-            </a:pPr>
-            <a:r>
-              <a:rPr sz="1500" b="1" i="0">
-                <a:solidFill>
-                  <a:srgbClr val="FFFFFF"/>
+                <a:spcPct val="100000"/>
+              </a:lnSpc>
+              <a:spcBef>
+                <a:spcPts val="0"/>
+              </a:spcBef>
+              <a:spcAft>
+                <a:spcPts val="300"/>
+              </a:spcAft>
+            </a:pPr>
+            <a:r>
+              <a:rPr sz="1400" b="1" i="0">
+                <a:solidFill>
+                  <a:srgbClr val="0E213A"/>
                 </a:solidFill>
                 <a:latin typeface="Calibri"/>
               </a:rPr>
@@ -7525,127 +7519,28 @@
       </p:sp>
       <p:sp>
         <p:nvSpPr>
-          <p:cNvPr id="12" name="TextBox 11"/>
-          <p:cNvSpPr txBox="1"/>
-          <p:nvPr/>
-        </p:nvSpPr>
-        <p:spPr>
-          <a:xfrm>
-            <a:off x="914400" y="2962656"/>
-            <a:ext cx="2404872" cy="365760"/>
-          </a:xfrm>
-          <a:prstGeom prst="rect">
-            <a:avLst/>
-          </a:prstGeom>
-          <a:noFill/>
-        </p:spPr>
-        <p:txBody>
-          <a:bodyPr wrap="square" anchor="ctr" lIns="0" rIns="0" tIns="0" bIns="0">
+          <p:cNvPr id="14" name="TextBox 13"/>
+          <p:cNvSpPr txBox="1"/>
+          <p:nvPr/>
+        </p:nvSpPr>
+        <p:spPr>
+          <a:xfrm>
+            <a:off x="3703320" y="1920240"/>
+            <a:ext cx="7543800" cy="457200"/>
+          </a:xfrm>
+          <a:prstGeom prst="rect">
+            <a:avLst/>
+          </a:prstGeom>
+          <a:noFill/>
+        </p:spPr>
+        <p:txBody>
+          <a:bodyPr wrap="square" anchor="t" lIns="0" rIns="0" tIns="0" bIns="0">
             <a:spAutoFit/>
           </a:bodyPr>
           <a:lstStyle/>
           <a:p>
             <a:pPr algn="l">
               <a:lnSpc>
-                <a:spcPct val="100000"/>
-              </a:lnSpc>
-              <a:spcBef>
-                <a:spcPts val="0"/>
-              </a:spcBef>
-              <a:spcAft>
-                <a:spcPts val="300"/>
-              </a:spcAft>
-            </a:pPr>
-            <a:r>
-              <a:rPr sz="1000" b="0" i="0">
-                <a:solidFill>
-                  <a:srgbClr val="FFFFFF"/>
-                </a:solidFill>
-                <a:latin typeface="Calibri"/>
-              </a:rPr>
-              <a:t>● </a:t>
-            </a:r>
-            <a:r>
-              <a:rPr sz="1050" b="0" i="0">
-                <a:solidFill>
-                  <a:srgbClr val="FFFFFF"/>
-                </a:solidFill>
-                <a:latin typeface="Calibri"/>
-              </a:rPr>
-              <a:t>México · CDMX / Edo. Méx.</a:t>
-            </a:r>
-          </a:p>
-        </p:txBody>
-      </p:sp>
-      <p:sp>
-        <p:nvSpPr>
-          <p:cNvPr id="13" name="TextBox 12"/>
-          <p:cNvSpPr txBox="1"/>
-          <p:nvPr/>
-        </p:nvSpPr>
-        <p:spPr>
-          <a:xfrm>
-            <a:off x="3685032" y="1426464"/>
-            <a:ext cx="7543800" cy="219456"/>
-          </a:xfrm>
-          <a:prstGeom prst="rect">
-            <a:avLst/>
-          </a:prstGeom>
-          <a:noFill/>
-        </p:spPr>
-        <p:txBody>
-          <a:bodyPr wrap="square" anchor="t" lIns="0" rIns="0" tIns="0" bIns="0">
-            <a:spAutoFit/>
-          </a:bodyPr>
-          <a:lstStyle/>
-          <a:p>
-            <a:pPr algn="l">
-              <a:lnSpc>
-                <a:spcPct val="100000"/>
-              </a:lnSpc>
-              <a:spcBef>
-                <a:spcPts val="0"/>
-              </a:spcBef>
-              <a:spcAft>
-                <a:spcPts val="300"/>
-              </a:spcAft>
-            </a:pPr>
-            <a:r>
-              <a:rPr sz="950" b="1" i="0">
-                <a:solidFill>
-                  <a:srgbClr val="F5A623"/>
-                </a:solidFill>
-                <a:latin typeface="Calibri"/>
-              </a:rPr>
-              <a:t>FUNCIÓN</a:t>
-            </a:r>
-          </a:p>
-        </p:txBody>
-      </p:sp>
-      <p:sp>
-        <p:nvSpPr>
-          <p:cNvPr id="14" name="TextBox 13"/>
-          <p:cNvSpPr txBox="1"/>
-          <p:nvPr/>
-        </p:nvSpPr>
-        <p:spPr>
-          <a:xfrm>
-            <a:off x="3685032" y="1645920"/>
-            <a:ext cx="7543800" cy="566928"/>
-          </a:xfrm>
-          <a:prstGeom prst="rect">
-            <a:avLst/>
-          </a:prstGeom>
-          <a:noFill/>
-        </p:spPr>
-        <p:txBody>
-          <a:bodyPr wrap="square" anchor="t" lIns="0" rIns="0" tIns="0" bIns="0">
-            <a:spAutoFit/>
-          </a:bodyPr>
-          <a:lstStyle/>
-          <a:p>
-            <a:pPr algn="l">
-              <a:lnSpc>
                 <a:spcPct val="105000"/>
               </a:lnSpc>
               <a:spcBef>
@@ -7656,7 +7551,7 @@
               </a:spcAft>
             </a:pPr>
             <a:r>
-              <a:rPr sz="1150" b="0" i="0">
+              <a:rPr sz="1100" b="0" i="0">
                 <a:solidFill>
                   <a:srgbClr val="1A2432"/>
                 </a:solidFill>
@@ -7675,7 +7570,7 @@
         </p:nvSpPr>
         <p:spPr>
           <a:xfrm>
-            <a:off x="3685032" y="2295144"/>
+            <a:off x="3703320" y="2459736"/>
             <a:ext cx="118872" cy="118872"/>
           </a:xfrm>
           <a:prstGeom prst="roundRect">
@@ -7721,8 +7616,8 @@
         </p:nvSpPr>
         <p:spPr>
           <a:xfrm>
-            <a:off x="3941064" y="2249424"/>
-            <a:ext cx="7269480" cy="310896"/>
+            <a:off x="3959352" y="2414016"/>
+            <a:ext cx="7269480" cy="292608"/>
           </a:xfrm>
           <a:prstGeom prst="rect">
             <a:avLst/>
@@ -7747,7 +7642,7 @@
               </a:spcAft>
             </a:pPr>
             <a:r>
-              <a:rPr sz="1080" b="0" i="0">
+              <a:rPr sz="1050" b="0" i="0">
                 <a:solidFill>
                   <a:srgbClr val="5B6674"/>
                 </a:solidFill>
@@ -7766,7 +7661,7 @@
         </p:nvSpPr>
         <p:spPr>
           <a:xfrm>
-            <a:off x="3685032" y="2601468"/>
+            <a:off x="3703320" y="2734056"/>
             <a:ext cx="118872" cy="118872"/>
           </a:xfrm>
           <a:prstGeom prst="roundRect">
@@ -7812,8 +7707,8 @@
         </p:nvSpPr>
         <p:spPr>
           <a:xfrm>
-            <a:off x="3941064" y="2555748"/>
-            <a:ext cx="7269480" cy="310896"/>
+            <a:off x="3959352" y="2688336"/>
+            <a:ext cx="7269480" cy="292608"/>
           </a:xfrm>
           <a:prstGeom prst="rect">
             <a:avLst/>
@@ -7838,7 +7733,7 @@
               </a:spcAft>
             </a:pPr>
             <a:r>
-              <a:rPr sz="1080" b="0" i="0">
+              <a:rPr sz="1050" b="0" i="0">
                 <a:solidFill>
                   <a:srgbClr val="5B6674"/>
                 </a:solidFill>
@@ -7857,7 +7752,7 @@
         </p:nvSpPr>
         <p:spPr>
           <a:xfrm>
-            <a:off x="3685032" y="2907792"/>
+            <a:off x="3703320" y="3008376"/>
             <a:ext cx="118872" cy="118872"/>
           </a:xfrm>
           <a:prstGeom prst="roundRect">
@@ -7903,8 +7798,8 @@
         </p:nvSpPr>
         <p:spPr>
           <a:xfrm>
-            <a:off x="3941064" y="2862072"/>
-            <a:ext cx="7269480" cy="310896"/>
+            <a:off x="3959352" y="2962656"/>
+            <a:ext cx="7269480" cy="292608"/>
           </a:xfrm>
           <a:prstGeom prst="rect">
             <a:avLst/>
@@ -7929,7 +7824,7 @@
               </a:spcAft>
             </a:pPr>
             <a:r>
-              <a:rPr sz="1080" b="0" i="0">
+              <a:rPr sz="1050" b="0" i="0">
                 <a:solidFill>
                   <a:srgbClr val="5B6674"/>
                 </a:solidFill>
@@ -7948,8 +7843,8 @@
         </p:nvSpPr>
         <p:spPr>
           <a:xfrm>
-            <a:off x="3685032" y="3090672"/>
-            <a:ext cx="3931920" cy="347472"/>
+            <a:off x="3703320" y="3273552"/>
+            <a:ext cx="3931920" cy="292608"/>
           </a:xfrm>
           <a:prstGeom prst="rect">
             <a:avLst/>
@@ -8002,8 +7897,8 @@
         </p:nvSpPr>
         <p:spPr>
           <a:xfrm>
-            <a:off x="7662671" y="3090672"/>
-            <a:ext cx="3566160" cy="347472"/>
+            <a:off x="7680959" y="3273552"/>
+            <a:ext cx="3566160" cy="292608"/>
           </a:xfrm>
           <a:prstGeom prst="rect">
             <a:avLst/>
@@ -8057,7 +7952,7 @@
         <p:spPr>
           <a:xfrm>
             <a:off x="713232" y="3703320"/>
-            <a:ext cx="10771632" cy="2212848"/>
+            <a:ext cx="10771632" cy="2286000"/>
           </a:xfrm>
           <a:prstGeom prst="roundRect">
             <a:avLst>
@@ -8103,7 +7998,7 @@
         <p:spPr>
           <a:xfrm>
             <a:off x="713232" y="3703320"/>
-            <a:ext cx="2788920" cy="2212848"/>
+            <a:ext cx="2788920" cy="2286000"/>
           </a:xfrm>
           <a:prstGeom prst="roundRect">
             <a:avLst>
@@ -8149,7 +8044,7 @@
         <p:spPr>
           <a:xfrm>
             <a:off x="3374136" y="3721608"/>
-            <a:ext cx="128016" cy="2176272"/>
+            <a:ext cx="128016" cy="2249424"/>
           </a:xfrm>
           <a:prstGeom prst="rect">
             <a:avLst/>
@@ -8184,16 +8079,94 @@
           </a:p>
         </p:txBody>
       </p:sp>
-      <p:sp>
-        <p:nvSpPr>
-          <p:cNvPr id="26" name="TextBox 25"/>
-          <p:cNvSpPr txBox="1"/>
-          <p:nvPr/>
-        </p:nvSpPr>
-        <p:spPr>
-          <a:xfrm>
-            <a:off x="914400" y="3886200"/>
-            <a:ext cx="2404872" cy="1005840"/>
+      <p:pic>
+        <p:nvPicPr>
+          <p:cNvPr id="26" name="Picture 25" descr="no_valor.png"/>
+          <p:cNvPicPr>
+            <a:picLocks noChangeAspect="1"/>
+          </p:cNvPicPr>
+          <p:nvPr/>
+        </p:nvPicPr>
+        <p:blipFill>
+          <a:blip r:embed="rId3"/>
+          <a:stretch>
+            <a:fillRect/>
+          </a:stretch>
+        </p:blipFill>
+        <p:spPr>
+          <a:xfrm>
+            <a:off x="969264" y="3849624"/>
+            <a:ext cx="2286000" cy="1413662"/>
+          </a:xfrm>
+          <a:prstGeom prst="rect">
+            <a:avLst/>
+          </a:prstGeom>
+        </p:spPr>
+      </p:pic>
+      <p:sp>
+        <p:nvSpPr>
+          <p:cNvPr id="27" name="TextBox 26"/>
+          <p:cNvSpPr txBox="1"/>
+          <p:nvPr/>
+        </p:nvSpPr>
+        <p:spPr>
+          <a:xfrm>
+            <a:off x="877824" y="5605272"/>
+            <a:ext cx="2514600" cy="292608"/>
+          </a:xfrm>
+          <a:prstGeom prst="rect">
+            <a:avLst/>
+          </a:prstGeom>
+          <a:noFill/>
+        </p:spPr>
+        <p:txBody>
+          <a:bodyPr wrap="square" anchor="ctr" lIns="0" rIns="0" tIns="0" bIns="0">
+            <a:spAutoFit/>
+          </a:bodyPr>
+          <a:lstStyle/>
+          <a:p>
+            <a:pPr algn="ctr">
+              <a:lnSpc>
+                <a:spcPct val="100000"/>
+              </a:lnSpc>
+              <a:spcBef>
+                <a:spcPts val="0"/>
+              </a:spcBef>
+              <a:spcAft>
+                <a:spcPts val="300"/>
+              </a:spcAft>
+            </a:pPr>
+            <a:r>
+              <a:rPr sz="900" b="0" i="0">
+                <a:solidFill>
+                  <a:srgbClr val="FFFFFF"/>
+                </a:solidFill>
+                <a:latin typeface="Calibri"/>
+              </a:rPr>
+              <a:t>● </a:t>
+            </a:r>
+            <a:r>
+              <a:rPr sz="1000" b="0" i="0">
+                <a:solidFill>
+                  <a:srgbClr val="FFFFFF"/>
+                </a:solidFill>
+                <a:latin typeface="Calibri"/>
+              </a:rPr>
+              <a:t>Proceso</a:t>
+            </a:r>
+          </a:p>
+        </p:txBody>
+      </p:sp>
+      <p:sp>
+        <p:nvSpPr>
+          <p:cNvPr id="28" name="TextBox 27"/>
+          <p:cNvSpPr txBox="1"/>
+          <p:nvPr/>
+        </p:nvSpPr>
+        <p:spPr>
+          <a:xfrm>
+            <a:off x="3703320" y="3831336"/>
+            <a:ext cx="7543800" cy="457200"/>
           </a:xfrm>
           <a:prstGeom prst="rect">
             <a:avLst/>
@@ -8208,19 +8181,19 @@
           <a:p>
             <a:pPr algn="l">
               <a:lnSpc>
-                <a:spcPct val="102000"/>
-              </a:lnSpc>
-              <a:spcBef>
-                <a:spcPts val="0"/>
-              </a:spcBef>
-              <a:spcAft>
-                <a:spcPts val="300"/>
-              </a:spcAft>
-            </a:pPr>
-            <a:r>
-              <a:rPr sz="1500" b="1" i="0">
-                <a:solidFill>
-                  <a:srgbClr val="FFFFFF"/>
+                <a:spcPct val="100000"/>
+              </a:lnSpc>
+              <a:spcBef>
+                <a:spcPts val="0"/>
+              </a:spcBef>
+              <a:spcAft>
+                <a:spcPts val="300"/>
+              </a:spcAft>
+            </a:pPr>
+            <a:r>
+              <a:rPr sz="1400" b="1" i="0">
+                <a:solidFill>
+                  <a:srgbClr val="0E213A"/>
                 </a:solidFill>
                 <a:latin typeface="Calibri"/>
               </a:rPr>
@@ -8231,127 +8204,28 @@
       </p:sp>
       <p:sp>
         <p:nvSpPr>
-          <p:cNvPr id="27" name="TextBox 26"/>
-          <p:cNvSpPr txBox="1"/>
-          <p:nvPr/>
-        </p:nvSpPr>
-        <p:spPr>
-          <a:xfrm>
-            <a:off x="914400" y="5385816"/>
-            <a:ext cx="2404872" cy="365760"/>
-          </a:xfrm>
-          <a:prstGeom prst="rect">
-            <a:avLst/>
-          </a:prstGeom>
-          <a:noFill/>
-        </p:spPr>
-        <p:txBody>
-          <a:bodyPr wrap="square" anchor="ctr" lIns="0" rIns="0" tIns="0" bIns="0">
+          <p:cNvPr id="29" name="TextBox 28"/>
+          <p:cNvSpPr txBox="1"/>
+          <p:nvPr/>
+        </p:nvSpPr>
+        <p:spPr>
+          <a:xfrm>
+            <a:off x="3703320" y="4343400"/>
+            <a:ext cx="7543800" cy="457200"/>
+          </a:xfrm>
+          <a:prstGeom prst="rect">
+            <a:avLst/>
+          </a:prstGeom>
+          <a:noFill/>
+        </p:spPr>
+        <p:txBody>
+          <a:bodyPr wrap="square" anchor="t" lIns="0" rIns="0" tIns="0" bIns="0">
             <a:spAutoFit/>
           </a:bodyPr>
           <a:lstStyle/>
           <a:p>
             <a:pPr algn="l">
               <a:lnSpc>
-                <a:spcPct val="100000"/>
-              </a:lnSpc>
-              <a:spcBef>
-                <a:spcPts val="0"/>
-              </a:spcBef>
-              <a:spcAft>
-                <a:spcPts val="300"/>
-              </a:spcAft>
-            </a:pPr>
-            <a:r>
-              <a:rPr sz="1000" b="0" i="0">
-                <a:solidFill>
-                  <a:srgbClr val="FFFFFF"/>
-                </a:solidFill>
-                <a:latin typeface="Calibri"/>
-              </a:rPr>
-              <a:t>● </a:t>
-            </a:r>
-            <a:r>
-              <a:rPr sz="1050" b="0" i="0">
-                <a:solidFill>
-                  <a:srgbClr val="FFFFFF"/>
-                </a:solidFill>
-                <a:latin typeface="Calibri"/>
-              </a:rPr>
-              <a:t>Proceso</a:t>
-            </a:r>
-          </a:p>
-        </p:txBody>
-      </p:sp>
-      <p:sp>
-        <p:nvSpPr>
-          <p:cNvPr id="28" name="TextBox 27"/>
-          <p:cNvSpPr txBox="1"/>
-          <p:nvPr/>
-        </p:nvSpPr>
-        <p:spPr>
-          <a:xfrm>
-            <a:off x="3685032" y="3849624"/>
-            <a:ext cx="7543800" cy="219456"/>
-          </a:xfrm>
-          <a:prstGeom prst="rect">
-            <a:avLst/>
-          </a:prstGeom>
-          <a:noFill/>
-        </p:spPr>
-        <p:txBody>
-          <a:bodyPr wrap="square" anchor="t" lIns="0" rIns="0" tIns="0" bIns="0">
-            <a:spAutoFit/>
-          </a:bodyPr>
-          <a:lstStyle/>
-          <a:p>
-            <a:pPr algn="l">
-              <a:lnSpc>
-                <a:spcPct val="100000"/>
-              </a:lnSpc>
-              <a:spcBef>
-                <a:spcPts val="0"/>
-              </a:spcBef>
-              <a:spcAft>
-                <a:spcPts val="300"/>
-              </a:spcAft>
-            </a:pPr>
-            <a:r>
-              <a:rPr sz="950" b="1" i="0">
-                <a:solidFill>
-                  <a:srgbClr val="F5A623"/>
-                </a:solidFill>
-                <a:latin typeface="Calibri"/>
-              </a:rPr>
-              <a:t>FUNCIÓN</a:t>
-            </a:r>
-          </a:p>
-        </p:txBody>
-      </p:sp>
-      <p:sp>
-        <p:nvSpPr>
-          <p:cNvPr id="29" name="TextBox 28"/>
-          <p:cNvSpPr txBox="1"/>
-          <p:nvPr/>
-        </p:nvSpPr>
-        <p:spPr>
-          <a:xfrm>
-            <a:off x="3685032" y="4069080"/>
-            <a:ext cx="7543800" cy="566928"/>
-          </a:xfrm>
-          <a:prstGeom prst="rect">
-            <a:avLst/>
-          </a:prstGeom>
-          <a:noFill/>
-        </p:spPr>
-        <p:txBody>
-          <a:bodyPr wrap="square" anchor="t" lIns="0" rIns="0" tIns="0" bIns="0">
-            <a:spAutoFit/>
-          </a:bodyPr>
-          <a:lstStyle/>
-          <a:p>
-            <a:pPr algn="l">
-              <a:lnSpc>
                 <a:spcPct val="105000"/>
               </a:lnSpc>
               <a:spcBef>
@@ -8362,7 +8236,7 @@
               </a:spcAft>
             </a:pPr>
             <a:r>
-              <a:rPr sz="1150" b="0" i="0">
+              <a:rPr sz="1100" b="0" i="0">
                 <a:solidFill>
                   <a:srgbClr val="1A2432"/>
                 </a:solidFill>
@@ -8381,7 +8255,7 @@
         </p:nvSpPr>
         <p:spPr>
           <a:xfrm>
-            <a:off x="3685032" y="4718304"/>
+            <a:off x="3703320" y="4882896"/>
             <a:ext cx="118872" cy="118872"/>
           </a:xfrm>
           <a:prstGeom prst="roundRect">
@@ -8427,8 +8301,8 @@
         </p:nvSpPr>
         <p:spPr>
           <a:xfrm>
-            <a:off x="3941064" y="4672584"/>
-            <a:ext cx="7269480" cy="310896"/>
+            <a:off x="3959352" y="4837176"/>
+            <a:ext cx="7269480" cy="292608"/>
           </a:xfrm>
           <a:prstGeom prst="rect">
             <a:avLst/>
@@ -8453,7 +8327,7 @@
               </a:spcAft>
             </a:pPr>
             <a:r>
-              <a:rPr sz="1080" b="0" i="0">
+              <a:rPr sz="1050" b="0" i="0">
                 <a:solidFill>
                   <a:srgbClr val="5B6674"/>
                 </a:solidFill>
@@ -8472,7 +8346,7 @@
         </p:nvSpPr>
         <p:spPr>
           <a:xfrm>
-            <a:off x="3685032" y="5024628"/>
+            <a:off x="3703320" y="5157216"/>
             <a:ext cx="118872" cy="118872"/>
           </a:xfrm>
           <a:prstGeom prst="roundRect">
@@ -8518,8 +8392,8 @@
         </p:nvSpPr>
         <p:spPr>
           <a:xfrm>
-            <a:off x="3941064" y="4978908"/>
-            <a:ext cx="7269480" cy="310896"/>
+            <a:off x="3959352" y="5111496"/>
+            <a:ext cx="7269480" cy="292608"/>
           </a:xfrm>
           <a:prstGeom prst="rect">
             <a:avLst/>
@@ -8544,7 +8418,7 @@
               </a:spcAft>
             </a:pPr>
             <a:r>
-              <a:rPr sz="1080" b="0" i="0">
+              <a:rPr sz="1050" b="0" i="0">
                 <a:solidFill>
                   <a:srgbClr val="5B6674"/>
                 </a:solidFill>
@@ -8563,7 +8437,7 @@
         </p:nvSpPr>
         <p:spPr>
           <a:xfrm>
-            <a:off x="3685032" y="5330952"/>
+            <a:off x="3703320" y="5431536"/>
             <a:ext cx="118872" cy="118872"/>
           </a:xfrm>
           <a:prstGeom prst="roundRect">
@@ -8609,8 +8483,8 @@
         </p:nvSpPr>
         <p:spPr>
           <a:xfrm>
-            <a:off x="3941064" y="5285232"/>
-            <a:ext cx="7269480" cy="310896"/>
+            <a:off x="3959352" y="5385816"/>
+            <a:ext cx="7269480" cy="292608"/>
           </a:xfrm>
           <a:prstGeom prst="rect">
             <a:avLst/>
@@ -8635,7 +8509,7 @@
               </a:spcAft>
             </a:pPr>
             <a:r>
-              <a:rPr sz="1080" b="0" i="0">
+              <a:rPr sz="1050" b="0" i="0">
                 <a:solidFill>
                   <a:srgbClr val="5B6674"/>
                 </a:solidFill>
@@ -8654,8 +8528,8 @@
         </p:nvSpPr>
         <p:spPr>
           <a:xfrm>
-            <a:off x="3685032" y="5513832"/>
-            <a:ext cx="3931920" cy="347472"/>
+            <a:off x="3703320" y="5696712"/>
+            <a:ext cx="3931920" cy="292608"/>
           </a:xfrm>
           <a:prstGeom prst="rect">
             <a:avLst/>
@@ -8708,8 +8582,8 @@
         </p:nvSpPr>
         <p:spPr>
           <a:xfrm>
-            <a:off x="7662671" y="5513832"/>
-            <a:ext cx="3566160" cy="347472"/>
+            <a:off x="7680959" y="5696712"/>
+            <a:ext cx="3566160" cy="292608"/>
           </a:xfrm>
           <a:prstGeom prst="rect">
             <a:avLst/>
@@ -9058,7 +8932,7 @@
         <p:spPr>
           <a:xfrm>
             <a:off x="713232" y="1280160"/>
-            <a:ext cx="10771632" cy="2212848"/>
+            <a:ext cx="10771632" cy="2286000"/>
           </a:xfrm>
           <a:prstGeom prst="roundRect">
             <a:avLst>
@@ -9104,7 +8978,7 @@
         <p:spPr>
           <a:xfrm>
             <a:off x="713232" y="1280160"/>
-            <a:ext cx="2788920" cy="2212848"/>
+            <a:ext cx="2788920" cy="2286000"/>
           </a:xfrm>
           <a:prstGeom prst="roundRect">
             <a:avLst>
@@ -9150,7 +9024,7 @@
         <p:spPr>
           <a:xfrm>
             <a:off x="3374136" y="1298448"/>
-            <a:ext cx="128016" cy="2176272"/>
+            <a:ext cx="128016" cy="2249424"/>
           </a:xfrm>
           <a:prstGeom prst="rect">
             <a:avLst/>
@@ -9185,16 +9059,94 @@
           </a:p>
         </p:txBody>
       </p:sp>
-      <p:sp>
-        <p:nvSpPr>
-          <p:cNvPr id="11" name="TextBox 10"/>
-          <p:cNvSpPr txBox="1"/>
-          <p:nvPr/>
-        </p:nvSpPr>
-        <p:spPr>
-          <a:xfrm>
-            <a:off x="914400" y="1463040"/>
-            <a:ext cx="2404872" cy="1005840"/>
+      <p:pic>
+        <p:nvPicPr>
+          <p:cNvPr id="11" name="Picture 10" descr="no_dosificadora.png"/>
+          <p:cNvPicPr>
+            <a:picLocks noChangeAspect="1"/>
+          </p:cNvPicPr>
+          <p:nvPr/>
+        </p:nvPicPr>
+        <p:blipFill>
+          <a:blip r:embed="rId2"/>
+          <a:stretch>
+            <a:fillRect/>
+          </a:stretch>
+        </p:blipFill>
+        <p:spPr>
+          <a:xfrm>
+            <a:off x="969264" y="1426464"/>
+            <a:ext cx="2286000" cy="1413662"/>
+          </a:xfrm>
+          <a:prstGeom prst="rect">
+            <a:avLst/>
+          </a:prstGeom>
+        </p:spPr>
+      </p:pic>
+      <p:sp>
+        <p:nvSpPr>
+          <p:cNvPr id="12" name="TextBox 11"/>
+          <p:cNvSpPr txBox="1"/>
+          <p:nvPr/>
+        </p:nvSpPr>
+        <p:spPr>
+          <a:xfrm>
+            <a:off x="877824" y="3182112"/>
+            <a:ext cx="2514600" cy="292608"/>
+          </a:xfrm>
+          <a:prstGeom prst="rect">
+            <a:avLst/>
+          </a:prstGeom>
+          <a:noFill/>
+        </p:spPr>
+        <p:txBody>
+          <a:bodyPr wrap="square" anchor="ctr" lIns="0" rIns="0" tIns="0" bIns="0">
+            <a:spAutoFit/>
+          </a:bodyPr>
+          <a:lstStyle/>
+          <a:p>
+            <a:pPr algn="ctr">
+              <a:lnSpc>
+                <a:spcPct val="100000"/>
+              </a:lnSpc>
+              <a:spcBef>
+                <a:spcPts val="0"/>
+              </a:spcBef>
+              <a:spcAft>
+                <a:spcPts val="300"/>
+              </a:spcAft>
+            </a:pPr>
+            <a:r>
+              <a:rPr sz="900" b="0" i="0">
+                <a:solidFill>
+                  <a:srgbClr val="FFFFFF"/>
+                </a:solidFill>
+                <a:latin typeface="Calibri"/>
+              </a:rPr>
+              <a:t>● </a:t>
+            </a:r>
+            <a:r>
+              <a:rPr sz="1000" b="0" i="0">
+                <a:solidFill>
+                  <a:srgbClr val="FFFFFF"/>
+                </a:solidFill>
+                <a:latin typeface="Calibri"/>
+              </a:rPr>
+              <a:t>México · Nuevo León</a:t>
+            </a:r>
+          </a:p>
+        </p:txBody>
+      </p:sp>
+      <p:sp>
+        <p:nvSpPr>
+          <p:cNvPr id="13" name="TextBox 12"/>
+          <p:cNvSpPr txBox="1"/>
+          <p:nvPr/>
+        </p:nvSpPr>
+        <p:spPr>
+          <a:xfrm>
+            <a:off x="3703320" y="1408176"/>
+            <a:ext cx="7543800" cy="457200"/>
           </a:xfrm>
           <a:prstGeom prst="rect">
             <a:avLst/>
@@ -9209,19 +9161,19 @@
           <a:p>
             <a:pPr algn="l">
               <a:lnSpc>
-                <a:spcPct val="102000"/>
-              </a:lnSpc>
-              <a:spcBef>
-                <a:spcPts val="0"/>
-              </a:spcBef>
-              <a:spcAft>
-                <a:spcPts val="300"/>
-              </a:spcAft>
-            </a:pPr>
-            <a:r>
-              <a:rPr sz="1500" b="1" i="0">
-                <a:solidFill>
-                  <a:srgbClr val="FFFFFF"/>
+                <a:spcPct val="100000"/>
+              </a:lnSpc>
+              <a:spcBef>
+                <a:spcPts val="0"/>
+              </a:spcBef>
+              <a:spcAft>
+                <a:spcPts val="300"/>
+              </a:spcAft>
+            </a:pPr>
+            <a:r>
+              <a:rPr sz="1400" b="1" i="0">
+                <a:solidFill>
+                  <a:srgbClr val="0E213A"/>
                 </a:solidFill>
                 <a:latin typeface="Calibri"/>
               </a:rPr>
@@ -9232,127 +9184,28 @@
       </p:sp>
       <p:sp>
         <p:nvSpPr>
-          <p:cNvPr id="12" name="TextBox 11"/>
-          <p:cNvSpPr txBox="1"/>
-          <p:nvPr/>
-        </p:nvSpPr>
-        <p:spPr>
-          <a:xfrm>
-            <a:off x="914400" y="2962656"/>
-            <a:ext cx="2404872" cy="365760"/>
-          </a:xfrm>
-          <a:prstGeom prst="rect">
-            <a:avLst/>
-          </a:prstGeom>
-          <a:noFill/>
-        </p:spPr>
-        <p:txBody>
-          <a:bodyPr wrap="square" anchor="ctr" lIns="0" rIns="0" tIns="0" bIns="0">
+          <p:cNvPr id="14" name="TextBox 13"/>
+          <p:cNvSpPr txBox="1"/>
+          <p:nvPr/>
+        </p:nvSpPr>
+        <p:spPr>
+          <a:xfrm>
+            <a:off x="3703320" y="1920240"/>
+            <a:ext cx="7543800" cy="457200"/>
+          </a:xfrm>
+          <a:prstGeom prst="rect">
+            <a:avLst/>
+          </a:prstGeom>
+          <a:noFill/>
+        </p:spPr>
+        <p:txBody>
+          <a:bodyPr wrap="square" anchor="t" lIns="0" rIns="0" tIns="0" bIns="0">
             <a:spAutoFit/>
           </a:bodyPr>
           <a:lstStyle/>
           <a:p>
             <a:pPr algn="l">
               <a:lnSpc>
-                <a:spcPct val="100000"/>
-              </a:lnSpc>
-              <a:spcBef>
-                <a:spcPts val="0"/>
-              </a:spcBef>
-              <a:spcAft>
-                <a:spcPts val="300"/>
-              </a:spcAft>
-            </a:pPr>
-            <a:r>
-              <a:rPr sz="1000" b="0" i="0">
-                <a:solidFill>
-                  <a:srgbClr val="FFFFFF"/>
-                </a:solidFill>
-                <a:latin typeface="Calibri"/>
-              </a:rPr>
-              <a:t>● </a:t>
-            </a:r>
-            <a:r>
-              <a:rPr sz="1050" b="0" i="0">
-                <a:solidFill>
-                  <a:srgbClr val="FFFFFF"/>
-                </a:solidFill>
-                <a:latin typeface="Calibri"/>
-              </a:rPr>
-              <a:t>México · Nuevo León</a:t>
-            </a:r>
-          </a:p>
-        </p:txBody>
-      </p:sp>
-      <p:sp>
-        <p:nvSpPr>
-          <p:cNvPr id="13" name="TextBox 12"/>
-          <p:cNvSpPr txBox="1"/>
-          <p:nvPr/>
-        </p:nvSpPr>
-        <p:spPr>
-          <a:xfrm>
-            <a:off x="3685032" y="1426464"/>
-            <a:ext cx="7543800" cy="219456"/>
-          </a:xfrm>
-          <a:prstGeom prst="rect">
-            <a:avLst/>
-          </a:prstGeom>
-          <a:noFill/>
-        </p:spPr>
-        <p:txBody>
-          <a:bodyPr wrap="square" anchor="t" lIns="0" rIns="0" tIns="0" bIns="0">
-            <a:spAutoFit/>
-          </a:bodyPr>
-          <a:lstStyle/>
-          <a:p>
-            <a:pPr algn="l">
-              <a:lnSpc>
-                <a:spcPct val="100000"/>
-              </a:lnSpc>
-              <a:spcBef>
-                <a:spcPts val="0"/>
-              </a:spcBef>
-              <a:spcAft>
-                <a:spcPts val="300"/>
-              </a:spcAft>
-            </a:pPr>
-            <a:r>
-              <a:rPr sz="950" b="1" i="0">
-                <a:solidFill>
-                  <a:srgbClr val="0E213A"/>
-                </a:solidFill>
-                <a:latin typeface="Calibri"/>
-              </a:rPr>
-              <a:t>FUNCIÓN</a:t>
-            </a:r>
-          </a:p>
-        </p:txBody>
-      </p:sp>
-      <p:sp>
-        <p:nvSpPr>
-          <p:cNvPr id="14" name="TextBox 13"/>
-          <p:cNvSpPr txBox="1"/>
-          <p:nvPr/>
-        </p:nvSpPr>
-        <p:spPr>
-          <a:xfrm>
-            <a:off x="3685032" y="1645920"/>
-            <a:ext cx="7543800" cy="566928"/>
-          </a:xfrm>
-          <a:prstGeom prst="rect">
-            <a:avLst/>
-          </a:prstGeom>
-          <a:noFill/>
-        </p:spPr>
-        <p:txBody>
-          <a:bodyPr wrap="square" anchor="t" lIns="0" rIns="0" tIns="0" bIns="0">
-            <a:spAutoFit/>
-          </a:bodyPr>
-          <a:lstStyle/>
-          <a:p>
-            <a:pPr algn="l">
-              <a:lnSpc>
                 <a:spcPct val="105000"/>
               </a:lnSpc>
               <a:spcBef>
@@ -9363,7 +9216,7 @@
               </a:spcAft>
             </a:pPr>
             <a:r>
-              <a:rPr sz="1150" b="0" i="0">
+              <a:rPr sz="1100" b="0" i="0">
                 <a:solidFill>
                   <a:srgbClr val="1A2432"/>
                 </a:solidFill>
@@ -9382,7 +9235,7 @@
         </p:nvSpPr>
         <p:spPr>
           <a:xfrm>
-            <a:off x="3685032" y="2295144"/>
+            <a:off x="3703320" y="2459736"/>
             <a:ext cx="118872" cy="118872"/>
           </a:xfrm>
           <a:prstGeom prst="roundRect">
@@ -9428,8 +9281,8 @@
         </p:nvSpPr>
         <p:spPr>
           <a:xfrm>
-            <a:off x="3941064" y="2249424"/>
-            <a:ext cx="7269480" cy="310896"/>
+            <a:off x="3959352" y="2414016"/>
+            <a:ext cx="7269480" cy="292608"/>
           </a:xfrm>
           <a:prstGeom prst="rect">
             <a:avLst/>
@@ -9454,7 +9307,7 @@
               </a:spcAft>
             </a:pPr>
             <a:r>
-              <a:rPr sz="1080" b="0" i="0">
+              <a:rPr sz="1050" b="0" i="0">
                 <a:solidFill>
                   <a:srgbClr val="5B6674"/>
                 </a:solidFill>
@@ -9473,7 +9326,7 @@
         </p:nvSpPr>
         <p:spPr>
           <a:xfrm>
-            <a:off x="3685032" y="2601468"/>
+            <a:off x="3703320" y="2734056"/>
             <a:ext cx="118872" cy="118872"/>
           </a:xfrm>
           <a:prstGeom prst="roundRect">
@@ -9519,8 +9372,8 @@
         </p:nvSpPr>
         <p:spPr>
           <a:xfrm>
-            <a:off x="3941064" y="2555748"/>
-            <a:ext cx="7269480" cy="310896"/>
+            <a:off x="3959352" y="2688336"/>
+            <a:ext cx="7269480" cy="292608"/>
           </a:xfrm>
           <a:prstGeom prst="rect">
             <a:avLst/>
@@ -9545,7 +9398,7 @@
               </a:spcAft>
             </a:pPr>
             <a:r>
-              <a:rPr sz="1080" b="0" i="0">
+              <a:rPr sz="1050" b="0" i="0">
                 <a:solidFill>
                   <a:srgbClr val="5B6674"/>
                 </a:solidFill>
@@ -9564,7 +9417,7 @@
         </p:nvSpPr>
         <p:spPr>
           <a:xfrm>
-            <a:off x="3685032" y="2907792"/>
+            <a:off x="3703320" y="3008376"/>
             <a:ext cx="118872" cy="118872"/>
           </a:xfrm>
           <a:prstGeom prst="roundRect">
@@ -9610,8 +9463,8 @@
         </p:nvSpPr>
         <p:spPr>
           <a:xfrm>
-            <a:off x="3941064" y="2862072"/>
-            <a:ext cx="7269480" cy="310896"/>
+            <a:off x="3959352" y="2962656"/>
+            <a:ext cx="7269480" cy="292608"/>
           </a:xfrm>
           <a:prstGeom prst="rect">
             <a:avLst/>
@@ -9636,7 +9489,7 @@
               </a:spcAft>
             </a:pPr>
             <a:r>
-              <a:rPr sz="1080" b="0" i="0">
+              <a:rPr sz="1050" b="0" i="0">
                 <a:solidFill>
                   <a:srgbClr val="5B6674"/>
                 </a:solidFill>
@@ -9655,8 +9508,8 @@
         </p:nvSpPr>
         <p:spPr>
           <a:xfrm>
-            <a:off x="3685032" y="3090672"/>
-            <a:ext cx="3931920" cy="347472"/>
+            <a:off x="3703320" y="3273552"/>
+            <a:ext cx="3931920" cy="292608"/>
           </a:xfrm>
           <a:prstGeom prst="rect">
             <a:avLst/>
@@ -9709,8 +9562,8 @@
         </p:nvSpPr>
         <p:spPr>
           <a:xfrm>
-            <a:off x="7662671" y="3090672"/>
-            <a:ext cx="3566160" cy="347472"/>
+            <a:off x="7680959" y="3273552"/>
+            <a:ext cx="3566160" cy="292608"/>
           </a:xfrm>
           <a:prstGeom prst="rect">
             <a:avLst/>
@@ -9764,7 +9617,7 @@
         <p:spPr>
           <a:xfrm>
             <a:off x="713232" y="3703320"/>
-            <a:ext cx="10771632" cy="2212848"/>
+            <a:ext cx="10771632" cy="2286000"/>
           </a:xfrm>
           <a:prstGeom prst="roundRect">
             <a:avLst>
@@ -9810,7 +9663,7 @@
         <p:spPr>
           <a:xfrm>
             <a:off x="713232" y="3703320"/>
-            <a:ext cx="2788920" cy="2212848"/>
+            <a:ext cx="2788920" cy="2286000"/>
           </a:xfrm>
           <a:prstGeom prst="roundRect">
             <a:avLst>
@@ -9856,7 +9709,7 @@
         <p:spPr>
           <a:xfrm>
             <a:off x="3374136" y="3721608"/>
-            <a:ext cx="128016" cy="2176272"/>
+            <a:ext cx="128016" cy="2249424"/>
           </a:xfrm>
           <a:prstGeom prst="rect">
             <a:avLst/>
@@ -9891,16 +9744,94 @@
           </a:p>
         </p:txBody>
       </p:sp>
-      <p:sp>
-        <p:nvSpPr>
-          <p:cNvPr id="26" name="TextBox 25"/>
-          <p:cNvSpPr txBox="1"/>
-          <p:nvPr/>
-        </p:nvSpPr>
-        <p:spPr>
-          <a:xfrm>
-            <a:off x="914400" y="3886200"/>
-            <a:ext cx="2404872" cy="1005840"/>
+      <p:pic>
+        <p:nvPicPr>
+          <p:cNvPr id="26" name="Picture 25" descr="no_map.png"/>
+          <p:cNvPicPr>
+            <a:picLocks noChangeAspect="1"/>
+          </p:cNvPicPr>
+          <p:nvPr/>
+        </p:nvPicPr>
+        <p:blipFill>
+          <a:blip r:embed="rId3"/>
+          <a:stretch>
+            <a:fillRect/>
+          </a:stretch>
+        </p:blipFill>
+        <p:spPr>
+          <a:xfrm>
+            <a:off x="969264" y="3849624"/>
+            <a:ext cx="2286000" cy="1413662"/>
+          </a:xfrm>
+          <a:prstGeom prst="rect">
+            <a:avLst/>
+          </a:prstGeom>
+        </p:spPr>
+      </p:pic>
+      <p:sp>
+        <p:nvSpPr>
+          <p:cNvPr id="27" name="TextBox 26"/>
+          <p:cNvSpPr txBox="1"/>
+          <p:nvPr/>
+        </p:nvSpPr>
+        <p:spPr>
+          <a:xfrm>
+            <a:off x="877824" y="5605272"/>
+            <a:ext cx="2514600" cy="292608"/>
+          </a:xfrm>
+          <a:prstGeom prst="rect">
+            <a:avLst/>
+          </a:prstGeom>
+          <a:noFill/>
+        </p:spPr>
+        <p:txBody>
+          <a:bodyPr wrap="square" anchor="ctr" lIns="0" rIns="0" tIns="0" bIns="0">
+            <a:spAutoFit/>
+          </a:bodyPr>
+          <a:lstStyle/>
+          <a:p>
+            <a:pPr algn="ctr">
+              <a:lnSpc>
+                <a:spcPct val="100000"/>
+              </a:lnSpc>
+              <a:spcBef>
+                <a:spcPts val="0"/>
+              </a:spcBef>
+              <a:spcAft>
+                <a:spcPts val="300"/>
+              </a:spcAft>
+            </a:pPr>
+            <a:r>
+              <a:rPr sz="900" b="0" i="0">
+                <a:solidFill>
+                  <a:srgbClr val="FFFFFF"/>
+                </a:solidFill>
+                <a:latin typeface="Calibri"/>
+              </a:rPr>
+              <a:t>● </a:t>
+            </a:r>
+            <a:r>
+              <a:rPr sz="1000" b="0" i="0">
+                <a:solidFill>
+                  <a:srgbClr val="FFFFFF"/>
+                </a:solidFill>
+                <a:latin typeface="Calibri"/>
+              </a:rPr>
+              <a:t>México</a:t>
+            </a:r>
+          </a:p>
+        </p:txBody>
+      </p:sp>
+      <p:sp>
+        <p:nvSpPr>
+          <p:cNvPr id="28" name="TextBox 27"/>
+          <p:cNvSpPr txBox="1"/>
+          <p:nvPr/>
+        </p:nvSpPr>
+        <p:spPr>
+          <a:xfrm>
+            <a:off x="3703320" y="3831336"/>
+            <a:ext cx="7543800" cy="457200"/>
           </a:xfrm>
           <a:prstGeom prst="rect">
             <a:avLst/>
@@ -9915,19 +9846,19 @@
           <a:p>
             <a:pPr algn="l">
               <a:lnSpc>
-                <a:spcPct val="102000"/>
-              </a:lnSpc>
-              <a:spcBef>
-                <a:spcPts val="0"/>
-              </a:spcBef>
-              <a:spcAft>
-                <a:spcPts val="300"/>
-              </a:spcAft>
-            </a:pPr>
-            <a:r>
-              <a:rPr sz="1500" b="1" i="0">
-                <a:solidFill>
-                  <a:srgbClr val="FFFFFF"/>
+                <a:spcPct val="100000"/>
+              </a:lnSpc>
+              <a:spcBef>
+                <a:spcPts val="0"/>
+              </a:spcBef>
+              <a:spcAft>
+                <a:spcPts val="300"/>
+              </a:spcAft>
+            </a:pPr>
+            <a:r>
+              <a:rPr sz="1400" b="1" i="0">
+                <a:solidFill>
+                  <a:srgbClr val="0E213A"/>
                 </a:solidFill>
                 <a:latin typeface="Calibri"/>
               </a:rPr>
@@ -9938,127 +9869,28 @@
       </p:sp>
       <p:sp>
         <p:nvSpPr>
-          <p:cNvPr id="27" name="TextBox 26"/>
-          <p:cNvSpPr txBox="1"/>
-          <p:nvPr/>
-        </p:nvSpPr>
-        <p:spPr>
-          <a:xfrm>
-            <a:off x="914400" y="5385816"/>
-            <a:ext cx="2404872" cy="365760"/>
-          </a:xfrm>
-          <a:prstGeom prst="rect">
-            <a:avLst/>
-          </a:prstGeom>
-          <a:noFill/>
-        </p:spPr>
-        <p:txBody>
-          <a:bodyPr wrap="square" anchor="ctr" lIns="0" rIns="0" tIns="0" bIns="0">
+          <p:cNvPr id="29" name="TextBox 28"/>
+          <p:cNvSpPr txBox="1"/>
+          <p:nvPr/>
+        </p:nvSpPr>
+        <p:spPr>
+          <a:xfrm>
+            <a:off x="3703320" y="4343400"/>
+            <a:ext cx="7543800" cy="457200"/>
+          </a:xfrm>
+          <a:prstGeom prst="rect">
+            <a:avLst/>
+          </a:prstGeom>
+          <a:noFill/>
+        </p:spPr>
+        <p:txBody>
+          <a:bodyPr wrap="square" anchor="t" lIns="0" rIns="0" tIns="0" bIns="0">
             <a:spAutoFit/>
           </a:bodyPr>
           <a:lstStyle/>
           <a:p>
             <a:pPr algn="l">
               <a:lnSpc>
-                <a:spcPct val="100000"/>
-              </a:lnSpc>
-              <a:spcBef>
-                <a:spcPts val="0"/>
-              </a:spcBef>
-              <a:spcAft>
-                <a:spcPts val="300"/>
-              </a:spcAft>
-            </a:pPr>
-            <a:r>
-              <a:rPr sz="1000" b="0" i="0">
-                <a:solidFill>
-                  <a:srgbClr val="FFFFFF"/>
-                </a:solidFill>
-                <a:latin typeface="Calibri"/>
-              </a:rPr>
-              <a:t>● </a:t>
-            </a:r>
-            <a:r>
-              <a:rPr sz="1050" b="0" i="0">
-                <a:solidFill>
-                  <a:srgbClr val="FFFFFF"/>
-                </a:solidFill>
-                <a:latin typeface="Calibri"/>
-              </a:rPr>
-              <a:t>México</a:t>
-            </a:r>
-          </a:p>
-        </p:txBody>
-      </p:sp>
-      <p:sp>
-        <p:nvSpPr>
-          <p:cNvPr id="28" name="TextBox 27"/>
-          <p:cNvSpPr txBox="1"/>
-          <p:nvPr/>
-        </p:nvSpPr>
-        <p:spPr>
-          <a:xfrm>
-            <a:off x="3685032" y="3849624"/>
-            <a:ext cx="7543800" cy="219456"/>
-          </a:xfrm>
-          <a:prstGeom prst="rect">
-            <a:avLst/>
-          </a:prstGeom>
-          <a:noFill/>
-        </p:spPr>
-        <p:txBody>
-          <a:bodyPr wrap="square" anchor="t" lIns="0" rIns="0" tIns="0" bIns="0">
-            <a:spAutoFit/>
-          </a:bodyPr>
-          <a:lstStyle/>
-          <a:p>
-            <a:pPr algn="l">
-              <a:lnSpc>
-                <a:spcPct val="100000"/>
-              </a:lnSpc>
-              <a:spcBef>
-                <a:spcPts val="0"/>
-              </a:spcBef>
-              <a:spcAft>
-                <a:spcPts val="300"/>
-              </a:spcAft>
-            </a:pPr>
-            <a:r>
-              <a:rPr sz="950" b="1" i="0">
-                <a:solidFill>
-                  <a:srgbClr val="0E213A"/>
-                </a:solidFill>
-                <a:latin typeface="Calibri"/>
-              </a:rPr>
-              <a:t>FUNCIÓN</a:t>
-            </a:r>
-          </a:p>
-        </p:txBody>
-      </p:sp>
-      <p:sp>
-        <p:nvSpPr>
-          <p:cNvPr id="29" name="TextBox 28"/>
-          <p:cNvSpPr txBox="1"/>
-          <p:nvPr/>
-        </p:nvSpPr>
-        <p:spPr>
-          <a:xfrm>
-            <a:off x="3685032" y="4069080"/>
-            <a:ext cx="7543800" cy="566928"/>
-          </a:xfrm>
-          <a:prstGeom prst="rect">
-            <a:avLst/>
-          </a:prstGeom>
-          <a:noFill/>
-        </p:spPr>
-        <p:txBody>
-          <a:bodyPr wrap="square" anchor="t" lIns="0" rIns="0" tIns="0" bIns="0">
-            <a:spAutoFit/>
-          </a:bodyPr>
-          <a:lstStyle/>
-          <a:p>
-            <a:pPr algn="l">
-              <a:lnSpc>
                 <a:spcPct val="105000"/>
               </a:lnSpc>
               <a:spcBef>
@@ -10069,7 +9901,7 @@
               </a:spcAft>
             </a:pPr>
             <a:r>
-              <a:rPr sz="1150" b="0" i="0">
+              <a:rPr sz="1100" b="0" i="0">
                 <a:solidFill>
                   <a:srgbClr val="1A2432"/>
                 </a:solidFill>
@@ -10088,7 +9920,7 @@
         </p:nvSpPr>
         <p:spPr>
           <a:xfrm>
-            <a:off x="3685032" y="4718304"/>
+            <a:off x="3703320" y="4882896"/>
             <a:ext cx="118872" cy="118872"/>
           </a:xfrm>
           <a:prstGeom prst="roundRect">
@@ -10134,8 +9966,8 @@
         </p:nvSpPr>
         <p:spPr>
           <a:xfrm>
-            <a:off x="3941064" y="4672584"/>
-            <a:ext cx="7269480" cy="310896"/>
+            <a:off x="3959352" y="4837176"/>
+            <a:ext cx="7269480" cy="292608"/>
           </a:xfrm>
           <a:prstGeom prst="rect">
             <a:avLst/>
@@ -10160,7 +9992,7 @@
               </a:spcAft>
             </a:pPr>
             <a:r>
-              <a:rPr sz="1080" b="0" i="0">
+              <a:rPr sz="1050" b="0" i="0">
                 <a:solidFill>
                   <a:srgbClr val="5B6674"/>
                 </a:solidFill>
@@ -10179,7 +10011,7 @@
         </p:nvSpPr>
         <p:spPr>
           <a:xfrm>
-            <a:off x="3685032" y="5024628"/>
+            <a:off x="3703320" y="5157216"/>
             <a:ext cx="118872" cy="118872"/>
           </a:xfrm>
           <a:prstGeom prst="roundRect">
@@ -10225,8 +10057,8 @@
         </p:nvSpPr>
         <p:spPr>
           <a:xfrm>
-            <a:off x="3941064" y="4978908"/>
-            <a:ext cx="7269480" cy="310896"/>
+            <a:off x="3959352" y="5111496"/>
+            <a:ext cx="7269480" cy="292608"/>
           </a:xfrm>
           <a:prstGeom prst="rect">
             <a:avLst/>
@@ -10251,7 +10083,7 @@
               </a:spcAft>
             </a:pPr>
             <a:r>
-              <a:rPr sz="1080" b="0" i="0">
+              <a:rPr sz="1050" b="0" i="0">
                 <a:solidFill>
                   <a:srgbClr val="5B6674"/>
                 </a:solidFill>
@@ -10270,7 +10102,7 @@
         </p:nvSpPr>
         <p:spPr>
           <a:xfrm>
-            <a:off x="3685032" y="5330952"/>
+            <a:off x="3703320" y="5431536"/>
             <a:ext cx="118872" cy="118872"/>
           </a:xfrm>
           <a:prstGeom prst="roundRect">
@@ -10316,8 +10148,8 @@
         </p:nvSpPr>
         <p:spPr>
           <a:xfrm>
-            <a:off x="3941064" y="5285232"/>
-            <a:ext cx="7269480" cy="310896"/>
+            <a:off x="3959352" y="5385816"/>
+            <a:ext cx="7269480" cy="292608"/>
           </a:xfrm>
           <a:prstGeom prst="rect">
             <a:avLst/>
@@ -10342,7 +10174,7 @@
               </a:spcAft>
             </a:pPr>
             <a:r>
-              <a:rPr sz="1080" b="0" i="0">
+              <a:rPr sz="1050" b="0" i="0">
                 <a:solidFill>
                   <a:srgbClr val="5B6674"/>
                 </a:solidFill>
@@ -10361,8 +10193,8 @@
         </p:nvSpPr>
         <p:spPr>
           <a:xfrm>
-            <a:off x="3685032" y="5513832"/>
-            <a:ext cx="3931920" cy="347472"/>
+            <a:off x="3703320" y="5696712"/>
+            <a:ext cx="3931920" cy="292608"/>
           </a:xfrm>
           <a:prstGeom prst="rect">
             <a:avLst/>
@@ -10415,8 +10247,8 @@
         </p:nvSpPr>
         <p:spPr>
           <a:xfrm>
-            <a:off x="7662671" y="5513832"/>
-            <a:ext cx="3566160" cy="347472"/>
+            <a:off x="7680959" y="5696712"/>
+            <a:ext cx="3566160" cy="292608"/>
           </a:xfrm>
           <a:prstGeom prst="rect">
             <a:avLst/>
@@ -28612,7 +28444,7 @@
         <p:spPr>
           <a:xfrm>
             <a:off x="713232" y="1280160"/>
-            <a:ext cx="10771632" cy="2212848"/>
+            <a:ext cx="10771632" cy="2286000"/>
           </a:xfrm>
           <a:prstGeom prst="roundRect">
             <a:avLst>
@@ -28658,7 +28490,7 @@
         <p:spPr>
           <a:xfrm>
             <a:off x="713232" y="1280160"/>
-            <a:ext cx="2788920" cy="2212848"/>
+            <a:ext cx="2788920" cy="2286000"/>
           </a:xfrm>
           <a:prstGeom prst="roundRect">
             <a:avLst>
@@ -28704,7 +28536,7 @@
         <p:spPr>
           <a:xfrm>
             <a:off x="3374136" y="1298448"/>
-            <a:ext cx="128016" cy="2176272"/>
+            <a:ext cx="128016" cy="2249424"/>
           </a:xfrm>
           <a:prstGeom prst="rect">
             <a:avLst/>
@@ -28739,16 +28571,94 @@
           </a:p>
         </p:txBody>
       </p:sp>
-      <p:sp>
-        <p:nvSpPr>
-          <p:cNvPr id="11" name="TextBox 10"/>
-          <p:cNvSpPr txBox="1"/>
-          <p:nvPr/>
-        </p:nvSpPr>
-        <p:spPr>
-          <a:xfrm>
-            <a:off x="914400" y="1463040"/>
-            <a:ext cx="2404872" cy="1005840"/>
+      <p:pic>
+        <p:nvPicPr>
+          <p:cNvPr id="11" name="Picture 10" descr="no_corte.png"/>
+          <p:cNvPicPr>
+            <a:picLocks noChangeAspect="1"/>
+          </p:cNvPicPr>
+          <p:nvPr/>
+        </p:nvPicPr>
+        <p:blipFill>
+          <a:blip r:embed="rId2"/>
+          <a:stretch>
+            <a:fillRect/>
+          </a:stretch>
+        </p:blipFill>
+        <p:spPr>
+          <a:xfrm>
+            <a:off x="969264" y="1426464"/>
+            <a:ext cx="2286000" cy="1413662"/>
+          </a:xfrm>
+          <a:prstGeom prst="rect">
+            <a:avLst/>
+          </a:prstGeom>
+        </p:spPr>
+      </p:pic>
+      <p:sp>
+        <p:nvSpPr>
+          <p:cNvPr id="12" name="TextBox 11"/>
+          <p:cNvSpPr txBox="1"/>
+          <p:nvPr/>
+        </p:nvSpPr>
+        <p:spPr>
+          <a:xfrm>
+            <a:off x="877824" y="3182112"/>
+            <a:ext cx="2514600" cy="292608"/>
+          </a:xfrm>
+          <a:prstGeom prst="rect">
+            <a:avLst/>
+          </a:prstGeom>
+          <a:noFill/>
+        </p:spPr>
+        <p:txBody>
+          <a:bodyPr wrap="square" anchor="ctr" lIns="0" rIns="0" tIns="0" bIns="0">
+            <a:spAutoFit/>
+          </a:bodyPr>
+          <a:lstStyle/>
+          <a:p>
+            <a:pPr algn="ctr">
+              <a:lnSpc>
+                <a:spcPct val="100000"/>
+              </a:lnSpc>
+              <a:spcBef>
+                <a:spcPts val="0"/>
+              </a:spcBef>
+              <a:spcAft>
+                <a:spcPts val="300"/>
+              </a:spcAft>
+            </a:pPr>
+            <a:r>
+              <a:rPr sz="900" b="0" i="0">
+                <a:solidFill>
+                  <a:srgbClr val="FFFFFF"/>
+                </a:solidFill>
+                <a:latin typeface="Calibri"/>
+              </a:rPr>
+              <a:t>● </a:t>
+            </a:r>
+            <a:r>
+              <a:rPr sz="1000" b="0" i="0">
+                <a:solidFill>
+                  <a:srgbClr val="FFFFFF"/>
+                </a:solidFill>
+                <a:latin typeface="Calibri"/>
+              </a:rPr>
+              <a:t>Nacional</a:t>
+            </a:r>
+          </a:p>
+        </p:txBody>
+      </p:sp>
+      <p:sp>
+        <p:nvSpPr>
+          <p:cNvPr id="13" name="TextBox 12"/>
+          <p:cNvSpPr txBox="1"/>
+          <p:nvPr/>
+        </p:nvSpPr>
+        <p:spPr>
+          <a:xfrm>
+            <a:off x="3703320" y="1408176"/>
+            <a:ext cx="7543800" cy="457200"/>
           </a:xfrm>
           <a:prstGeom prst="rect">
             <a:avLst/>
@@ -28763,19 +28673,19 @@
           <a:p>
             <a:pPr algn="l">
               <a:lnSpc>
-                <a:spcPct val="102000"/>
-              </a:lnSpc>
-              <a:spcBef>
-                <a:spcPts val="0"/>
-              </a:spcBef>
-              <a:spcAft>
-                <a:spcPts val="300"/>
-              </a:spcAft>
-            </a:pPr>
-            <a:r>
-              <a:rPr sz="1500" b="1" i="0">
-                <a:solidFill>
-                  <a:srgbClr val="FFFFFF"/>
+                <a:spcPct val="100000"/>
+              </a:lnSpc>
+              <a:spcBef>
+                <a:spcPts val="0"/>
+              </a:spcBef>
+              <a:spcAft>
+                <a:spcPts val="300"/>
+              </a:spcAft>
+            </a:pPr>
+            <a:r>
+              <a:rPr sz="1400" b="1" i="0">
+                <a:solidFill>
+                  <a:srgbClr val="0E213A"/>
                 </a:solidFill>
                 <a:latin typeface="Calibri"/>
               </a:rPr>
@@ -28786,127 +28696,28 @@
       </p:sp>
       <p:sp>
         <p:nvSpPr>
-          <p:cNvPr id="12" name="TextBox 11"/>
-          <p:cNvSpPr txBox="1"/>
-          <p:nvPr/>
-        </p:nvSpPr>
-        <p:spPr>
-          <a:xfrm>
-            <a:off x="914400" y="2962656"/>
-            <a:ext cx="2404872" cy="365760"/>
-          </a:xfrm>
-          <a:prstGeom prst="rect">
-            <a:avLst/>
-          </a:prstGeom>
-          <a:noFill/>
-        </p:spPr>
-        <p:txBody>
-          <a:bodyPr wrap="square" anchor="ctr" lIns="0" rIns="0" tIns="0" bIns="0">
+          <p:cNvPr id="14" name="TextBox 13"/>
+          <p:cNvSpPr txBox="1"/>
+          <p:nvPr/>
+        </p:nvSpPr>
+        <p:spPr>
+          <a:xfrm>
+            <a:off x="3703320" y="1920240"/>
+            <a:ext cx="7543800" cy="457200"/>
+          </a:xfrm>
+          <a:prstGeom prst="rect">
+            <a:avLst/>
+          </a:prstGeom>
+          <a:noFill/>
+        </p:spPr>
+        <p:txBody>
+          <a:bodyPr wrap="square" anchor="t" lIns="0" rIns="0" tIns="0" bIns="0">
             <a:spAutoFit/>
           </a:bodyPr>
           <a:lstStyle/>
           <a:p>
             <a:pPr algn="l">
               <a:lnSpc>
-                <a:spcPct val="100000"/>
-              </a:lnSpc>
-              <a:spcBef>
-                <a:spcPts val="0"/>
-              </a:spcBef>
-              <a:spcAft>
-                <a:spcPts val="300"/>
-              </a:spcAft>
-            </a:pPr>
-            <a:r>
-              <a:rPr sz="1000" b="0" i="0">
-                <a:solidFill>
-                  <a:srgbClr val="FFFFFF"/>
-                </a:solidFill>
-                <a:latin typeface="Calibri"/>
-              </a:rPr>
-              <a:t>● </a:t>
-            </a:r>
-            <a:r>
-              <a:rPr sz="1050" b="0" i="0">
-                <a:solidFill>
-                  <a:srgbClr val="FFFFFF"/>
-                </a:solidFill>
-                <a:latin typeface="Calibri"/>
-              </a:rPr>
-              <a:t>Nacional</a:t>
-            </a:r>
-          </a:p>
-        </p:txBody>
-      </p:sp>
-      <p:sp>
-        <p:nvSpPr>
-          <p:cNvPr id="13" name="TextBox 12"/>
-          <p:cNvSpPr txBox="1"/>
-          <p:nvPr/>
-        </p:nvSpPr>
-        <p:spPr>
-          <a:xfrm>
-            <a:off x="3685032" y="1426464"/>
-            <a:ext cx="7543800" cy="219456"/>
-          </a:xfrm>
-          <a:prstGeom prst="rect">
-            <a:avLst/>
-          </a:prstGeom>
-          <a:noFill/>
-        </p:spPr>
-        <p:txBody>
-          <a:bodyPr wrap="square" anchor="t" lIns="0" rIns="0" tIns="0" bIns="0">
-            <a:spAutoFit/>
-          </a:bodyPr>
-          <a:lstStyle/>
-          <a:p>
-            <a:pPr algn="l">
-              <a:lnSpc>
-                <a:spcPct val="100000"/>
-              </a:lnSpc>
-              <a:spcBef>
-                <a:spcPts val="0"/>
-              </a:spcBef>
-              <a:spcAft>
-                <a:spcPts val="300"/>
-              </a:spcAft>
-            </a:pPr>
-            <a:r>
-              <a:rPr sz="950" b="1" i="0">
-                <a:solidFill>
-                  <a:srgbClr val="2EA84F"/>
-                </a:solidFill>
-                <a:latin typeface="Calibri"/>
-              </a:rPr>
-              <a:t>FUNCIÓN</a:t>
-            </a:r>
-          </a:p>
-        </p:txBody>
-      </p:sp>
-      <p:sp>
-        <p:nvSpPr>
-          <p:cNvPr id="14" name="TextBox 13"/>
-          <p:cNvSpPr txBox="1"/>
-          <p:nvPr/>
-        </p:nvSpPr>
-        <p:spPr>
-          <a:xfrm>
-            <a:off x="3685032" y="1645920"/>
-            <a:ext cx="7543800" cy="566928"/>
-          </a:xfrm>
-          <a:prstGeom prst="rect">
-            <a:avLst/>
-          </a:prstGeom>
-          <a:noFill/>
-        </p:spPr>
-        <p:txBody>
-          <a:bodyPr wrap="square" anchor="t" lIns="0" rIns="0" tIns="0" bIns="0">
-            <a:spAutoFit/>
-          </a:bodyPr>
-          <a:lstStyle/>
-          <a:p>
-            <a:pPr algn="l">
-              <a:lnSpc>
                 <a:spcPct val="105000"/>
               </a:lnSpc>
               <a:spcBef>
@@ -28917,7 +28728,7 @@
               </a:spcAft>
             </a:pPr>
             <a:r>
-              <a:rPr sz="1150" b="0" i="0">
+              <a:rPr sz="1100" b="0" i="0">
                 <a:solidFill>
                   <a:srgbClr val="1A2432"/>
                 </a:solidFill>
@@ -28936,7 +28747,7 @@
         </p:nvSpPr>
         <p:spPr>
           <a:xfrm>
-            <a:off x="3685032" y="2295144"/>
+            <a:off x="3703320" y="2459736"/>
             <a:ext cx="118872" cy="118872"/>
           </a:xfrm>
           <a:prstGeom prst="roundRect">
@@ -28982,8 +28793,8 @@
         </p:nvSpPr>
         <p:spPr>
           <a:xfrm>
-            <a:off x="3941064" y="2249424"/>
-            <a:ext cx="7269480" cy="310896"/>
+            <a:off x="3959352" y="2414016"/>
+            <a:ext cx="7269480" cy="292608"/>
           </a:xfrm>
           <a:prstGeom prst="rect">
             <a:avLst/>
@@ -29008,7 +28819,7 @@
               </a:spcAft>
             </a:pPr>
             <a:r>
-              <a:rPr sz="1080" b="0" i="0">
+              <a:rPr sz="1050" b="0" i="0">
                 <a:solidFill>
                   <a:srgbClr val="5B6674"/>
                 </a:solidFill>
@@ -29027,7 +28838,7 @@
         </p:nvSpPr>
         <p:spPr>
           <a:xfrm>
-            <a:off x="3685032" y="2601468"/>
+            <a:off x="3703320" y="2734056"/>
             <a:ext cx="118872" cy="118872"/>
           </a:xfrm>
           <a:prstGeom prst="roundRect">
@@ -29073,8 +28884,8 @@
         </p:nvSpPr>
         <p:spPr>
           <a:xfrm>
-            <a:off x="3941064" y="2555748"/>
-            <a:ext cx="7269480" cy="310896"/>
+            <a:off x="3959352" y="2688336"/>
+            <a:ext cx="7269480" cy="292608"/>
           </a:xfrm>
           <a:prstGeom prst="rect">
             <a:avLst/>
@@ -29099,7 +28910,7 @@
               </a:spcAft>
             </a:pPr>
             <a:r>
-              <a:rPr sz="1080" b="0" i="0">
+              <a:rPr sz="1050" b="0" i="0">
                 <a:solidFill>
                   <a:srgbClr val="5B6674"/>
                 </a:solidFill>
@@ -29118,7 +28929,7 @@
         </p:nvSpPr>
         <p:spPr>
           <a:xfrm>
-            <a:off x="3685032" y="2907792"/>
+            <a:off x="3703320" y="3008376"/>
             <a:ext cx="118872" cy="118872"/>
           </a:xfrm>
           <a:prstGeom prst="roundRect">
@@ -29164,8 +28975,8 @@
         </p:nvSpPr>
         <p:spPr>
           <a:xfrm>
-            <a:off x="3941064" y="2862072"/>
-            <a:ext cx="7269480" cy="310896"/>
+            <a:off x="3959352" y="2962656"/>
+            <a:ext cx="7269480" cy="292608"/>
           </a:xfrm>
           <a:prstGeom prst="rect">
             <a:avLst/>
@@ -29190,7 +29001,7 @@
               </a:spcAft>
             </a:pPr>
             <a:r>
-              <a:rPr sz="1080" b="0" i="0">
+              <a:rPr sz="1050" b="0" i="0">
                 <a:solidFill>
                   <a:srgbClr val="5B6674"/>
                 </a:solidFill>
@@ -29209,8 +29020,8 @@
         </p:nvSpPr>
         <p:spPr>
           <a:xfrm>
-            <a:off x="3685032" y="3090672"/>
-            <a:ext cx="3931920" cy="347472"/>
+            <a:off x="3703320" y="3273552"/>
+            <a:ext cx="3931920" cy="292608"/>
           </a:xfrm>
           <a:prstGeom prst="rect">
             <a:avLst/>
@@ -29263,8 +29074,8 @@
         </p:nvSpPr>
         <p:spPr>
           <a:xfrm>
-            <a:off x="7662671" y="3090672"/>
-            <a:ext cx="3566160" cy="347472"/>
+            <a:off x="7680959" y="3273552"/>
+            <a:ext cx="3566160" cy="292608"/>
           </a:xfrm>
           <a:prstGeom prst="rect">
             <a:avLst/>
@@ -29318,7 +29129,7 @@
         <p:spPr>
           <a:xfrm>
             <a:off x="713232" y="3703320"/>
-            <a:ext cx="10771632" cy="2212848"/>
+            <a:ext cx="10771632" cy="2286000"/>
           </a:xfrm>
           <a:prstGeom prst="roundRect">
             <a:avLst>
@@ -29364,7 +29175,7 @@
         <p:spPr>
           <a:xfrm>
             <a:off x="713232" y="3703320"/>
-            <a:ext cx="2788920" cy="2212848"/>
+            <a:ext cx="2788920" cy="2286000"/>
           </a:xfrm>
           <a:prstGeom prst="roundRect">
             <a:avLst>
@@ -29410,7 +29221,7 @@
         <p:spPr>
           <a:xfrm>
             <a:off x="3374136" y="3721608"/>
-            <a:ext cx="128016" cy="2176272"/>
+            <a:ext cx="128016" cy="2249424"/>
           </a:xfrm>
           <a:prstGeom prst="rect">
             <a:avLst/>
@@ -29445,16 +29256,94 @@
           </a:p>
         </p:txBody>
       </p:sp>
-      <p:sp>
-        <p:nvSpPr>
-          <p:cNvPr id="26" name="TextBox 25"/>
-          <p:cNvSpPr txBox="1"/>
-          <p:nvPr/>
-        </p:nvSpPr>
-        <p:spPr>
-          <a:xfrm>
-            <a:off x="914400" y="3886200"/>
-            <a:ext cx="2404872" cy="1005840"/>
+      <p:pic>
+        <p:nvPicPr>
+          <p:cNvPr id="26" name="Picture 25" descr="no_epp.png"/>
+          <p:cNvPicPr>
+            <a:picLocks noChangeAspect="1"/>
+          </p:cNvPicPr>
+          <p:nvPr/>
+        </p:nvPicPr>
+        <p:blipFill>
+          <a:blip r:embed="rId3"/>
+          <a:stretch>
+            <a:fillRect/>
+          </a:stretch>
+        </p:blipFill>
+        <p:spPr>
+          <a:xfrm>
+            <a:off x="969264" y="3849624"/>
+            <a:ext cx="2286000" cy="1413662"/>
+          </a:xfrm>
+          <a:prstGeom prst="rect">
+            <a:avLst/>
+          </a:prstGeom>
+        </p:spPr>
+      </p:pic>
+      <p:sp>
+        <p:nvSpPr>
+          <p:cNvPr id="27" name="TextBox 26"/>
+          <p:cNvSpPr txBox="1"/>
+          <p:nvPr/>
+        </p:nvSpPr>
+        <p:spPr>
+          <a:xfrm>
+            <a:off x="877824" y="5605272"/>
+            <a:ext cx="2514600" cy="292608"/>
+          </a:xfrm>
+          <a:prstGeom prst="rect">
+            <a:avLst/>
+          </a:prstGeom>
+          <a:noFill/>
+        </p:spPr>
+        <p:txBody>
+          <a:bodyPr wrap="square" anchor="ctr" lIns="0" rIns="0" tIns="0" bIns="0">
+            <a:spAutoFit/>
+          </a:bodyPr>
+          <a:lstStyle/>
+          <a:p>
+            <a:pPr algn="ctr">
+              <a:lnSpc>
+                <a:spcPct val="100000"/>
+              </a:lnSpc>
+              <a:spcBef>
+                <a:spcPts val="0"/>
+              </a:spcBef>
+              <a:spcAft>
+                <a:spcPts val="300"/>
+              </a:spcAft>
+            </a:pPr>
+            <a:r>
+              <a:rPr sz="900" b="0" i="0">
+                <a:solidFill>
+                  <a:srgbClr val="FFFFFF"/>
+                </a:solidFill>
+                <a:latin typeface="Calibri"/>
+              </a:rPr>
+              <a:t>● </a:t>
+            </a:r>
+            <a:r>
+              <a:rPr sz="1000" b="0" i="0">
+                <a:solidFill>
+                  <a:srgbClr val="FFFFFF"/>
+                </a:solidFill>
+                <a:latin typeface="Calibri"/>
+              </a:rPr>
+              <a:t>Nacional</a:t>
+            </a:r>
+          </a:p>
+        </p:txBody>
+      </p:sp>
+      <p:sp>
+        <p:nvSpPr>
+          <p:cNvPr id="28" name="TextBox 27"/>
+          <p:cNvSpPr txBox="1"/>
+          <p:nvPr/>
+        </p:nvSpPr>
+        <p:spPr>
+          <a:xfrm>
+            <a:off x="3703320" y="3831336"/>
+            <a:ext cx="7543800" cy="457200"/>
           </a:xfrm>
           <a:prstGeom prst="rect">
             <a:avLst/>
@@ -29469,19 +29358,19 @@
           <a:p>
             <a:pPr algn="l">
               <a:lnSpc>
-                <a:spcPct val="102000"/>
-              </a:lnSpc>
-              <a:spcBef>
-                <a:spcPts val="0"/>
-              </a:spcBef>
-              <a:spcAft>
-                <a:spcPts val="300"/>
-              </a:spcAft>
-            </a:pPr>
-            <a:r>
-              <a:rPr sz="1500" b="1" i="0">
-                <a:solidFill>
-                  <a:srgbClr val="FFFFFF"/>
+                <a:spcPct val="100000"/>
+              </a:lnSpc>
+              <a:spcBef>
+                <a:spcPts val="0"/>
+              </a:spcBef>
+              <a:spcAft>
+                <a:spcPts val="300"/>
+              </a:spcAft>
+            </a:pPr>
+            <a:r>
+              <a:rPr sz="1400" b="1" i="0">
+                <a:solidFill>
+                  <a:srgbClr val="0E213A"/>
                 </a:solidFill>
                 <a:latin typeface="Calibri"/>
               </a:rPr>
@@ -29492,127 +29381,28 @@
       </p:sp>
       <p:sp>
         <p:nvSpPr>
-          <p:cNvPr id="27" name="TextBox 26"/>
-          <p:cNvSpPr txBox="1"/>
-          <p:nvPr/>
-        </p:nvSpPr>
-        <p:spPr>
-          <a:xfrm>
-            <a:off x="914400" y="5385816"/>
-            <a:ext cx="2404872" cy="365760"/>
-          </a:xfrm>
-          <a:prstGeom prst="rect">
-            <a:avLst/>
-          </a:prstGeom>
-          <a:noFill/>
-        </p:spPr>
-        <p:txBody>
-          <a:bodyPr wrap="square" anchor="ctr" lIns="0" rIns="0" tIns="0" bIns="0">
+          <p:cNvPr id="29" name="TextBox 28"/>
+          <p:cNvSpPr txBox="1"/>
+          <p:nvPr/>
+        </p:nvSpPr>
+        <p:spPr>
+          <a:xfrm>
+            <a:off x="3703320" y="4343400"/>
+            <a:ext cx="7543800" cy="457200"/>
+          </a:xfrm>
+          <a:prstGeom prst="rect">
+            <a:avLst/>
+          </a:prstGeom>
+          <a:noFill/>
+        </p:spPr>
+        <p:txBody>
+          <a:bodyPr wrap="square" anchor="t" lIns="0" rIns="0" tIns="0" bIns="0">
             <a:spAutoFit/>
           </a:bodyPr>
           <a:lstStyle/>
           <a:p>
             <a:pPr algn="l">
               <a:lnSpc>
-                <a:spcPct val="100000"/>
-              </a:lnSpc>
-              <a:spcBef>
-                <a:spcPts val="0"/>
-              </a:spcBef>
-              <a:spcAft>
-                <a:spcPts val="300"/>
-              </a:spcAft>
-            </a:pPr>
-            <a:r>
-              <a:rPr sz="1000" b="0" i="0">
-                <a:solidFill>
-                  <a:srgbClr val="FFFFFF"/>
-                </a:solidFill>
-                <a:latin typeface="Calibri"/>
-              </a:rPr>
-              <a:t>● </a:t>
-            </a:r>
-            <a:r>
-              <a:rPr sz="1050" b="0" i="0">
-                <a:solidFill>
-                  <a:srgbClr val="FFFFFF"/>
-                </a:solidFill>
-                <a:latin typeface="Calibri"/>
-              </a:rPr>
-              <a:t>Nacional</a:t>
-            </a:r>
-          </a:p>
-        </p:txBody>
-      </p:sp>
-      <p:sp>
-        <p:nvSpPr>
-          <p:cNvPr id="28" name="TextBox 27"/>
-          <p:cNvSpPr txBox="1"/>
-          <p:nvPr/>
-        </p:nvSpPr>
-        <p:spPr>
-          <a:xfrm>
-            <a:off x="3685032" y="3849624"/>
-            <a:ext cx="7543800" cy="219456"/>
-          </a:xfrm>
-          <a:prstGeom prst="rect">
-            <a:avLst/>
-          </a:prstGeom>
-          <a:noFill/>
-        </p:spPr>
-        <p:txBody>
-          <a:bodyPr wrap="square" anchor="t" lIns="0" rIns="0" tIns="0" bIns="0">
-            <a:spAutoFit/>
-          </a:bodyPr>
-          <a:lstStyle/>
-          <a:p>
-            <a:pPr algn="l">
-              <a:lnSpc>
-                <a:spcPct val="100000"/>
-              </a:lnSpc>
-              <a:spcBef>
-                <a:spcPts val="0"/>
-              </a:spcBef>
-              <a:spcAft>
-                <a:spcPts val="300"/>
-              </a:spcAft>
-            </a:pPr>
-            <a:r>
-              <a:rPr sz="950" b="1" i="0">
-                <a:solidFill>
-                  <a:srgbClr val="2EA84F"/>
-                </a:solidFill>
-                <a:latin typeface="Calibri"/>
-              </a:rPr>
-              <a:t>FUNCIÓN</a:t>
-            </a:r>
-          </a:p>
-        </p:txBody>
-      </p:sp>
-      <p:sp>
-        <p:nvSpPr>
-          <p:cNvPr id="29" name="TextBox 28"/>
-          <p:cNvSpPr txBox="1"/>
-          <p:nvPr/>
-        </p:nvSpPr>
-        <p:spPr>
-          <a:xfrm>
-            <a:off x="3685032" y="4069080"/>
-            <a:ext cx="7543800" cy="566928"/>
-          </a:xfrm>
-          <a:prstGeom prst="rect">
-            <a:avLst/>
-          </a:prstGeom>
-          <a:noFill/>
-        </p:spPr>
-        <p:txBody>
-          <a:bodyPr wrap="square" anchor="t" lIns="0" rIns="0" tIns="0" bIns="0">
-            <a:spAutoFit/>
-          </a:bodyPr>
-          <a:lstStyle/>
-          <a:p>
-            <a:pPr algn="l">
-              <a:lnSpc>
                 <a:spcPct val="105000"/>
               </a:lnSpc>
               <a:spcBef>
@@ -29623,7 +29413,7 @@
               </a:spcAft>
             </a:pPr>
             <a:r>
-              <a:rPr sz="1150" b="0" i="0">
+              <a:rPr sz="1100" b="0" i="0">
                 <a:solidFill>
                   <a:srgbClr val="1A2432"/>
                 </a:solidFill>
@@ -29642,7 +29432,7 @@
         </p:nvSpPr>
         <p:spPr>
           <a:xfrm>
-            <a:off x="3685032" y="4718304"/>
+            <a:off x="3703320" y="4882896"/>
             <a:ext cx="118872" cy="118872"/>
           </a:xfrm>
           <a:prstGeom prst="roundRect">
@@ -29688,8 +29478,8 @@
         </p:nvSpPr>
         <p:spPr>
           <a:xfrm>
-            <a:off x="3941064" y="4672584"/>
-            <a:ext cx="7269480" cy="310896"/>
+            <a:off x="3959352" y="4837176"/>
+            <a:ext cx="7269480" cy="292608"/>
           </a:xfrm>
           <a:prstGeom prst="rect">
             <a:avLst/>
@@ -29714,7 +29504,7 @@
               </a:spcAft>
             </a:pPr>
             <a:r>
-              <a:rPr sz="1080" b="0" i="0">
+              <a:rPr sz="1050" b="0" i="0">
                 <a:solidFill>
                   <a:srgbClr val="5B6674"/>
                 </a:solidFill>
@@ -29733,7 +29523,7 @@
         </p:nvSpPr>
         <p:spPr>
           <a:xfrm>
-            <a:off x="3685032" y="5024628"/>
+            <a:off x="3703320" y="5157216"/>
             <a:ext cx="118872" cy="118872"/>
           </a:xfrm>
           <a:prstGeom prst="roundRect">
@@ -29779,8 +29569,8 @@
         </p:nvSpPr>
         <p:spPr>
           <a:xfrm>
-            <a:off x="3941064" y="4978908"/>
-            <a:ext cx="7269480" cy="310896"/>
+            <a:off x="3959352" y="5111496"/>
+            <a:ext cx="7269480" cy="292608"/>
           </a:xfrm>
           <a:prstGeom prst="rect">
             <a:avLst/>
@@ -29805,7 +29595,7 @@
               </a:spcAft>
             </a:pPr>
             <a:r>
-              <a:rPr sz="1080" b="0" i="0">
+              <a:rPr sz="1050" b="0" i="0">
                 <a:solidFill>
                   <a:srgbClr val="5B6674"/>
                 </a:solidFill>
@@ -29824,7 +29614,7 @@
         </p:nvSpPr>
         <p:spPr>
           <a:xfrm>
-            <a:off x="3685032" y="5330952"/>
+            <a:off x="3703320" y="5431536"/>
             <a:ext cx="118872" cy="118872"/>
           </a:xfrm>
           <a:prstGeom prst="roundRect">
@@ -29870,8 +29660,8 @@
         </p:nvSpPr>
         <p:spPr>
           <a:xfrm>
-            <a:off x="3941064" y="5285232"/>
-            <a:ext cx="7269480" cy="310896"/>
+            <a:off x="3959352" y="5385816"/>
+            <a:ext cx="7269480" cy="292608"/>
           </a:xfrm>
           <a:prstGeom prst="rect">
             <a:avLst/>
@@ -29896,7 +29686,7 @@
               </a:spcAft>
             </a:pPr>
             <a:r>
-              <a:rPr sz="1080" b="0" i="0">
+              <a:rPr sz="1050" b="0" i="0">
                 <a:solidFill>
                   <a:srgbClr val="5B6674"/>
                 </a:solidFill>
@@ -29915,8 +29705,8 @@
         </p:nvSpPr>
         <p:spPr>
           <a:xfrm>
-            <a:off x="3685032" y="5513832"/>
-            <a:ext cx="3931920" cy="347472"/>
+            <a:off x="3703320" y="5696712"/>
+            <a:ext cx="3931920" cy="292608"/>
           </a:xfrm>
           <a:prstGeom prst="rect">
             <a:avLst/>
@@ -29969,8 +29759,8 @@
         </p:nvSpPr>
         <p:spPr>
           <a:xfrm>
-            <a:off x="7662671" y="5513832"/>
-            <a:ext cx="3566160" cy="347472"/>
+            <a:off x="7680959" y="5696712"/>
+            <a:ext cx="3566160" cy="292608"/>
           </a:xfrm>
           <a:prstGeom prst="rect">
             <a:avLst/>
@@ -30319,7 +30109,7 @@
         <p:spPr>
           <a:xfrm>
             <a:off x="713232" y="1280160"/>
-            <a:ext cx="10771632" cy="2212848"/>
+            <a:ext cx="10771632" cy="2286000"/>
           </a:xfrm>
           <a:prstGeom prst="roundRect">
             <a:avLst>
@@ -30365,7 +30155,7 @@
         <p:spPr>
           <a:xfrm>
             <a:off x="713232" y="1280160"/>
-            <a:ext cx="2788920" cy="2212848"/>
+            <a:ext cx="2788920" cy="2286000"/>
           </a:xfrm>
           <a:prstGeom prst="roundRect">
             <a:avLst>
@@ -30411,7 +30201,7 @@
         <p:spPr>
           <a:xfrm>
             <a:off x="3374136" y="1298448"/>
-            <a:ext cx="128016" cy="2176272"/>
+            <a:ext cx="128016" cy="2249424"/>
           </a:xfrm>
           <a:prstGeom prst="rect">
             <a:avLst/>
@@ -30446,16 +30236,94 @@
           </a:p>
         </p:txBody>
       </p:sp>
-      <p:sp>
-        <p:nvSpPr>
-          <p:cNvPr id="11" name="TextBox 10"/>
-          <p:cNvSpPr txBox="1"/>
-          <p:nvPr/>
-        </p:nvSpPr>
-        <p:spPr>
-          <a:xfrm>
-            <a:off x="914400" y="1463040"/>
-            <a:ext cx="2404872" cy="1005840"/>
+      <p:pic>
+        <p:nvPicPr>
+          <p:cNvPr id="11" name="Picture 10" descr="no_desespina.png"/>
+          <p:cNvPicPr>
+            <a:picLocks noChangeAspect="1"/>
+          </p:cNvPicPr>
+          <p:nvPr/>
+        </p:nvPicPr>
+        <p:blipFill>
+          <a:blip r:embed="rId2"/>
+          <a:stretch>
+            <a:fillRect/>
+          </a:stretch>
+        </p:blipFill>
+        <p:spPr>
+          <a:xfrm>
+            <a:off x="969264" y="1426464"/>
+            <a:ext cx="2286000" cy="1413662"/>
+          </a:xfrm>
+          <a:prstGeom prst="rect">
+            <a:avLst/>
+          </a:prstGeom>
+        </p:spPr>
+      </p:pic>
+      <p:sp>
+        <p:nvSpPr>
+          <p:cNvPr id="12" name="TextBox 11"/>
+          <p:cNvSpPr txBox="1"/>
+          <p:nvPr/>
+        </p:nvSpPr>
+        <p:spPr>
+          <a:xfrm>
+            <a:off x="877824" y="3182112"/>
+            <a:ext cx="2514600" cy="292608"/>
+          </a:xfrm>
+          <a:prstGeom prst="rect">
+            <a:avLst/>
+          </a:prstGeom>
+          <a:noFill/>
+        </p:spPr>
+        <p:txBody>
+          <a:bodyPr wrap="square" anchor="ctr" lIns="0" rIns="0" tIns="0" bIns="0">
+            <a:spAutoFit/>
+          </a:bodyPr>
+          <a:lstStyle/>
+          <a:p>
+            <a:pPr algn="ctr">
+              <a:lnSpc>
+                <a:spcPct val="100000"/>
+              </a:lnSpc>
+              <a:spcBef>
+                <a:spcPts val="0"/>
+              </a:spcBef>
+              <a:spcAft>
+                <a:spcPts val="300"/>
+              </a:spcAft>
+            </a:pPr>
+            <a:r>
+              <a:rPr sz="900" b="0" i="0">
+                <a:solidFill>
+                  <a:srgbClr val="FFFFFF"/>
+                </a:solidFill>
+                <a:latin typeface="Calibri"/>
+              </a:rPr>
+              <a:t>● </a:t>
+            </a:r>
+            <a:r>
+              <a:rPr sz="1000" b="0" i="0">
+                <a:solidFill>
+                  <a:srgbClr val="FFFFFF"/>
+                </a:solidFill>
+                <a:latin typeface="Calibri"/>
+              </a:rPr>
+              <a:t>México · Nuevo León</a:t>
+            </a:r>
+          </a:p>
+        </p:txBody>
+      </p:sp>
+      <p:sp>
+        <p:nvSpPr>
+          <p:cNvPr id="13" name="TextBox 12"/>
+          <p:cNvSpPr txBox="1"/>
+          <p:nvPr/>
+        </p:nvSpPr>
+        <p:spPr>
+          <a:xfrm>
+            <a:off x="3703320" y="1408176"/>
+            <a:ext cx="7543800" cy="457200"/>
           </a:xfrm>
           <a:prstGeom prst="rect">
             <a:avLst/>
@@ -30470,19 +30338,19 @@
           <a:p>
             <a:pPr algn="l">
               <a:lnSpc>
-                <a:spcPct val="102000"/>
-              </a:lnSpc>
-              <a:spcBef>
-                <a:spcPts val="0"/>
-              </a:spcBef>
-              <a:spcAft>
-                <a:spcPts val="300"/>
-              </a:spcAft>
-            </a:pPr>
-            <a:r>
-              <a:rPr sz="1500" b="1" i="0">
-                <a:solidFill>
-                  <a:srgbClr val="FFFFFF"/>
+                <a:spcPct val="100000"/>
+              </a:lnSpc>
+              <a:spcBef>
+                <a:spcPts val="0"/>
+              </a:spcBef>
+              <a:spcAft>
+                <a:spcPts val="300"/>
+              </a:spcAft>
+            </a:pPr>
+            <a:r>
+              <a:rPr sz="1400" b="1" i="0">
+                <a:solidFill>
+                  <a:srgbClr val="0E213A"/>
                 </a:solidFill>
                 <a:latin typeface="Calibri"/>
               </a:rPr>
@@ -30493,127 +30361,28 @@
       </p:sp>
       <p:sp>
         <p:nvSpPr>
-          <p:cNvPr id="12" name="TextBox 11"/>
-          <p:cNvSpPr txBox="1"/>
-          <p:nvPr/>
-        </p:nvSpPr>
-        <p:spPr>
-          <a:xfrm>
-            <a:off x="914400" y="2962656"/>
-            <a:ext cx="2404872" cy="365760"/>
-          </a:xfrm>
-          <a:prstGeom prst="rect">
-            <a:avLst/>
-          </a:prstGeom>
-          <a:noFill/>
-        </p:spPr>
-        <p:txBody>
-          <a:bodyPr wrap="square" anchor="ctr" lIns="0" rIns="0" tIns="0" bIns="0">
+          <p:cNvPr id="14" name="TextBox 13"/>
+          <p:cNvSpPr txBox="1"/>
+          <p:nvPr/>
+        </p:nvSpPr>
+        <p:spPr>
+          <a:xfrm>
+            <a:off x="3703320" y="1920240"/>
+            <a:ext cx="7543800" cy="457200"/>
+          </a:xfrm>
+          <a:prstGeom prst="rect">
+            <a:avLst/>
+          </a:prstGeom>
+          <a:noFill/>
+        </p:spPr>
+        <p:txBody>
+          <a:bodyPr wrap="square" anchor="t" lIns="0" rIns="0" tIns="0" bIns="0">
             <a:spAutoFit/>
           </a:bodyPr>
           <a:lstStyle/>
           <a:p>
             <a:pPr algn="l">
               <a:lnSpc>
-                <a:spcPct val="100000"/>
-              </a:lnSpc>
-              <a:spcBef>
-                <a:spcPts val="0"/>
-              </a:spcBef>
-              <a:spcAft>
-                <a:spcPts val="300"/>
-              </a:spcAft>
-            </a:pPr>
-            <a:r>
-              <a:rPr sz="1000" b="0" i="0">
-                <a:solidFill>
-                  <a:srgbClr val="FFFFFF"/>
-                </a:solidFill>
-                <a:latin typeface="Calibri"/>
-              </a:rPr>
-              <a:t>● </a:t>
-            </a:r>
-            <a:r>
-              <a:rPr sz="1050" b="0" i="0">
-                <a:solidFill>
-                  <a:srgbClr val="FFFFFF"/>
-                </a:solidFill>
-                <a:latin typeface="Calibri"/>
-              </a:rPr>
-              <a:t>México · Nuevo León</a:t>
-            </a:r>
-          </a:p>
-        </p:txBody>
-      </p:sp>
-      <p:sp>
-        <p:nvSpPr>
-          <p:cNvPr id="13" name="TextBox 12"/>
-          <p:cNvSpPr txBox="1"/>
-          <p:nvPr/>
-        </p:nvSpPr>
-        <p:spPr>
-          <a:xfrm>
-            <a:off x="3685032" y="1426464"/>
-            <a:ext cx="7543800" cy="219456"/>
-          </a:xfrm>
-          <a:prstGeom prst="rect">
-            <a:avLst/>
-          </a:prstGeom>
-          <a:noFill/>
-        </p:spPr>
-        <p:txBody>
-          <a:bodyPr wrap="square" anchor="t" lIns="0" rIns="0" tIns="0" bIns="0">
-            <a:spAutoFit/>
-          </a:bodyPr>
-          <a:lstStyle/>
-          <a:p>
-            <a:pPr algn="l">
-              <a:lnSpc>
-                <a:spcPct val="100000"/>
-              </a:lnSpc>
-              <a:spcBef>
-                <a:spcPts val="0"/>
-              </a:spcBef>
-              <a:spcAft>
-                <a:spcPts val="300"/>
-              </a:spcAft>
-            </a:pPr>
-            <a:r>
-              <a:rPr sz="950" b="1" i="0">
-                <a:solidFill>
-                  <a:srgbClr val="18C2D6"/>
-                </a:solidFill>
-                <a:latin typeface="Calibri"/>
-              </a:rPr>
-              <a:t>FUNCIÓN</a:t>
-            </a:r>
-          </a:p>
-        </p:txBody>
-      </p:sp>
-      <p:sp>
-        <p:nvSpPr>
-          <p:cNvPr id="14" name="TextBox 13"/>
-          <p:cNvSpPr txBox="1"/>
-          <p:nvPr/>
-        </p:nvSpPr>
-        <p:spPr>
-          <a:xfrm>
-            <a:off x="3685032" y="1645920"/>
-            <a:ext cx="7543800" cy="566928"/>
-          </a:xfrm>
-          <a:prstGeom prst="rect">
-            <a:avLst/>
-          </a:prstGeom>
-          <a:noFill/>
-        </p:spPr>
-        <p:txBody>
-          <a:bodyPr wrap="square" anchor="t" lIns="0" rIns="0" tIns="0" bIns="0">
-            <a:spAutoFit/>
-          </a:bodyPr>
-          <a:lstStyle/>
-          <a:p>
-            <a:pPr algn="l">
-              <a:lnSpc>
                 <a:spcPct val="105000"/>
               </a:lnSpc>
               <a:spcBef>
@@ -30624,7 +30393,7 @@
               </a:spcAft>
             </a:pPr>
             <a:r>
-              <a:rPr sz="1150" b="0" i="0">
+              <a:rPr sz="1100" b="0" i="0">
                 <a:solidFill>
                   <a:srgbClr val="1A2432"/>
                 </a:solidFill>
@@ -30643,7 +30412,7 @@
         </p:nvSpPr>
         <p:spPr>
           <a:xfrm>
-            <a:off x="3685032" y="2295144"/>
+            <a:off x="3703320" y="2459736"/>
             <a:ext cx="118872" cy="118872"/>
           </a:xfrm>
           <a:prstGeom prst="roundRect">
@@ -30689,8 +30458,8 @@
         </p:nvSpPr>
         <p:spPr>
           <a:xfrm>
-            <a:off x="3941064" y="2249424"/>
-            <a:ext cx="7269480" cy="310896"/>
+            <a:off x="3959352" y="2414016"/>
+            <a:ext cx="7269480" cy="292608"/>
           </a:xfrm>
           <a:prstGeom prst="rect">
             <a:avLst/>
@@ -30715,7 +30484,7 @@
               </a:spcAft>
             </a:pPr>
             <a:r>
-              <a:rPr sz="1080" b="0" i="0">
+              <a:rPr sz="1050" b="0" i="0">
                 <a:solidFill>
                   <a:srgbClr val="5B6674"/>
                 </a:solidFill>
@@ -30734,7 +30503,7 @@
         </p:nvSpPr>
         <p:spPr>
           <a:xfrm>
-            <a:off x="3685032" y="2601468"/>
+            <a:off x="3703320" y="2734056"/>
             <a:ext cx="118872" cy="118872"/>
           </a:xfrm>
           <a:prstGeom prst="roundRect">
@@ -30780,8 +30549,8 @@
         </p:nvSpPr>
         <p:spPr>
           <a:xfrm>
-            <a:off x="3941064" y="2555748"/>
-            <a:ext cx="7269480" cy="310896"/>
+            <a:off x="3959352" y="2688336"/>
+            <a:ext cx="7269480" cy="292608"/>
           </a:xfrm>
           <a:prstGeom prst="rect">
             <a:avLst/>
@@ -30806,7 +30575,7 @@
               </a:spcAft>
             </a:pPr>
             <a:r>
-              <a:rPr sz="1080" b="0" i="0">
+              <a:rPr sz="1050" b="0" i="0">
                 <a:solidFill>
                   <a:srgbClr val="5B6674"/>
                 </a:solidFill>
@@ -30825,7 +30594,7 @@
         </p:nvSpPr>
         <p:spPr>
           <a:xfrm>
-            <a:off x="3685032" y="2907792"/>
+            <a:off x="3703320" y="3008376"/>
             <a:ext cx="118872" cy="118872"/>
           </a:xfrm>
           <a:prstGeom prst="roundRect">
@@ -30871,8 +30640,8 @@
         </p:nvSpPr>
         <p:spPr>
           <a:xfrm>
-            <a:off x="3941064" y="2862072"/>
-            <a:ext cx="7269480" cy="310896"/>
+            <a:off x="3959352" y="2962656"/>
+            <a:ext cx="7269480" cy="292608"/>
           </a:xfrm>
           <a:prstGeom prst="rect">
             <a:avLst/>
@@ -30897,7 +30666,7 @@
               </a:spcAft>
             </a:pPr>
             <a:r>
-              <a:rPr sz="1080" b="0" i="0">
+              <a:rPr sz="1050" b="0" i="0">
                 <a:solidFill>
                   <a:srgbClr val="5B6674"/>
                 </a:solidFill>
@@ -30916,8 +30685,8 @@
         </p:nvSpPr>
         <p:spPr>
           <a:xfrm>
-            <a:off x="3685032" y="3090672"/>
-            <a:ext cx="3931920" cy="347472"/>
+            <a:off x="3703320" y="3273552"/>
+            <a:ext cx="3931920" cy="292608"/>
           </a:xfrm>
           <a:prstGeom prst="rect">
             <a:avLst/>
@@ -30970,8 +30739,8 @@
         </p:nvSpPr>
         <p:spPr>
           <a:xfrm>
-            <a:off x="7662671" y="3090672"/>
-            <a:ext cx="3566160" cy="347472"/>
+            <a:off x="7680959" y="3273552"/>
+            <a:ext cx="3566160" cy="292608"/>
           </a:xfrm>
           <a:prstGeom prst="rect">
             <a:avLst/>
@@ -31025,7 +30794,7 @@
         <p:spPr>
           <a:xfrm>
             <a:off x="713232" y="3703320"/>
-            <a:ext cx="10771632" cy="2212848"/>
+            <a:ext cx="10771632" cy="2286000"/>
           </a:xfrm>
           <a:prstGeom prst="roundRect">
             <a:avLst>
@@ -31071,7 +30840,7 @@
         <p:spPr>
           <a:xfrm>
             <a:off x="713232" y="3703320"/>
-            <a:ext cx="2788920" cy="2212848"/>
+            <a:ext cx="2788920" cy="2286000"/>
           </a:xfrm>
           <a:prstGeom prst="roundRect">
             <a:avLst>
@@ -31117,7 +30886,7 @@
         <p:spPr>
           <a:xfrm>
             <a:off x="3374136" y="3721608"/>
-            <a:ext cx="128016" cy="2176272"/>
+            <a:ext cx="128016" cy="2249424"/>
           </a:xfrm>
           <a:prstGeom prst="rect">
             <a:avLst/>
@@ -31152,16 +30921,94 @@
           </a:p>
         </p:txBody>
       </p:sp>
-      <p:sp>
-        <p:nvSpPr>
-          <p:cNvPr id="26" name="TextBox 25"/>
-          <p:cNvSpPr txBox="1"/>
-          <p:nvPr/>
-        </p:nvSpPr>
-        <p:spPr>
-          <a:xfrm>
-            <a:off x="914400" y="3886200"/>
-            <a:ext cx="2404872" cy="1005840"/>
+      <p:pic>
+        <p:nvPicPr>
+          <p:cNvPr id="26" name="Picture 25" descr="no_desinox.png"/>
+          <p:cNvPicPr>
+            <a:picLocks noChangeAspect="1"/>
+          </p:cNvPicPr>
+          <p:nvPr/>
+        </p:nvPicPr>
+        <p:blipFill>
+          <a:blip r:embed="rId3"/>
+          <a:stretch>
+            <a:fillRect/>
+          </a:stretch>
+        </p:blipFill>
+        <p:spPr>
+          <a:xfrm>
+            <a:off x="969264" y="3849624"/>
+            <a:ext cx="2286000" cy="1413662"/>
+          </a:xfrm>
+          <a:prstGeom prst="rect">
+            <a:avLst/>
+          </a:prstGeom>
+        </p:spPr>
+      </p:pic>
+      <p:sp>
+        <p:nvSpPr>
+          <p:cNvPr id="27" name="TextBox 26"/>
+          <p:cNvSpPr txBox="1"/>
+          <p:nvPr/>
+        </p:nvSpPr>
+        <p:spPr>
+          <a:xfrm>
+            <a:off x="877824" y="5605272"/>
+            <a:ext cx="2514600" cy="292608"/>
+          </a:xfrm>
+          <a:prstGeom prst="rect">
+            <a:avLst/>
+          </a:prstGeom>
+          <a:noFill/>
+        </p:spPr>
+        <p:txBody>
+          <a:bodyPr wrap="square" anchor="ctr" lIns="0" rIns="0" tIns="0" bIns="0">
+            <a:spAutoFit/>
+          </a:bodyPr>
+          <a:lstStyle/>
+          <a:p>
+            <a:pPr algn="ctr">
+              <a:lnSpc>
+                <a:spcPct val="100000"/>
+              </a:lnSpc>
+              <a:spcBef>
+                <a:spcPts val="0"/>
+              </a:spcBef>
+              <a:spcAft>
+                <a:spcPts val="300"/>
+              </a:spcAft>
+            </a:pPr>
+            <a:r>
+              <a:rPr sz="900" b="0" i="0">
+                <a:solidFill>
+                  <a:srgbClr val="FFFFFF"/>
+                </a:solidFill>
+                <a:latin typeface="Calibri"/>
+              </a:rPr>
+              <a:t>● </a:t>
+            </a:r>
+            <a:r>
+              <a:rPr sz="1000" b="0" i="0">
+                <a:solidFill>
+                  <a:srgbClr val="FFFFFF"/>
+                </a:solidFill>
+                <a:latin typeface="Calibri"/>
+              </a:rPr>
+              <a:t>México · Jalisco</a:t>
+            </a:r>
+          </a:p>
+        </p:txBody>
+      </p:sp>
+      <p:sp>
+        <p:nvSpPr>
+          <p:cNvPr id="28" name="TextBox 27"/>
+          <p:cNvSpPr txBox="1"/>
+          <p:nvPr/>
+        </p:nvSpPr>
+        <p:spPr>
+          <a:xfrm>
+            <a:off x="3703320" y="3831336"/>
+            <a:ext cx="7543800" cy="457200"/>
           </a:xfrm>
           <a:prstGeom prst="rect">
             <a:avLst/>
@@ -31176,19 +31023,19 @@
           <a:p>
             <a:pPr algn="l">
               <a:lnSpc>
-                <a:spcPct val="102000"/>
-              </a:lnSpc>
-              <a:spcBef>
-                <a:spcPts val="0"/>
-              </a:spcBef>
-              <a:spcAft>
-                <a:spcPts val="300"/>
-              </a:spcAft>
-            </a:pPr>
-            <a:r>
-              <a:rPr sz="1500" b="1" i="0">
-                <a:solidFill>
-                  <a:srgbClr val="FFFFFF"/>
+                <a:spcPct val="100000"/>
+              </a:lnSpc>
+              <a:spcBef>
+                <a:spcPts val="0"/>
+              </a:spcBef>
+              <a:spcAft>
+                <a:spcPts val="300"/>
+              </a:spcAft>
+            </a:pPr>
+            <a:r>
+              <a:rPr sz="1400" b="1" i="0">
+                <a:solidFill>
+                  <a:srgbClr val="0E213A"/>
                 </a:solidFill>
                 <a:latin typeface="Calibri"/>
               </a:rPr>
@@ -31199,127 +31046,28 @@
       </p:sp>
       <p:sp>
         <p:nvSpPr>
-          <p:cNvPr id="27" name="TextBox 26"/>
-          <p:cNvSpPr txBox="1"/>
-          <p:nvPr/>
-        </p:nvSpPr>
-        <p:spPr>
-          <a:xfrm>
-            <a:off x="914400" y="5385816"/>
-            <a:ext cx="2404872" cy="365760"/>
-          </a:xfrm>
-          <a:prstGeom prst="rect">
-            <a:avLst/>
-          </a:prstGeom>
-          <a:noFill/>
-        </p:spPr>
-        <p:txBody>
-          <a:bodyPr wrap="square" anchor="ctr" lIns="0" rIns="0" tIns="0" bIns="0">
+          <p:cNvPr id="29" name="TextBox 28"/>
+          <p:cNvSpPr txBox="1"/>
+          <p:nvPr/>
+        </p:nvSpPr>
+        <p:spPr>
+          <a:xfrm>
+            <a:off x="3703320" y="4343400"/>
+            <a:ext cx="7543800" cy="457200"/>
+          </a:xfrm>
+          <a:prstGeom prst="rect">
+            <a:avLst/>
+          </a:prstGeom>
+          <a:noFill/>
+        </p:spPr>
+        <p:txBody>
+          <a:bodyPr wrap="square" anchor="t" lIns="0" rIns="0" tIns="0" bIns="0">
             <a:spAutoFit/>
           </a:bodyPr>
           <a:lstStyle/>
           <a:p>
             <a:pPr algn="l">
               <a:lnSpc>
-                <a:spcPct val="100000"/>
-              </a:lnSpc>
-              <a:spcBef>
-                <a:spcPts val="0"/>
-              </a:spcBef>
-              <a:spcAft>
-                <a:spcPts val="300"/>
-              </a:spcAft>
-            </a:pPr>
-            <a:r>
-              <a:rPr sz="1000" b="0" i="0">
-                <a:solidFill>
-                  <a:srgbClr val="FFFFFF"/>
-                </a:solidFill>
-                <a:latin typeface="Calibri"/>
-              </a:rPr>
-              <a:t>● </a:t>
-            </a:r>
-            <a:r>
-              <a:rPr sz="1050" b="0" i="0">
-                <a:solidFill>
-                  <a:srgbClr val="FFFFFF"/>
-                </a:solidFill>
-                <a:latin typeface="Calibri"/>
-              </a:rPr>
-              <a:t>México · Jalisco</a:t>
-            </a:r>
-          </a:p>
-        </p:txBody>
-      </p:sp>
-      <p:sp>
-        <p:nvSpPr>
-          <p:cNvPr id="28" name="TextBox 27"/>
-          <p:cNvSpPr txBox="1"/>
-          <p:nvPr/>
-        </p:nvSpPr>
-        <p:spPr>
-          <a:xfrm>
-            <a:off x="3685032" y="3849624"/>
-            <a:ext cx="7543800" cy="219456"/>
-          </a:xfrm>
-          <a:prstGeom prst="rect">
-            <a:avLst/>
-          </a:prstGeom>
-          <a:noFill/>
-        </p:spPr>
-        <p:txBody>
-          <a:bodyPr wrap="square" anchor="t" lIns="0" rIns="0" tIns="0" bIns="0">
-            <a:spAutoFit/>
-          </a:bodyPr>
-          <a:lstStyle/>
-          <a:p>
-            <a:pPr algn="l">
-              <a:lnSpc>
-                <a:spcPct val="100000"/>
-              </a:lnSpc>
-              <a:spcBef>
-                <a:spcPts val="0"/>
-              </a:spcBef>
-              <a:spcAft>
-                <a:spcPts val="300"/>
-              </a:spcAft>
-            </a:pPr>
-            <a:r>
-              <a:rPr sz="950" b="1" i="0">
-                <a:solidFill>
-                  <a:srgbClr val="18C2D6"/>
-                </a:solidFill>
-                <a:latin typeface="Calibri"/>
-              </a:rPr>
-              <a:t>FUNCIÓN</a:t>
-            </a:r>
-          </a:p>
-        </p:txBody>
-      </p:sp>
-      <p:sp>
-        <p:nvSpPr>
-          <p:cNvPr id="29" name="TextBox 28"/>
-          <p:cNvSpPr txBox="1"/>
-          <p:nvPr/>
-        </p:nvSpPr>
-        <p:spPr>
-          <a:xfrm>
-            <a:off x="3685032" y="4069080"/>
-            <a:ext cx="7543800" cy="566928"/>
-          </a:xfrm>
-          <a:prstGeom prst="rect">
-            <a:avLst/>
-          </a:prstGeom>
-          <a:noFill/>
-        </p:spPr>
-        <p:txBody>
-          <a:bodyPr wrap="square" anchor="t" lIns="0" rIns="0" tIns="0" bIns="0">
-            <a:spAutoFit/>
-          </a:bodyPr>
-          <a:lstStyle/>
-          <a:p>
-            <a:pPr algn="l">
-              <a:lnSpc>
                 <a:spcPct val="105000"/>
               </a:lnSpc>
               <a:spcBef>
@@ -31330,7 +31078,7 @@
               </a:spcAft>
             </a:pPr>
             <a:r>
-              <a:rPr sz="1150" b="0" i="0">
+              <a:rPr sz="1100" b="0" i="0">
                 <a:solidFill>
                   <a:srgbClr val="1A2432"/>
                 </a:solidFill>
@@ -31349,7 +31097,7 @@
         </p:nvSpPr>
         <p:spPr>
           <a:xfrm>
-            <a:off x="3685032" y="4718304"/>
+            <a:off x="3703320" y="4882896"/>
             <a:ext cx="118872" cy="118872"/>
           </a:xfrm>
           <a:prstGeom prst="roundRect">
@@ -31395,8 +31143,8 @@
         </p:nvSpPr>
         <p:spPr>
           <a:xfrm>
-            <a:off x="3941064" y="4672584"/>
-            <a:ext cx="7269480" cy="310896"/>
+            <a:off x="3959352" y="4837176"/>
+            <a:ext cx="7269480" cy="292608"/>
           </a:xfrm>
           <a:prstGeom prst="rect">
             <a:avLst/>
@@ -31421,7 +31169,7 @@
               </a:spcAft>
             </a:pPr>
             <a:r>
-              <a:rPr sz="1080" b="0" i="0">
+              <a:rPr sz="1050" b="0" i="0">
                 <a:solidFill>
                   <a:srgbClr val="5B6674"/>
                 </a:solidFill>
@@ -31440,7 +31188,7 @@
         </p:nvSpPr>
         <p:spPr>
           <a:xfrm>
-            <a:off x="3685032" y="5024628"/>
+            <a:off x="3703320" y="5157216"/>
             <a:ext cx="118872" cy="118872"/>
           </a:xfrm>
           <a:prstGeom prst="roundRect">
@@ -31486,8 +31234,8 @@
         </p:nvSpPr>
         <p:spPr>
           <a:xfrm>
-            <a:off x="3941064" y="4978908"/>
-            <a:ext cx="7269480" cy="310896"/>
+            <a:off x="3959352" y="5111496"/>
+            <a:ext cx="7269480" cy="292608"/>
           </a:xfrm>
           <a:prstGeom prst="rect">
             <a:avLst/>
@@ -31512,7 +31260,7 @@
               </a:spcAft>
             </a:pPr>
             <a:r>
-              <a:rPr sz="1080" b="0" i="0">
+              <a:rPr sz="1050" b="0" i="0">
                 <a:solidFill>
                   <a:srgbClr val="5B6674"/>
                 </a:solidFill>
@@ -31531,7 +31279,7 @@
         </p:nvSpPr>
         <p:spPr>
           <a:xfrm>
-            <a:off x="3685032" y="5330952"/>
+            <a:off x="3703320" y="5431536"/>
             <a:ext cx="118872" cy="118872"/>
           </a:xfrm>
           <a:prstGeom prst="roundRect">
@@ -31577,8 +31325,8 @@
         </p:nvSpPr>
         <p:spPr>
           <a:xfrm>
-            <a:off x="3941064" y="5285232"/>
-            <a:ext cx="7269480" cy="310896"/>
+            <a:off x="3959352" y="5385816"/>
+            <a:ext cx="7269480" cy="292608"/>
           </a:xfrm>
           <a:prstGeom prst="rect">
             <a:avLst/>
@@ -31603,7 +31351,7 @@
               </a:spcAft>
             </a:pPr>
             <a:r>
-              <a:rPr sz="1080" b="0" i="0">
+              <a:rPr sz="1050" b="0" i="0">
                 <a:solidFill>
                   <a:srgbClr val="5B6674"/>
                 </a:solidFill>
@@ -31622,8 +31370,8 @@
         </p:nvSpPr>
         <p:spPr>
           <a:xfrm>
-            <a:off x="3685032" y="5513832"/>
-            <a:ext cx="3931920" cy="347472"/>
+            <a:off x="3703320" y="5696712"/>
+            <a:ext cx="3931920" cy="292608"/>
           </a:xfrm>
           <a:prstGeom prst="rect">
             <a:avLst/>
@@ -31676,8 +31424,8 @@
         </p:nvSpPr>
         <p:spPr>
           <a:xfrm>
-            <a:off x="7662671" y="5513832"/>
-            <a:ext cx="3566160" cy="347472"/>
+            <a:off x="7680959" y="5696712"/>
+            <a:ext cx="3566160" cy="292608"/>
           </a:xfrm>
           <a:prstGeom prst="rect">
             <a:avLst/>
@@ -32026,7 +31774,7 @@
         <p:spPr>
           <a:xfrm>
             <a:off x="713232" y="1280160"/>
-            <a:ext cx="10771632" cy="2212848"/>
+            <a:ext cx="10771632" cy="2286000"/>
           </a:xfrm>
           <a:prstGeom prst="roundRect">
             <a:avLst>
@@ -32072,7 +31820,7 @@
         <p:spPr>
           <a:xfrm>
             <a:off x="713232" y="1280160"/>
-            <a:ext cx="2788920" cy="2212848"/>
+            <a:ext cx="2788920" cy="2286000"/>
           </a:xfrm>
           <a:prstGeom prst="roundRect">
             <a:avLst>
@@ -32118,7 +31866,7 @@
         <p:spPr>
           <a:xfrm>
             <a:off x="3374136" y="1298448"/>
-            <a:ext cx="128016" cy="2176272"/>
+            <a:ext cx="128016" cy="2249424"/>
           </a:xfrm>
           <a:prstGeom prst="rect">
             <a:avLst/>
@@ -32153,16 +31901,94 @@
           </a:p>
         </p:txBody>
       </p:sp>
-      <p:sp>
-        <p:nvSpPr>
-          <p:cNvPr id="11" name="TextBox 10"/>
-          <p:cNvSpPr txBox="1"/>
-          <p:nvPr/>
-        </p:nvSpPr>
-        <p:spPr>
-          <a:xfrm>
-            <a:off x="914400" y="1463040"/>
-            <a:ext cx="2404872" cy="1005840"/>
+      <p:pic>
+        <p:nvPicPr>
+          <p:cNvPr id="11" name="Picture 10" descr="no_tuna_brush.png"/>
+          <p:cNvPicPr>
+            <a:picLocks noChangeAspect="1"/>
+          </p:cNvPicPr>
+          <p:nvPr/>
+        </p:nvPicPr>
+        <p:blipFill>
+          <a:blip r:embed="rId2"/>
+          <a:stretch>
+            <a:fillRect/>
+          </a:stretch>
+        </p:blipFill>
+        <p:spPr>
+          <a:xfrm>
+            <a:off x="969264" y="1426464"/>
+            <a:ext cx="2286000" cy="1413662"/>
+          </a:xfrm>
+          <a:prstGeom prst="rect">
+            <a:avLst/>
+          </a:prstGeom>
+        </p:spPr>
+      </p:pic>
+      <p:sp>
+        <p:nvSpPr>
+          <p:cNvPr id="12" name="TextBox 11"/>
+          <p:cNvSpPr txBox="1"/>
+          <p:nvPr/>
+        </p:nvSpPr>
+        <p:spPr>
+          <a:xfrm>
+            <a:off x="877824" y="3182112"/>
+            <a:ext cx="2514600" cy="292608"/>
+          </a:xfrm>
+          <a:prstGeom prst="rect">
+            <a:avLst/>
+          </a:prstGeom>
+          <a:noFill/>
+        </p:spPr>
+        <p:txBody>
+          <a:bodyPr wrap="square" anchor="ctr" lIns="0" rIns="0" tIns="0" bIns="0">
+            <a:spAutoFit/>
+          </a:bodyPr>
+          <a:lstStyle/>
+          <a:p>
+            <a:pPr algn="ctr">
+              <a:lnSpc>
+                <a:spcPct val="100000"/>
+              </a:lnSpc>
+              <a:spcBef>
+                <a:spcPts val="0"/>
+              </a:spcBef>
+              <a:spcAft>
+                <a:spcPts val="300"/>
+              </a:spcAft>
+            </a:pPr>
+            <a:r>
+              <a:rPr sz="900" b="0" i="0">
+                <a:solidFill>
+                  <a:srgbClr val="FFFFFF"/>
+                </a:solidFill>
+                <a:latin typeface="Calibri"/>
+              </a:rPr>
+              <a:t>● </a:t>
+            </a:r>
+            <a:r>
+              <a:rPr sz="1000" b="0" i="0">
+                <a:solidFill>
+                  <a:srgbClr val="FFFFFF"/>
+                </a:solidFill>
+                <a:latin typeface="Calibri"/>
+              </a:rPr>
+              <a:t>México · Edo. de México</a:t>
+            </a:r>
+          </a:p>
+        </p:txBody>
+      </p:sp>
+      <p:sp>
+        <p:nvSpPr>
+          <p:cNvPr id="13" name="TextBox 12"/>
+          <p:cNvSpPr txBox="1"/>
+          <p:nvPr/>
+        </p:nvSpPr>
+        <p:spPr>
+          <a:xfrm>
+            <a:off x="3703320" y="1408176"/>
+            <a:ext cx="7543800" cy="457200"/>
           </a:xfrm>
           <a:prstGeom prst="rect">
             <a:avLst/>
@@ -32177,19 +32003,19 @@
           <a:p>
             <a:pPr algn="l">
               <a:lnSpc>
-                <a:spcPct val="102000"/>
-              </a:lnSpc>
-              <a:spcBef>
-                <a:spcPts val="0"/>
-              </a:spcBef>
-              <a:spcAft>
-                <a:spcPts val="300"/>
-              </a:spcAft>
-            </a:pPr>
-            <a:r>
-              <a:rPr sz="1500" b="1" i="0">
-                <a:solidFill>
-                  <a:srgbClr val="FFFFFF"/>
+                <a:spcPct val="100000"/>
+              </a:lnSpc>
+              <a:spcBef>
+                <a:spcPts val="0"/>
+              </a:spcBef>
+              <a:spcAft>
+                <a:spcPts val="300"/>
+              </a:spcAft>
+            </a:pPr>
+            <a:r>
+              <a:rPr sz="1400" b="1" i="0">
+                <a:solidFill>
+                  <a:srgbClr val="0E213A"/>
                 </a:solidFill>
                 <a:latin typeface="Calibri"/>
               </a:rPr>
@@ -32200,127 +32026,28 @@
       </p:sp>
       <p:sp>
         <p:nvSpPr>
-          <p:cNvPr id="12" name="TextBox 11"/>
-          <p:cNvSpPr txBox="1"/>
-          <p:nvPr/>
-        </p:nvSpPr>
-        <p:spPr>
-          <a:xfrm>
-            <a:off x="914400" y="2962656"/>
-            <a:ext cx="2404872" cy="365760"/>
-          </a:xfrm>
-          <a:prstGeom prst="rect">
-            <a:avLst/>
-          </a:prstGeom>
-          <a:noFill/>
-        </p:spPr>
-        <p:txBody>
-          <a:bodyPr wrap="square" anchor="ctr" lIns="0" rIns="0" tIns="0" bIns="0">
+          <p:cNvPr id="14" name="TextBox 13"/>
+          <p:cNvSpPr txBox="1"/>
+          <p:nvPr/>
+        </p:nvSpPr>
+        <p:spPr>
+          <a:xfrm>
+            <a:off x="3703320" y="1920240"/>
+            <a:ext cx="7543800" cy="457200"/>
+          </a:xfrm>
+          <a:prstGeom prst="rect">
+            <a:avLst/>
+          </a:prstGeom>
+          <a:noFill/>
+        </p:spPr>
+        <p:txBody>
+          <a:bodyPr wrap="square" anchor="t" lIns="0" rIns="0" tIns="0" bIns="0">
             <a:spAutoFit/>
           </a:bodyPr>
           <a:lstStyle/>
           <a:p>
             <a:pPr algn="l">
               <a:lnSpc>
-                <a:spcPct val="100000"/>
-              </a:lnSpc>
-              <a:spcBef>
-                <a:spcPts val="0"/>
-              </a:spcBef>
-              <a:spcAft>
-                <a:spcPts val="300"/>
-              </a:spcAft>
-            </a:pPr>
-            <a:r>
-              <a:rPr sz="1000" b="0" i="0">
-                <a:solidFill>
-                  <a:srgbClr val="FFFFFF"/>
-                </a:solidFill>
-                <a:latin typeface="Calibri"/>
-              </a:rPr>
-              <a:t>● </a:t>
-            </a:r>
-            <a:r>
-              <a:rPr sz="1050" b="0" i="0">
-                <a:solidFill>
-                  <a:srgbClr val="FFFFFF"/>
-                </a:solidFill>
-                <a:latin typeface="Calibri"/>
-              </a:rPr>
-              <a:t>México · Edo. de México</a:t>
-            </a:r>
-          </a:p>
-        </p:txBody>
-      </p:sp>
-      <p:sp>
-        <p:nvSpPr>
-          <p:cNvPr id="13" name="TextBox 12"/>
-          <p:cNvSpPr txBox="1"/>
-          <p:nvPr/>
-        </p:nvSpPr>
-        <p:spPr>
-          <a:xfrm>
-            <a:off x="3685032" y="1426464"/>
-            <a:ext cx="7543800" cy="219456"/>
-          </a:xfrm>
-          <a:prstGeom prst="rect">
-            <a:avLst/>
-          </a:prstGeom>
-          <a:noFill/>
-        </p:spPr>
-        <p:txBody>
-          <a:bodyPr wrap="square" anchor="t" lIns="0" rIns="0" tIns="0" bIns="0">
-            <a:spAutoFit/>
-          </a:bodyPr>
-          <a:lstStyle/>
-          <a:p>
-            <a:pPr algn="l">
-              <a:lnSpc>
-                <a:spcPct val="100000"/>
-              </a:lnSpc>
-              <a:spcBef>
-                <a:spcPts val="0"/>
-              </a:spcBef>
-              <a:spcAft>
-                <a:spcPts val="300"/>
-              </a:spcAft>
-            </a:pPr>
-            <a:r>
-              <a:rPr sz="950" b="1" i="0">
-                <a:solidFill>
-                  <a:srgbClr val="18C2D6"/>
-                </a:solidFill>
-                <a:latin typeface="Calibri"/>
-              </a:rPr>
-              <a:t>FUNCIÓN</a:t>
-            </a:r>
-          </a:p>
-        </p:txBody>
-      </p:sp>
-      <p:sp>
-        <p:nvSpPr>
-          <p:cNvPr id="14" name="TextBox 13"/>
-          <p:cNvSpPr txBox="1"/>
-          <p:nvPr/>
-        </p:nvSpPr>
-        <p:spPr>
-          <a:xfrm>
-            <a:off x="3685032" y="1645920"/>
-            <a:ext cx="7543800" cy="566928"/>
-          </a:xfrm>
-          <a:prstGeom prst="rect">
-            <a:avLst/>
-          </a:prstGeom>
-          <a:noFill/>
-        </p:spPr>
-        <p:txBody>
-          <a:bodyPr wrap="square" anchor="t" lIns="0" rIns="0" tIns="0" bIns="0">
-            <a:spAutoFit/>
-          </a:bodyPr>
-          <a:lstStyle/>
-          <a:p>
-            <a:pPr algn="l">
-              <a:lnSpc>
                 <a:spcPct val="105000"/>
               </a:lnSpc>
               <a:spcBef>
@@ -32331,7 +32058,7 @@
               </a:spcAft>
             </a:pPr>
             <a:r>
-              <a:rPr sz="1150" b="0" i="0">
+              <a:rPr sz="1100" b="0" i="0">
                 <a:solidFill>
                   <a:srgbClr val="1A2432"/>
                 </a:solidFill>
@@ -32350,7 +32077,7 @@
         </p:nvSpPr>
         <p:spPr>
           <a:xfrm>
-            <a:off x="3685032" y="2295144"/>
+            <a:off x="3703320" y="2459736"/>
             <a:ext cx="118872" cy="118872"/>
           </a:xfrm>
           <a:prstGeom prst="roundRect">
@@ -32396,8 +32123,8 @@
         </p:nvSpPr>
         <p:spPr>
           <a:xfrm>
-            <a:off x="3941064" y="2249424"/>
-            <a:ext cx="7269480" cy="310896"/>
+            <a:off x="3959352" y="2414016"/>
+            <a:ext cx="7269480" cy="292608"/>
           </a:xfrm>
           <a:prstGeom prst="rect">
             <a:avLst/>
@@ -32422,7 +32149,7 @@
               </a:spcAft>
             </a:pPr>
             <a:r>
-              <a:rPr sz="1080" b="0" i="0">
+              <a:rPr sz="1050" b="0" i="0">
                 <a:solidFill>
                   <a:srgbClr val="5B6674"/>
                 </a:solidFill>
@@ -32441,7 +32168,7 @@
         </p:nvSpPr>
         <p:spPr>
           <a:xfrm>
-            <a:off x="3685032" y="2601468"/>
+            <a:off x="3703320" y="2734056"/>
             <a:ext cx="118872" cy="118872"/>
           </a:xfrm>
           <a:prstGeom prst="roundRect">
@@ -32487,8 +32214,8 @@
         </p:nvSpPr>
         <p:spPr>
           <a:xfrm>
-            <a:off x="3941064" y="2555748"/>
-            <a:ext cx="7269480" cy="310896"/>
+            <a:off x="3959352" y="2688336"/>
+            <a:ext cx="7269480" cy="292608"/>
           </a:xfrm>
           <a:prstGeom prst="rect">
             <a:avLst/>
@@ -32513,7 +32240,7 @@
               </a:spcAft>
             </a:pPr>
             <a:r>
-              <a:rPr sz="1080" b="0" i="0">
+              <a:rPr sz="1050" b="0" i="0">
                 <a:solidFill>
                   <a:srgbClr val="5B6674"/>
                 </a:solidFill>
@@ -32532,7 +32259,7 @@
         </p:nvSpPr>
         <p:spPr>
           <a:xfrm>
-            <a:off x="3685032" y="2907792"/>
+            <a:off x="3703320" y="3008376"/>
             <a:ext cx="118872" cy="118872"/>
           </a:xfrm>
           <a:prstGeom prst="roundRect">
@@ -32578,8 +32305,8 @@
         </p:nvSpPr>
         <p:spPr>
           <a:xfrm>
-            <a:off x="3941064" y="2862072"/>
-            <a:ext cx="7269480" cy="310896"/>
+            <a:off x="3959352" y="2962656"/>
+            <a:ext cx="7269480" cy="292608"/>
           </a:xfrm>
           <a:prstGeom prst="rect">
             <a:avLst/>
@@ -32604,7 +32331,7 @@
               </a:spcAft>
             </a:pPr>
             <a:r>
-              <a:rPr sz="1080" b="0" i="0">
+              <a:rPr sz="1050" b="0" i="0">
                 <a:solidFill>
                   <a:srgbClr val="5B6674"/>
                 </a:solidFill>
@@ -32623,8 +32350,8 @@
         </p:nvSpPr>
         <p:spPr>
           <a:xfrm>
-            <a:off x="3685032" y="3090672"/>
-            <a:ext cx="3931920" cy="347472"/>
+            <a:off x="3703320" y="3273552"/>
+            <a:ext cx="3931920" cy="292608"/>
           </a:xfrm>
           <a:prstGeom prst="rect">
             <a:avLst/>
@@ -32677,8 +32404,8 @@
         </p:nvSpPr>
         <p:spPr>
           <a:xfrm>
-            <a:off x="7662671" y="3090672"/>
-            <a:ext cx="3566160" cy="347472"/>
+            <a:off x="7680959" y="3273552"/>
+            <a:ext cx="3566160" cy="292608"/>
           </a:xfrm>
           <a:prstGeom prst="rect">
             <a:avLst/>
@@ -32732,7 +32459,7 @@
         <p:spPr>
           <a:xfrm>
             <a:off x="713232" y="3703320"/>
-            <a:ext cx="10771632" cy="2212848"/>
+            <a:ext cx="10771632" cy="2286000"/>
           </a:xfrm>
           <a:prstGeom prst="roundRect">
             <a:avLst>
@@ -32778,7 +32505,7 @@
         <p:spPr>
           <a:xfrm>
             <a:off x="713232" y="3703320"/>
-            <a:ext cx="2788920" cy="2212848"/>
+            <a:ext cx="2788920" cy="2286000"/>
           </a:xfrm>
           <a:prstGeom prst="roundRect">
             <a:avLst>
@@ -32824,7 +32551,7 @@
         <p:spPr>
           <a:xfrm>
             <a:off x="3374136" y="3721608"/>
-            <a:ext cx="128016" cy="2176272"/>
+            <a:ext cx="128016" cy="2249424"/>
           </a:xfrm>
           <a:prstGeom prst="rect">
             <a:avLst/>
@@ -32859,16 +32586,94 @@
           </a:p>
         </p:txBody>
       </p:sp>
-      <p:sp>
-        <p:nvSpPr>
-          <p:cNvPr id="26" name="TextBox 25"/>
-          <p:cNvSpPr txBox="1"/>
-          <p:nvPr/>
-        </p:nvSpPr>
-        <p:spPr>
-          <a:xfrm>
-            <a:off x="914400" y="3886200"/>
-            <a:ext cx="2404872" cy="1005840"/>
+      <p:pic>
+        <p:nvPicPr>
+          <p:cNvPr id="26" name="Picture 25" descr="no_agrilux.png"/>
+          <p:cNvPicPr>
+            <a:picLocks noChangeAspect="1"/>
+          </p:cNvPicPr>
+          <p:nvPr/>
+        </p:nvPicPr>
+        <p:blipFill>
+          <a:blip r:embed="rId3"/>
+          <a:stretch>
+            <a:fillRect/>
+          </a:stretch>
+        </p:blipFill>
+        <p:spPr>
+          <a:xfrm>
+            <a:off x="969264" y="3849624"/>
+            <a:ext cx="2286000" cy="1413662"/>
+          </a:xfrm>
+          <a:prstGeom prst="rect">
+            <a:avLst/>
+          </a:prstGeom>
+        </p:spPr>
+      </p:pic>
+      <p:sp>
+        <p:nvSpPr>
+          <p:cNvPr id="27" name="TextBox 26"/>
+          <p:cNvSpPr txBox="1"/>
+          <p:nvPr/>
+        </p:nvSpPr>
+        <p:spPr>
+          <a:xfrm>
+            <a:off x="877824" y="5605272"/>
+            <a:ext cx="2514600" cy="292608"/>
+          </a:xfrm>
+          <a:prstGeom prst="rect">
+            <a:avLst/>
+          </a:prstGeom>
+          <a:noFill/>
+        </p:spPr>
+        <p:txBody>
+          <a:bodyPr wrap="square" anchor="ctr" lIns="0" rIns="0" tIns="0" bIns="0">
+            <a:spAutoFit/>
+          </a:bodyPr>
+          <a:lstStyle/>
+          <a:p>
+            <a:pPr algn="ctr">
+              <a:lnSpc>
+                <a:spcPct val="100000"/>
+              </a:lnSpc>
+              <a:spcBef>
+                <a:spcPts val="0"/>
+              </a:spcBef>
+              <a:spcAft>
+                <a:spcPts val="300"/>
+              </a:spcAft>
+            </a:pPr>
+            <a:r>
+              <a:rPr sz="900" b="0" i="0">
+                <a:solidFill>
+                  <a:srgbClr val="FFFFFF"/>
+                </a:solidFill>
+                <a:latin typeface="Calibri"/>
+              </a:rPr>
+              <a:t>● </a:t>
+            </a:r>
+            <a:r>
+              <a:rPr sz="1000" b="0" i="0">
+                <a:solidFill>
+                  <a:srgbClr val="FFFFFF"/>
+                </a:solidFill>
+                <a:latin typeface="Calibri"/>
+              </a:rPr>
+              <a:t>Internacional</a:t>
+            </a:r>
+          </a:p>
+        </p:txBody>
+      </p:sp>
+      <p:sp>
+        <p:nvSpPr>
+          <p:cNvPr id="28" name="TextBox 27"/>
+          <p:cNvSpPr txBox="1"/>
+          <p:nvPr/>
+        </p:nvSpPr>
+        <p:spPr>
+          <a:xfrm>
+            <a:off x="3703320" y="3831336"/>
+            <a:ext cx="7543800" cy="457200"/>
           </a:xfrm>
           <a:prstGeom prst="rect">
             <a:avLst/>
@@ -32883,19 +32688,19 @@
           <a:p>
             <a:pPr algn="l">
               <a:lnSpc>
-                <a:spcPct val="102000"/>
-              </a:lnSpc>
-              <a:spcBef>
-                <a:spcPts val="0"/>
-              </a:spcBef>
-              <a:spcAft>
-                <a:spcPts val="300"/>
-              </a:spcAft>
-            </a:pPr>
-            <a:r>
-              <a:rPr sz="1500" b="1" i="0">
-                <a:solidFill>
-                  <a:srgbClr val="FFFFFF"/>
+                <a:spcPct val="100000"/>
+              </a:lnSpc>
+              <a:spcBef>
+                <a:spcPts val="0"/>
+              </a:spcBef>
+              <a:spcAft>
+                <a:spcPts val="300"/>
+              </a:spcAft>
+            </a:pPr>
+            <a:r>
+              <a:rPr sz="1400" b="1" i="0">
+                <a:solidFill>
+                  <a:srgbClr val="0E213A"/>
                 </a:solidFill>
                 <a:latin typeface="Calibri"/>
               </a:rPr>
@@ -32906,127 +32711,28 @@
       </p:sp>
       <p:sp>
         <p:nvSpPr>
-          <p:cNvPr id="27" name="TextBox 26"/>
-          <p:cNvSpPr txBox="1"/>
-          <p:nvPr/>
-        </p:nvSpPr>
-        <p:spPr>
-          <a:xfrm>
-            <a:off x="914400" y="5385816"/>
-            <a:ext cx="2404872" cy="365760"/>
-          </a:xfrm>
-          <a:prstGeom prst="rect">
-            <a:avLst/>
-          </a:prstGeom>
-          <a:noFill/>
-        </p:spPr>
-        <p:txBody>
-          <a:bodyPr wrap="square" anchor="ctr" lIns="0" rIns="0" tIns="0" bIns="0">
+          <p:cNvPr id="29" name="TextBox 28"/>
+          <p:cNvSpPr txBox="1"/>
+          <p:nvPr/>
+        </p:nvSpPr>
+        <p:spPr>
+          <a:xfrm>
+            <a:off x="3703320" y="4343400"/>
+            <a:ext cx="7543800" cy="457200"/>
+          </a:xfrm>
+          <a:prstGeom prst="rect">
+            <a:avLst/>
+          </a:prstGeom>
+          <a:noFill/>
+        </p:spPr>
+        <p:txBody>
+          <a:bodyPr wrap="square" anchor="t" lIns="0" rIns="0" tIns="0" bIns="0">
             <a:spAutoFit/>
           </a:bodyPr>
           <a:lstStyle/>
           <a:p>
             <a:pPr algn="l">
               <a:lnSpc>
-                <a:spcPct val="100000"/>
-              </a:lnSpc>
-              <a:spcBef>
-                <a:spcPts val="0"/>
-              </a:spcBef>
-              <a:spcAft>
-                <a:spcPts val="300"/>
-              </a:spcAft>
-            </a:pPr>
-            <a:r>
-              <a:rPr sz="1000" b="0" i="0">
-                <a:solidFill>
-                  <a:srgbClr val="FFFFFF"/>
-                </a:solidFill>
-                <a:latin typeface="Calibri"/>
-              </a:rPr>
-              <a:t>● </a:t>
-            </a:r>
-            <a:r>
-              <a:rPr sz="1050" b="0" i="0">
-                <a:solidFill>
-                  <a:srgbClr val="FFFFFF"/>
-                </a:solidFill>
-                <a:latin typeface="Calibri"/>
-              </a:rPr>
-              <a:t>Internacional</a:t>
-            </a:r>
-          </a:p>
-        </p:txBody>
-      </p:sp>
-      <p:sp>
-        <p:nvSpPr>
-          <p:cNvPr id="28" name="TextBox 27"/>
-          <p:cNvSpPr txBox="1"/>
-          <p:nvPr/>
-        </p:nvSpPr>
-        <p:spPr>
-          <a:xfrm>
-            <a:off x="3685032" y="3849624"/>
-            <a:ext cx="7543800" cy="219456"/>
-          </a:xfrm>
-          <a:prstGeom prst="rect">
-            <a:avLst/>
-          </a:prstGeom>
-          <a:noFill/>
-        </p:spPr>
-        <p:txBody>
-          <a:bodyPr wrap="square" anchor="t" lIns="0" rIns="0" tIns="0" bIns="0">
-            <a:spAutoFit/>
-          </a:bodyPr>
-          <a:lstStyle/>
-          <a:p>
-            <a:pPr algn="l">
-              <a:lnSpc>
-                <a:spcPct val="100000"/>
-              </a:lnSpc>
-              <a:spcBef>
-                <a:spcPts val="0"/>
-              </a:spcBef>
-              <a:spcAft>
-                <a:spcPts val="300"/>
-              </a:spcAft>
-            </a:pPr>
-            <a:r>
-              <a:rPr sz="950" b="1" i="0">
-                <a:solidFill>
-                  <a:srgbClr val="18C2D6"/>
-                </a:solidFill>
-                <a:latin typeface="Calibri"/>
-              </a:rPr>
-              <a:t>FUNCIÓN</a:t>
-            </a:r>
-          </a:p>
-        </p:txBody>
-      </p:sp>
-      <p:sp>
-        <p:nvSpPr>
-          <p:cNvPr id="29" name="TextBox 28"/>
-          <p:cNvSpPr txBox="1"/>
-          <p:nvPr/>
-        </p:nvSpPr>
-        <p:spPr>
-          <a:xfrm>
-            <a:off x="3685032" y="4069080"/>
-            <a:ext cx="7543800" cy="566928"/>
-          </a:xfrm>
-          <a:prstGeom prst="rect">
-            <a:avLst/>
-          </a:prstGeom>
-          <a:noFill/>
-        </p:spPr>
-        <p:txBody>
-          <a:bodyPr wrap="square" anchor="t" lIns="0" rIns="0" tIns="0" bIns="0">
-            <a:spAutoFit/>
-          </a:bodyPr>
-          <a:lstStyle/>
-          <a:p>
-            <a:pPr algn="l">
-              <a:lnSpc>
                 <a:spcPct val="105000"/>
               </a:lnSpc>
               <a:spcBef>
@@ -33037,7 +32743,7 @@
               </a:spcAft>
             </a:pPr>
             <a:r>
-              <a:rPr sz="1150" b="0" i="0">
+              <a:rPr sz="1100" b="0" i="0">
                 <a:solidFill>
                   <a:srgbClr val="1A2432"/>
                 </a:solidFill>
@@ -33056,7 +32762,7 @@
         </p:nvSpPr>
         <p:spPr>
           <a:xfrm>
-            <a:off x="3685032" y="4718304"/>
+            <a:off x="3703320" y="4882896"/>
             <a:ext cx="118872" cy="118872"/>
           </a:xfrm>
           <a:prstGeom prst="roundRect">
@@ -33102,8 +32808,8 @@
         </p:nvSpPr>
         <p:spPr>
           <a:xfrm>
-            <a:off x="3941064" y="4672584"/>
-            <a:ext cx="7269480" cy="310896"/>
+            <a:off x="3959352" y="4837176"/>
+            <a:ext cx="7269480" cy="292608"/>
           </a:xfrm>
           <a:prstGeom prst="rect">
             <a:avLst/>
@@ -33128,7 +32834,7 @@
               </a:spcAft>
             </a:pPr>
             <a:r>
-              <a:rPr sz="1080" b="0" i="0">
+              <a:rPr sz="1050" b="0" i="0">
                 <a:solidFill>
                   <a:srgbClr val="5B6674"/>
                 </a:solidFill>
@@ -33147,7 +32853,7 @@
         </p:nvSpPr>
         <p:spPr>
           <a:xfrm>
-            <a:off x="3685032" y="5024628"/>
+            <a:off x="3703320" y="5157216"/>
             <a:ext cx="118872" cy="118872"/>
           </a:xfrm>
           <a:prstGeom prst="roundRect">
@@ -33193,8 +32899,8 @@
         </p:nvSpPr>
         <p:spPr>
           <a:xfrm>
-            <a:off x="3941064" y="4978908"/>
-            <a:ext cx="7269480" cy="310896"/>
+            <a:off x="3959352" y="5111496"/>
+            <a:ext cx="7269480" cy="292608"/>
           </a:xfrm>
           <a:prstGeom prst="rect">
             <a:avLst/>
@@ -33219,7 +32925,7 @@
               </a:spcAft>
             </a:pPr>
             <a:r>
-              <a:rPr sz="1080" b="0" i="0">
+              <a:rPr sz="1050" b="0" i="0">
                 <a:solidFill>
                   <a:srgbClr val="5B6674"/>
                 </a:solidFill>
@@ -33238,7 +32944,7 @@
         </p:nvSpPr>
         <p:spPr>
           <a:xfrm>
-            <a:off x="3685032" y="5330952"/>
+            <a:off x="3703320" y="5431536"/>
             <a:ext cx="118872" cy="118872"/>
           </a:xfrm>
           <a:prstGeom prst="roundRect">
@@ -33284,8 +32990,8 @@
         </p:nvSpPr>
         <p:spPr>
           <a:xfrm>
-            <a:off x="3941064" y="5285232"/>
-            <a:ext cx="7269480" cy="310896"/>
+            <a:off x="3959352" y="5385816"/>
+            <a:ext cx="7269480" cy="292608"/>
           </a:xfrm>
           <a:prstGeom prst="rect">
             <a:avLst/>
@@ -33310,7 +33016,7 @@
               </a:spcAft>
             </a:pPr>
             <a:r>
-              <a:rPr sz="1080" b="0" i="0">
+              <a:rPr sz="1050" b="0" i="0">
                 <a:solidFill>
                   <a:srgbClr val="5B6674"/>
                 </a:solidFill>
@@ -33329,8 +33035,8 @@
         </p:nvSpPr>
         <p:spPr>
           <a:xfrm>
-            <a:off x="3685032" y="5513832"/>
-            <a:ext cx="3931920" cy="347472"/>
+            <a:off x="3703320" y="5696712"/>
+            <a:ext cx="3931920" cy="292608"/>
           </a:xfrm>
           <a:prstGeom prst="rect">
             <a:avLst/>
@@ -33383,8 +33089,8 @@
         </p:nvSpPr>
         <p:spPr>
           <a:xfrm>
-            <a:off x="7662671" y="5513832"/>
-            <a:ext cx="3566160" cy="347472"/>
+            <a:off x="7680959" y="5696712"/>
+            <a:ext cx="3566160" cy="292608"/>
           </a:xfrm>
           <a:prstGeom prst="rect">
             <a:avLst/>
@@ -33733,7 +33439,7 @@
         <p:spPr>
           <a:xfrm>
             <a:off x="713232" y="1280160"/>
-            <a:ext cx="10771632" cy="2212848"/>
+            <a:ext cx="10771632" cy="2286000"/>
           </a:xfrm>
           <a:prstGeom prst="roundRect">
             <a:avLst>
@@ -33779,7 +33485,7 @@
         <p:spPr>
           <a:xfrm>
             <a:off x="713232" y="1280160"/>
-            <a:ext cx="2788920" cy="2212848"/>
+            <a:ext cx="2788920" cy="2286000"/>
           </a:xfrm>
           <a:prstGeom prst="roundRect">
             <a:avLst>
@@ -33825,7 +33531,7 @@
         <p:spPr>
           <a:xfrm>
             <a:off x="3374136" y="1298448"/>
-            <a:ext cx="128016" cy="2176272"/>
+            <a:ext cx="128016" cy="2249424"/>
           </a:xfrm>
           <a:prstGeom prst="rect">
             <a:avLst/>
@@ -33860,16 +33566,94 @@
           </a:p>
         </p:txBody>
       </p:sp>
-      <p:sp>
-        <p:nvSpPr>
-          <p:cNvPr id="11" name="TextBox 10"/>
-          <p:cNvSpPr txBox="1"/>
-          <p:nvPr/>
-        </p:nvSpPr>
-        <p:spPr>
-          <a:xfrm>
-            <a:off x="914400" y="1463040"/>
-            <a:ext cx="2404872" cy="1005840"/>
+      <p:pic>
+        <p:nvPicPr>
+          <p:cNvPr id="11" name="Picture 10" descr="no_lav_inmersion.png"/>
+          <p:cNvPicPr>
+            <a:picLocks noChangeAspect="1"/>
+          </p:cNvPicPr>
+          <p:nvPr/>
+        </p:nvPicPr>
+        <p:blipFill>
+          <a:blip r:embed="rId2"/>
+          <a:stretch>
+            <a:fillRect/>
+          </a:stretch>
+        </p:blipFill>
+        <p:spPr>
+          <a:xfrm>
+            <a:off x="969264" y="1426464"/>
+            <a:ext cx="2286000" cy="1413662"/>
+          </a:xfrm>
+          <a:prstGeom prst="rect">
+            <a:avLst/>
+          </a:prstGeom>
+        </p:spPr>
+      </p:pic>
+      <p:sp>
+        <p:nvSpPr>
+          <p:cNvPr id="12" name="TextBox 11"/>
+          <p:cNvSpPr txBox="1"/>
+          <p:nvPr/>
+        </p:nvSpPr>
+        <p:spPr>
+          <a:xfrm>
+            <a:off x="877824" y="3182112"/>
+            <a:ext cx="2514600" cy="292608"/>
+          </a:xfrm>
+          <a:prstGeom prst="rect">
+            <a:avLst/>
+          </a:prstGeom>
+          <a:noFill/>
+        </p:spPr>
+        <p:txBody>
+          <a:bodyPr wrap="square" anchor="ctr" lIns="0" rIns="0" tIns="0" bIns="0">
+            <a:spAutoFit/>
+          </a:bodyPr>
+          <a:lstStyle/>
+          <a:p>
+            <a:pPr algn="ctr">
+              <a:lnSpc>
+                <a:spcPct val="100000"/>
+              </a:lnSpc>
+              <a:spcBef>
+                <a:spcPts val="0"/>
+              </a:spcBef>
+              <a:spcAft>
+                <a:spcPts val="300"/>
+              </a:spcAft>
+            </a:pPr>
+            <a:r>
+              <a:rPr sz="900" b="0" i="0">
+                <a:solidFill>
+                  <a:srgbClr val="FFFFFF"/>
+                </a:solidFill>
+                <a:latin typeface="Calibri"/>
+              </a:rPr>
+              <a:t>● </a:t>
+            </a:r>
+            <a:r>
+              <a:rPr sz="1000" b="0" i="0">
+                <a:solidFill>
+                  <a:srgbClr val="FFFFFF"/>
+                </a:solidFill>
+                <a:latin typeface="Calibri"/>
+              </a:rPr>
+              <a:t>México</a:t>
+            </a:r>
+          </a:p>
+        </p:txBody>
+      </p:sp>
+      <p:sp>
+        <p:nvSpPr>
+          <p:cNvPr id="13" name="TextBox 12"/>
+          <p:cNvSpPr txBox="1"/>
+          <p:nvPr/>
+        </p:nvSpPr>
+        <p:spPr>
+          <a:xfrm>
+            <a:off x="3703320" y="1408176"/>
+            <a:ext cx="7543800" cy="457200"/>
           </a:xfrm>
           <a:prstGeom prst="rect">
             <a:avLst/>
@@ -33884,19 +33668,19 @@
           <a:p>
             <a:pPr algn="l">
               <a:lnSpc>
-                <a:spcPct val="102000"/>
-              </a:lnSpc>
-              <a:spcBef>
-                <a:spcPts val="0"/>
-              </a:spcBef>
-              <a:spcAft>
-                <a:spcPts val="300"/>
-              </a:spcAft>
-            </a:pPr>
-            <a:r>
-              <a:rPr sz="1500" b="1" i="0">
-                <a:solidFill>
-                  <a:srgbClr val="FFFFFF"/>
+                <a:spcPct val="100000"/>
+              </a:lnSpc>
+              <a:spcBef>
+                <a:spcPts val="0"/>
+              </a:spcBef>
+              <a:spcAft>
+                <a:spcPts val="300"/>
+              </a:spcAft>
+            </a:pPr>
+            <a:r>
+              <a:rPr sz="1400" b="1" i="0">
+                <a:solidFill>
+                  <a:srgbClr val="0E213A"/>
                 </a:solidFill>
                 <a:latin typeface="Calibri"/>
               </a:rPr>
@@ -33907,127 +33691,28 @@
       </p:sp>
       <p:sp>
         <p:nvSpPr>
-          <p:cNvPr id="12" name="TextBox 11"/>
-          <p:cNvSpPr txBox="1"/>
-          <p:nvPr/>
-        </p:nvSpPr>
-        <p:spPr>
-          <a:xfrm>
-            <a:off x="914400" y="2962656"/>
-            <a:ext cx="2404872" cy="365760"/>
-          </a:xfrm>
-          <a:prstGeom prst="rect">
-            <a:avLst/>
-          </a:prstGeom>
-          <a:noFill/>
-        </p:spPr>
-        <p:txBody>
-          <a:bodyPr wrap="square" anchor="ctr" lIns="0" rIns="0" tIns="0" bIns="0">
+          <p:cNvPr id="14" name="TextBox 13"/>
+          <p:cNvSpPr txBox="1"/>
+          <p:nvPr/>
+        </p:nvSpPr>
+        <p:spPr>
+          <a:xfrm>
+            <a:off x="3703320" y="1920240"/>
+            <a:ext cx="7543800" cy="457200"/>
+          </a:xfrm>
+          <a:prstGeom prst="rect">
+            <a:avLst/>
+          </a:prstGeom>
+          <a:noFill/>
+        </p:spPr>
+        <p:txBody>
+          <a:bodyPr wrap="square" anchor="t" lIns="0" rIns="0" tIns="0" bIns="0">
             <a:spAutoFit/>
           </a:bodyPr>
           <a:lstStyle/>
           <a:p>
             <a:pPr algn="l">
               <a:lnSpc>
-                <a:spcPct val="100000"/>
-              </a:lnSpc>
-              <a:spcBef>
-                <a:spcPts val="0"/>
-              </a:spcBef>
-              <a:spcAft>
-                <a:spcPts val="300"/>
-              </a:spcAft>
-            </a:pPr>
-            <a:r>
-              <a:rPr sz="1000" b="0" i="0">
-                <a:solidFill>
-                  <a:srgbClr val="FFFFFF"/>
-                </a:solidFill>
-                <a:latin typeface="Calibri"/>
-              </a:rPr>
-              <a:t>● </a:t>
-            </a:r>
-            <a:r>
-              <a:rPr sz="1050" b="0" i="0">
-                <a:solidFill>
-                  <a:srgbClr val="FFFFFF"/>
-                </a:solidFill>
-                <a:latin typeface="Calibri"/>
-              </a:rPr>
-              <a:t>México</a:t>
-            </a:r>
-          </a:p>
-        </p:txBody>
-      </p:sp>
-      <p:sp>
-        <p:nvSpPr>
-          <p:cNvPr id="13" name="TextBox 12"/>
-          <p:cNvSpPr txBox="1"/>
-          <p:nvPr/>
-        </p:nvSpPr>
-        <p:spPr>
-          <a:xfrm>
-            <a:off x="3685032" y="1426464"/>
-            <a:ext cx="7543800" cy="219456"/>
-          </a:xfrm>
-          <a:prstGeom prst="rect">
-            <a:avLst/>
-          </a:prstGeom>
-          <a:noFill/>
-        </p:spPr>
-        <p:txBody>
-          <a:bodyPr wrap="square" anchor="t" lIns="0" rIns="0" tIns="0" bIns="0">
-            <a:spAutoFit/>
-          </a:bodyPr>
-          <a:lstStyle/>
-          <a:p>
-            <a:pPr algn="l">
-              <a:lnSpc>
-                <a:spcPct val="100000"/>
-              </a:lnSpc>
-              <a:spcBef>
-                <a:spcPts val="0"/>
-              </a:spcBef>
-              <a:spcAft>
-                <a:spcPts val="300"/>
-              </a:spcAft>
-            </a:pPr>
-            <a:r>
-              <a:rPr sz="950" b="1" i="0">
-                <a:solidFill>
-                  <a:srgbClr val="18C2D6"/>
-                </a:solidFill>
-                <a:latin typeface="Calibri"/>
-              </a:rPr>
-              <a:t>FUNCIÓN</a:t>
-            </a:r>
-          </a:p>
-        </p:txBody>
-      </p:sp>
-      <p:sp>
-        <p:nvSpPr>
-          <p:cNvPr id="14" name="TextBox 13"/>
-          <p:cNvSpPr txBox="1"/>
-          <p:nvPr/>
-        </p:nvSpPr>
-        <p:spPr>
-          <a:xfrm>
-            <a:off x="3685032" y="1645920"/>
-            <a:ext cx="7543800" cy="566928"/>
-          </a:xfrm>
-          <a:prstGeom prst="rect">
-            <a:avLst/>
-          </a:prstGeom>
-          <a:noFill/>
-        </p:spPr>
-        <p:txBody>
-          <a:bodyPr wrap="square" anchor="t" lIns="0" rIns="0" tIns="0" bIns="0">
-            <a:spAutoFit/>
-          </a:bodyPr>
-          <a:lstStyle/>
-          <a:p>
-            <a:pPr algn="l">
-              <a:lnSpc>
                 <a:spcPct val="105000"/>
               </a:lnSpc>
               <a:spcBef>
@@ -34038,7 +33723,7 @@
               </a:spcAft>
             </a:pPr>
             <a:r>
-              <a:rPr sz="1150" b="0" i="0">
+              <a:rPr sz="1100" b="0" i="0">
                 <a:solidFill>
                   <a:srgbClr val="1A2432"/>
                 </a:solidFill>
@@ -34057,7 +33742,7 @@
         </p:nvSpPr>
         <p:spPr>
           <a:xfrm>
-            <a:off x="3685032" y="2295144"/>
+            <a:off x="3703320" y="2459736"/>
             <a:ext cx="118872" cy="118872"/>
           </a:xfrm>
           <a:prstGeom prst="roundRect">
@@ -34103,8 +33788,8 @@
         </p:nvSpPr>
         <p:spPr>
           <a:xfrm>
-            <a:off x="3941064" y="2249424"/>
-            <a:ext cx="7269480" cy="310896"/>
+            <a:off x="3959352" y="2414016"/>
+            <a:ext cx="7269480" cy="292608"/>
           </a:xfrm>
           <a:prstGeom prst="rect">
             <a:avLst/>
@@ -34129,7 +33814,7 @@
               </a:spcAft>
             </a:pPr>
             <a:r>
-              <a:rPr sz="1080" b="0" i="0">
+              <a:rPr sz="1050" b="0" i="0">
                 <a:solidFill>
                   <a:srgbClr val="5B6674"/>
                 </a:solidFill>
@@ -34148,7 +33833,7 @@
         </p:nvSpPr>
         <p:spPr>
           <a:xfrm>
-            <a:off x="3685032" y="2601468"/>
+            <a:off x="3703320" y="2734056"/>
             <a:ext cx="118872" cy="118872"/>
           </a:xfrm>
           <a:prstGeom prst="roundRect">
@@ -34194,8 +33879,8 @@
         </p:nvSpPr>
         <p:spPr>
           <a:xfrm>
-            <a:off x="3941064" y="2555748"/>
-            <a:ext cx="7269480" cy="310896"/>
+            <a:off x="3959352" y="2688336"/>
+            <a:ext cx="7269480" cy="292608"/>
           </a:xfrm>
           <a:prstGeom prst="rect">
             <a:avLst/>
@@ -34220,7 +33905,7 @@
               </a:spcAft>
             </a:pPr>
             <a:r>
-              <a:rPr sz="1080" b="0" i="0">
+              <a:rPr sz="1050" b="0" i="0">
                 <a:solidFill>
                   <a:srgbClr val="5B6674"/>
                 </a:solidFill>
@@ -34239,7 +33924,7 @@
         </p:nvSpPr>
         <p:spPr>
           <a:xfrm>
-            <a:off x="3685032" y="2907792"/>
+            <a:off x="3703320" y="3008376"/>
             <a:ext cx="118872" cy="118872"/>
           </a:xfrm>
           <a:prstGeom prst="roundRect">
@@ -34285,8 +33970,8 @@
         </p:nvSpPr>
         <p:spPr>
           <a:xfrm>
-            <a:off x="3941064" y="2862072"/>
-            <a:ext cx="7269480" cy="310896"/>
+            <a:off x="3959352" y="2962656"/>
+            <a:ext cx="7269480" cy="292608"/>
           </a:xfrm>
           <a:prstGeom prst="rect">
             <a:avLst/>
@@ -34311,7 +33996,7 @@
               </a:spcAft>
             </a:pPr>
             <a:r>
-              <a:rPr sz="1080" b="0" i="0">
+              <a:rPr sz="1050" b="0" i="0">
                 <a:solidFill>
                   <a:srgbClr val="5B6674"/>
                 </a:solidFill>
@@ -34330,8 +34015,8 @@
         </p:nvSpPr>
         <p:spPr>
           <a:xfrm>
-            <a:off x="3685032" y="3090672"/>
-            <a:ext cx="3931920" cy="347472"/>
+            <a:off x="3703320" y="3273552"/>
+            <a:ext cx="3931920" cy="292608"/>
           </a:xfrm>
           <a:prstGeom prst="rect">
             <a:avLst/>
@@ -34384,8 +34069,8 @@
         </p:nvSpPr>
         <p:spPr>
           <a:xfrm>
-            <a:off x="7662671" y="3090672"/>
-            <a:ext cx="3566160" cy="347472"/>
+            <a:off x="7680959" y="3273552"/>
+            <a:ext cx="3566160" cy="292608"/>
           </a:xfrm>
           <a:prstGeom prst="rect">
             <a:avLst/>
@@ -34439,7 +34124,7 @@
         <p:spPr>
           <a:xfrm>
             <a:off x="713232" y="3703320"/>
-            <a:ext cx="10771632" cy="2212848"/>
+            <a:ext cx="10771632" cy="2286000"/>
           </a:xfrm>
           <a:prstGeom prst="roundRect">
             <a:avLst>
@@ -34485,7 +34170,7 @@
         <p:spPr>
           <a:xfrm>
             <a:off x="713232" y="3703320"/>
-            <a:ext cx="2788920" cy="2212848"/>
+            <a:ext cx="2788920" cy="2286000"/>
           </a:xfrm>
           <a:prstGeom prst="roundRect">
             <a:avLst>
@@ -34531,7 +34216,7 @@
         <p:spPr>
           <a:xfrm>
             <a:off x="3374136" y="3721608"/>
-            <a:ext cx="128016" cy="2176272"/>
+            <a:ext cx="128016" cy="2249424"/>
           </a:xfrm>
           <a:prstGeom prst="rect">
             <a:avLst/>
@@ -34566,16 +34251,94 @@
           </a:p>
         </p:txBody>
       </p:sp>
-      <p:sp>
-        <p:nvSpPr>
-          <p:cNvPr id="26" name="TextBox 25"/>
-          <p:cNvSpPr txBox="1"/>
-          <p:nvPr/>
-        </p:nvSpPr>
-        <p:spPr>
-          <a:xfrm>
-            <a:off x="914400" y="3886200"/>
-            <a:ext cx="2404872" cy="1005840"/>
+      <p:pic>
+        <p:nvPicPr>
+          <p:cNvPr id="26" name="Picture 25" descr="no_lav_burbujas.png"/>
+          <p:cNvPicPr>
+            <a:picLocks noChangeAspect="1"/>
+          </p:cNvPicPr>
+          <p:nvPr/>
+        </p:nvPicPr>
+        <p:blipFill>
+          <a:blip r:embed="rId3"/>
+          <a:stretch>
+            <a:fillRect/>
+          </a:stretch>
+        </p:blipFill>
+        <p:spPr>
+          <a:xfrm>
+            <a:off x="969264" y="3849624"/>
+            <a:ext cx="2286000" cy="1413662"/>
+          </a:xfrm>
+          <a:prstGeom prst="rect">
+            <a:avLst/>
+          </a:prstGeom>
+        </p:spPr>
+      </p:pic>
+      <p:sp>
+        <p:nvSpPr>
+          <p:cNvPr id="27" name="TextBox 26"/>
+          <p:cNvSpPr txBox="1"/>
+          <p:nvPr/>
+        </p:nvSpPr>
+        <p:spPr>
+          <a:xfrm>
+            <a:off x="877824" y="5605272"/>
+            <a:ext cx="2514600" cy="292608"/>
+          </a:xfrm>
+          <a:prstGeom prst="rect">
+            <a:avLst/>
+          </a:prstGeom>
+          <a:noFill/>
+        </p:spPr>
+        <p:txBody>
+          <a:bodyPr wrap="square" anchor="ctr" lIns="0" rIns="0" tIns="0" bIns="0">
+            <a:spAutoFit/>
+          </a:bodyPr>
+          <a:lstStyle/>
+          <a:p>
+            <a:pPr algn="ctr">
+              <a:lnSpc>
+                <a:spcPct val="100000"/>
+              </a:lnSpc>
+              <a:spcBef>
+                <a:spcPts val="0"/>
+              </a:spcBef>
+              <a:spcAft>
+                <a:spcPts val="300"/>
+              </a:spcAft>
+            </a:pPr>
+            <a:r>
+              <a:rPr sz="900" b="0" i="0">
+                <a:solidFill>
+                  <a:srgbClr val="FFFFFF"/>
+                </a:solidFill>
+                <a:latin typeface="Calibri"/>
+              </a:rPr>
+              <a:t>● </a:t>
+            </a:r>
+            <a:r>
+              <a:rPr sz="1000" b="0" i="0">
+                <a:solidFill>
+                  <a:srgbClr val="FFFFFF"/>
+                </a:solidFill>
+                <a:latin typeface="Calibri"/>
+              </a:rPr>
+              <a:t>México</a:t>
+            </a:r>
+          </a:p>
+        </p:txBody>
+      </p:sp>
+      <p:sp>
+        <p:nvSpPr>
+          <p:cNvPr id="28" name="TextBox 27"/>
+          <p:cNvSpPr txBox="1"/>
+          <p:nvPr/>
+        </p:nvSpPr>
+        <p:spPr>
+          <a:xfrm>
+            <a:off x="3703320" y="3831336"/>
+            <a:ext cx="7543800" cy="457200"/>
           </a:xfrm>
           <a:prstGeom prst="rect">
             <a:avLst/>
@@ -34590,19 +34353,19 @@
           <a:p>
             <a:pPr algn="l">
               <a:lnSpc>
-                <a:spcPct val="102000"/>
-              </a:lnSpc>
-              <a:spcBef>
-                <a:spcPts val="0"/>
-              </a:spcBef>
-              <a:spcAft>
-                <a:spcPts val="300"/>
-              </a:spcAft>
-            </a:pPr>
-            <a:r>
-              <a:rPr sz="1500" b="1" i="0">
-                <a:solidFill>
-                  <a:srgbClr val="FFFFFF"/>
+                <a:spcPct val="100000"/>
+              </a:lnSpc>
+              <a:spcBef>
+                <a:spcPts val="0"/>
+              </a:spcBef>
+              <a:spcAft>
+                <a:spcPts val="300"/>
+              </a:spcAft>
+            </a:pPr>
+            <a:r>
+              <a:rPr sz="1400" b="1" i="0">
+                <a:solidFill>
+                  <a:srgbClr val="0E213A"/>
                 </a:solidFill>
                 <a:latin typeface="Calibri"/>
               </a:rPr>
@@ -34613,127 +34376,28 @@
       </p:sp>
       <p:sp>
         <p:nvSpPr>
-          <p:cNvPr id="27" name="TextBox 26"/>
-          <p:cNvSpPr txBox="1"/>
-          <p:nvPr/>
-        </p:nvSpPr>
-        <p:spPr>
-          <a:xfrm>
-            <a:off x="914400" y="5385816"/>
-            <a:ext cx="2404872" cy="365760"/>
-          </a:xfrm>
-          <a:prstGeom prst="rect">
-            <a:avLst/>
-          </a:prstGeom>
-          <a:noFill/>
-        </p:spPr>
-        <p:txBody>
-          <a:bodyPr wrap="square" anchor="ctr" lIns="0" rIns="0" tIns="0" bIns="0">
+          <p:cNvPr id="29" name="TextBox 28"/>
+          <p:cNvSpPr txBox="1"/>
+          <p:nvPr/>
+        </p:nvSpPr>
+        <p:spPr>
+          <a:xfrm>
+            <a:off x="3703320" y="4343400"/>
+            <a:ext cx="7543800" cy="457200"/>
+          </a:xfrm>
+          <a:prstGeom prst="rect">
+            <a:avLst/>
+          </a:prstGeom>
+          <a:noFill/>
+        </p:spPr>
+        <p:txBody>
+          <a:bodyPr wrap="square" anchor="t" lIns="0" rIns="0" tIns="0" bIns="0">
             <a:spAutoFit/>
           </a:bodyPr>
           <a:lstStyle/>
           <a:p>
             <a:pPr algn="l">
               <a:lnSpc>
-                <a:spcPct val="100000"/>
-              </a:lnSpc>
-              <a:spcBef>
-                <a:spcPts val="0"/>
-              </a:spcBef>
-              <a:spcAft>
-                <a:spcPts val="300"/>
-              </a:spcAft>
-            </a:pPr>
-            <a:r>
-              <a:rPr sz="1000" b="0" i="0">
-                <a:solidFill>
-                  <a:srgbClr val="FFFFFF"/>
-                </a:solidFill>
-                <a:latin typeface="Calibri"/>
-              </a:rPr>
-              <a:t>● </a:t>
-            </a:r>
-            <a:r>
-              <a:rPr sz="1050" b="0" i="0">
-                <a:solidFill>
-                  <a:srgbClr val="FFFFFF"/>
-                </a:solidFill>
-                <a:latin typeface="Calibri"/>
-              </a:rPr>
-              <a:t>México</a:t>
-            </a:r>
-          </a:p>
-        </p:txBody>
-      </p:sp>
-      <p:sp>
-        <p:nvSpPr>
-          <p:cNvPr id="28" name="TextBox 27"/>
-          <p:cNvSpPr txBox="1"/>
-          <p:nvPr/>
-        </p:nvSpPr>
-        <p:spPr>
-          <a:xfrm>
-            <a:off x="3685032" y="3849624"/>
-            <a:ext cx="7543800" cy="219456"/>
-          </a:xfrm>
-          <a:prstGeom prst="rect">
-            <a:avLst/>
-          </a:prstGeom>
-          <a:noFill/>
-        </p:spPr>
-        <p:txBody>
-          <a:bodyPr wrap="square" anchor="t" lIns="0" rIns="0" tIns="0" bIns="0">
-            <a:spAutoFit/>
-          </a:bodyPr>
-          <a:lstStyle/>
-          <a:p>
-            <a:pPr algn="l">
-              <a:lnSpc>
-                <a:spcPct val="100000"/>
-              </a:lnSpc>
-              <a:spcBef>
-                <a:spcPts val="0"/>
-              </a:spcBef>
-              <a:spcAft>
-                <a:spcPts val="300"/>
-              </a:spcAft>
-            </a:pPr>
-            <a:r>
-              <a:rPr sz="950" b="1" i="0">
-                <a:solidFill>
-                  <a:srgbClr val="18C2D6"/>
-                </a:solidFill>
-                <a:latin typeface="Calibri"/>
-              </a:rPr>
-              <a:t>FUNCIÓN</a:t>
-            </a:r>
-          </a:p>
-        </p:txBody>
-      </p:sp>
-      <p:sp>
-        <p:nvSpPr>
-          <p:cNvPr id="29" name="TextBox 28"/>
-          <p:cNvSpPr txBox="1"/>
-          <p:nvPr/>
-        </p:nvSpPr>
-        <p:spPr>
-          <a:xfrm>
-            <a:off x="3685032" y="4069080"/>
-            <a:ext cx="7543800" cy="566928"/>
-          </a:xfrm>
-          <a:prstGeom prst="rect">
-            <a:avLst/>
-          </a:prstGeom>
-          <a:noFill/>
-        </p:spPr>
-        <p:txBody>
-          <a:bodyPr wrap="square" anchor="t" lIns="0" rIns="0" tIns="0" bIns="0">
-            <a:spAutoFit/>
-          </a:bodyPr>
-          <a:lstStyle/>
-          <a:p>
-            <a:pPr algn="l">
-              <a:lnSpc>
                 <a:spcPct val="105000"/>
               </a:lnSpc>
               <a:spcBef>
@@ -34744,7 +34408,7 @@
               </a:spcAft>
             </a:pPr>
             <a:r>
-              <a:rPr sz="1150" b="0" i="0">
+              <a:rPr sz="1100" b="0" i="0">
                 <a:solidFill>
                   <a:srgbClr val="1A2432"/>
                 </a:solidFill>
@@ -34763,7 +34427,7 @@
         </p:nvSpPr>
         <p:spPr>
           <a:xfrm>
-            <a:off x="3685032" y="4718304"/>
+            <a:off x="3703320" y="4882896"/>
             <a:ext cx="118872" cy="118872"/>
           </a:xfrm>
           <a:prstGeom prst="roundRect">
@@ -34809,8 +34473,8 @@
         </p:nvSpPr>
         <p:spPr>
           <a:xfrm>
-            <a:off x="3941064" y="4672584"/>
-            <a:ext cx="7269480" cy="310896"/>
+            <a:off x="3959352" y="4837176"/>
+            <a:ext cx="7269480" cy="292608"/>
           </a:xfrm>
           <a:prstGeom prst="rect">
             <a:avLst/>
@@ -34835,7 +34499,7 @@
               </a:spcAft>
             </a:pPr>
             <a:r>
-              <a:rPr sz="1080" b="0" i="0">
+              <a:rPr sz="1050" b="0" i="0">
                 <a:solidFill>
                   <a:srgbClr val="5B6674"/>
                 </a:solidFill>
@@ -34854,7 +34518,7 @@
         </p:nvSpPr>
         <p:spPr>
           <a:xfrm>
-            <a:off x="3685032" y="5024628"/>
+            <a:off x="3703320" y="5157216"/>
             <a:ext cx="118872" cy="118872"/>
           </a:xfrm>
           <a:prstGeom prst="roundRect">
@@ -34900,8 +34564,8 @@
         </p:nvSpPr>
         <p:spPr>
           <a:xfrm>
-            <a:off x="3941064" y="4978908"/>
-            <a:ext cx="7269480" cy="310896"/>
+            <a:off x="3959352" y="5111496"/>
+            <a:ext cx="7269480" cy="292608"/>
           </a:xfrm>
           <a:prstGeom prst="rect">
             <a:avLst/>
@@ -34926,7 +34590,7 @@
               </a:spcAft>
             </a:pPr>
             <a:r>
-              <a:rPr sz="1080" b="0" i="0">
+              <a:rPr sz="1050" b="0" i="0">
                 <a:solidFill>
                   <a:srgbClr val="5B6674"/>
                 </a:solidFill>
@@ -34945,7 +34609,7 @@
         </p:nvSpPr>
         <p:spPr>
           <a:xfrm>
-            <a:off x="3685032" y="5330952"/>
+            <a:off x="3703320" y="5431536"/>
             <a:ext cx="118872" cy="118872"/>
           </a:xfrm>
           <a:prstGeom prst="roundRect">
@@ -34991,8 +34655,8 @@
         </p:nvSpPr>
         <p:spPr>
           <a:xfrm>
-            <a:off x="3941064" y="5285232"/>
-            <a:ext cx="7269480" cy="310896"/>
+            <a:off x="3959352" y="5385816"/>
+            <a:ext cx="7269480" cy="292608"/>
           </a:xfrm>
           <a:prstGeom prst="rect">
             <a:avLst/>
@@ -35017,7 +34681,7 @@
               </a:spcAft>
             </a:pPr>
             <a:r>
-              <a:rPr sz="1080" b="0" i="0">
+              <a:rPr sz="1050" b="0" i="0">
                 <a:solidFill>
                   <a:srgbClr val="5B6674"/>
                 </a:solidFill>
@@ -35036,8 +34700,8 @@
         </p:nvSpPr>
         <p:spPr>
           <a:xfrm>
-            <a:off x="3685032" y="5513832"/>
-            <a:ext cx="3931920" cy="347472"/>
+            <a:off x="3703320" y="5696712"/>
+            <a:ext cx="3931920" cy="292608"/>
           </a:xfrm>
           <a:prstGeom prst="rect">
             <a:avLst/>
@@ -35090,8 +34754,8 @@
         </p:nvSpPr>
         <p:spPr>
           <a:xfrm>
-            <a:off x="7662671" y="5513832"/>
-            <a:ext cx="3566160" cy="347472"/>
+            <a:off x="7680959" y="5696712"/>
+            <a:ext cx="3566160" cy="292608"/>
           </a:xfrm>
           <a:prstGeom prst="rect">
             <a:avLst/>
@@ -35440,7 +35104,7 @@
         <p:spPr>
           <a:xfrm>
             <a:off x="713232" y="1280160"/>
-            <a:ext cx="10771632" cy="2212848"/>
+            <a:ext cx="10771632" cy="2286000"/>
           </a:xfrm>
           <a:prstGeom prst="roundRect">
             <a:avLst>
@@ -35486,7 +35150,7 @@
         <p:spPr>
           <a:xfrm>
             <a:off x="713232" y="1280160"/>
-            <a:ext cx="2788920" cy="2212848"/>
+            <a:ext cx="2788920" cy="2286000"/>
           </a:xfrm>
           <a:prstGeom prst="roundRect">
             <a:avLst>
@@ -35532,7 +35196,7 @@
         <p:spPr>
           <a:xfrm>
             <a:off x="3374136" y="1298448"/>
-            <a:ext cx="128016" cy="2176272"/>
+            <a:ext cx="128016" cy="2249424"/>
           </a:xfrm>
           <a:prstGeom prst="rect">
             <a:avLst/>
@@ -35567,16 +35231,94 @@
           </a:p>
         </p:txBody>
       </p:sp>
-      <p:sp>
-        <p:nvSpPr>
-          <p:cNvPr id="11" name="TextBox 10"/>
-          <p:cNvSpPr txBox="1"/>
-          <p:nvPr/>
-        </p:nvSpPr>
-        <p:spPr>
-          <a:xfrm>
-            <a:off x="914400" y="1463040"/>
-            <a:ext cx="2404872" cy="1005840"/>
+      <p:pic>
+        <p:nvPicPr>
+          <p:cNvPr id="11" name="Picture 10" descr="no_picadora.png"/>
+          <p:cNvPicPr>
+            <a:picLocks noChangeAspect="1"/>
+          </p:cNvPicPr>
+          <p:nvPr/>
+        </p:nvPicPr>
+        <p:blipFill>
+          <a:blip r:embed="rId2"/>
+          <a:stretch>
+            <a:fillRect/>
+          </a:stretch>
+        </p:blipFill>
+        <p:spPr>
+          <a:xfrm>
+            <a:off x="969264" y="1426464"/>
+            <a:ext cx="2286000" cy="1413662"/>
+          </a:xfrm>
+          <a:prstGeom prst="rect">
+            <a:avLst/>
+          </a:prstGeom>
+        </p:spPr>
+      </p:pic>
+      <p:sp>
+        <p:nvSpPr>
+          <p:cNvPr id="12" name="TextBox 11"/>
+          <p:cNvSpPr txBox="1"/>
+          <p:nvPr/>
+        </p:nvSpPr>
+        <p:spPr>
+          <a:xfrm>
+            <a:off x="877824" y="3182112"/>
+            <a:ext cx="2514600" cy="292608"/>
+          </a:xfrm>
+          <a:prstGeom prst="rect">
+            <a:avLst/>
+          </a:prstGeom>
+          <a:noFill/>
+        </p:spPr>
+        <p:txBody>
+          <a:bodyPr wrap="square" anchor="ctr" lIns="0" rIns="0" tIns="0" bIns="0">
+            <a:spAutoFit/>
+          </a:bodyPr>
+          <a:lstStyle/>
+          <a:p>
+            <a:pPr algn="ctr">
+              <a:lnSpc>
+                <a:spcPct val="100000"/>
+              </a:lnSpc>
+              <a:spcBef>
+                <a:spcPts val="0"/>
+              </a:spcBef>
+              <a:spcAft>
+                <a:spcPts val="300"/>
+              </a:spcAft>
+            </a:pPr>
+            <a:r>
+              <a:rPr sz="900" b="0" i="0">
+                <a:solidFill>
+                  <a:srgbClr val="FFFFFF"/>
+                </a:solidFill>
+                <a:latin typeface="Calibri"/>
+              </a:rPr>
+              <a:t>● </a:t>
+            </a:r>
+            <a:r>
+              <a:rPr sz="1000" b="0" i="0">
+                <a:solidFill>
+                  <a:srgbClr val="FFFFFF"/>
+                </a:solidFill>
+                <a:latin typeface="Calibri"/>
+              </a:rPr>
+              <a:t>México · Nuevo León</a:t>
+            </a:r>
+          </a:p>
+        </p:txBody>
+      </p:sp>
+      <p:sp>
+        <p:nvSpPr>
+          <p:cNvPr id="13" name="TextBox 12"/>
+          <p:cNvSpPr txBox="1"/>
+          <p:nvPr/>
+        </p:nvSpPr>
+        <p:spPr>
+          <a:xfrm>
+            <a:off x="3703320" y="1408176"/>
+            <a:ext cx="7543800" cy="457200"/>
           </a:xfrm>
           <a:prstGeom prst="rect">
             <a:avLst/>
@@ -35591,19 +35333,19 @@
           <a:p>
             <a:pPr algn="l">
               <a:lnSpc>
-                <a:spcPct val="102000"/>
-              </a:lnSpc>
-              <a:spcBef>
-                <a:spcPts val="0"/>
-              </a:spcBef>
-              <a:spcAft>
-                <a:spcPts val="300"/>
-              </a:spcAft>
-            </a:pPr>
-            <a:r>
-              <a:rPr sz="1500" b="1" i="0">
-                <a:solidFill>
-                  <a:srgbClr val="FFFFFF"/>
+                <a:spcPct val="100000"/>
+              </a:lnSpc>
+              <a:spcBef>
+                <a:spcPts val="0"/>
+              </a:spcBef>
+              <a:spcAft>
+                <a:spcPts val="300"/>
+              </a:spcAft>
+            </a:pPr>
+            <a:r>
+              <a:rPr sz="1400" b="1" i="0">
+                <a:solidFill>
+                  <a:srgbClr val="0E213A"/>
                 </a:solidFill>
                 <a:latin typeface="Calibri"/>
               </a:rPr>
@@ -35614,127 +35356,28 @@
       </p:sp>
       <p:sp>
         <p:nvSpPr>
-          <p:cNvPr id="12" name="TextBox 11"/>
-          <p:cNvSpPr txBox="1"/>
-          <p:nvPr/>
-        </p:nvSpPr>
-        <p:spPr>
-          <a:xfrm>
-            <a:off x="914400" y="2962656"/>
-            <a:ext cx="2404872" cy="365760"/>
-          </a:xfrm>
-          <a:prstGeom prst="rect">
-            <a:avLst/>
-          </a:prstGeom>
-          <a:noFill/>
-        </p:spPr>
-        <p:txBody>
-          <a:bodyPr wrap="square" anchor="ctr" lIns="0" rIns="0" tIns="0" bIns="0">
+          <p:cNvPr id="14" name="TextBox 13"/>
+          <p:cNvSpPr txBox="1"/>
+          <p:nvPr/>
+        </p:nvSpPr>
+        <p:spPr>
+          <a:xfrm>
+            <a:off x="3703320" y="1920240"/>
+            <a:ext cx="7543800" cy="457200"/>
+          </a:xfrm>
+          <a:prstGeom prst="rect">
+            <a:avLst/>
+          </a:prstGeom>
+          <a:noFill/>
+        </p:spPr>
+        <p:txBody>
+          <a:bodyPr wrap="square" anchor="t" lIns="0" rIns="0" tIns="0" bIns="0">
             <a:spAutoFit/>
           </a:bodyPr>
           <a:lstStyle/>
           <a:p>
             <a:pPr algn="l">
               <a:lnSpc>
-                <a:spcPct val="100000"/>
-              </a:lnSpc>
-              <a:spcBef>
-                <a:spcPts val="0"/>
-              </a:spcBef>
-              <a:spcAft>
-                <a:spcPts val="300"/>
-              </a:spcAft>
-            </a:pPr>
-            <a:r>
-              <a:rPr sz="1000" b="0" i="0">
-                <a:solidFill>
-                  <a:srgbClr val="FFFFFF"/>
-                </a:solidFill>
-                <a:latin typeface="Calibri"/>
-              </a:rPr>
-              <a:t>● </a:t>
-            </a:r>
-            <a:r>
-              <a:rPr sz="1050" b="0" i="0">
-                <a:solidFill>
-                  <a:srgbClr val="FFFFFF"/>
-                </a:solidFill>
-                <a:latin typeface="Calibri"/>
-              </a:rPr>
-              <a:t>México · Nuevo León</a:t>
-            </a:r>
-          </a:p>
-        </p:txBody>
-      </p:sp>
-      <p:sp>
-        <p:nvSpPr>
-          <p:cNvPr id="13" name="TextBox 12"/>
-          <p:cNvSpPr txBox="1"/>
-          <p:nvPr/>
-        </p:nvSpPr>
-        <p:spPr>
-          <a:xfrm>
-            <a:off x="3685032" y="1426464"/>
-            <a:ext cx="7543800" cy="219456"/>
-          </a:xfrm>
-          <a:prstGeom prst="rect">
-            <a:avLst/>
-          </a:prstGeom>
-          <a:noFill/>
-        </p:spPr>
-        <p:txBody>
-          <a:bodyPr wrap="square" anchor="t" lIns="0" rIns="0" tIns="0" bIns="0">
-            <a:spAutoFit/>
-          </a:bodyPr>
-          <a:lstStyle/>
-          <a:p>
-            <a:pPr algn="l">
-              <a:lnSpc>
-                <a:spcPct val="100000"/>
-              </a:lnSpc>
-              <a:spcBef>
-                <a:spcPts val="0"/>
-              </a:spcBef>
-              <a:spcAft>
-                <a:spcPts val="300"/>
-              </a:spcAft>
-            </a:pPr>
-            <a:r>
-              <a:rPr sz="950" b="1" i="0">
-                <a:solidFill>
-                  <a:srgbClr val="2D6CDF"/>
-                </a:solidFill>
-                <a:latin typeface="Calibri"/>
-              </a:rPr>
-              <a:t>FUNCIÓN</a:t>
-            </a:r>
-          </a:p>
-        </p:txBody>
-      </p:sp>
-      <p:sp>
-        <p:nvSpPr>
-          <p:cNvPr id="14" name="TextBox 13"/>
-          <p:cNvSpPr txBox="1"/>
-          <p:nvPr/>
-        </p:nvSpPr>
-        <p:spPr>
-          <a:xfrm>
-            <a:off x="3685032" y="1645920"/>
-            <a:ext cx="7543800" cy="566928"/>
-          </a:xfrm>
-          <a:prstGeom prst="rect">
-            <a:avLst/>
-          </a:prstGeom>
-          <a:noFill/>
-        </p:spPr>
-        <p:txBody>
-          <a:bodyPr wrap="square" anchor="t" lIns="0" rIns="0" tIns="0" bIns="0">
-            <a:spAutoFit/>
-          </a:bodyPr>
-          <a:lstStyle/>
-          <a:p>
-            <a:pPr algn="l">
-              <a:lnSpc>
                 <a:spcPct val="105000"/>
               </a:lnSpc>
               <a:spcBef>
@@ -35745,7 +35388,7 @@
               </a:spcAft>
             </a:pPr>
             <a:r>
-              <a:rPr sz="1150" b="0" i="0">
+              <a:rPr sz="1100" b="0" i="0">
                 <a:solidFill>
                   <a:srgbClr val="1A2432"/>
                 </a:solidFill>
@@ -35764,7 +35407,7 @@
         </p:nvSpPr>
         <p:spPr>
           <a:xfrm>
-            <a:off x="3685032" y="2295144"/>
+            <a:off x="3703320" y="2459736"/>
             <a:ext cx="118872" cy="118872"/>
           </a:xfrm>
           <a:prstGeom prst="roundRect">
@@ -35810,8 +35453,8 @@
         </p:nvSpPr>
         <p:spPr>
           <a:xfrm>
-            <a:off x="3941064" y="2249424"/>
-            <a:ext cx="7269480" cy="310896"/>
+            <a:off x="3959352" y="2414016"/>
+            <a:ext cx="7269480" cy="292608"/>
           </a:xfrm>
           <a:prstGeom prst="rect">
             <a:avLst/>
@@ -35836,7 +35479,7 @@
               </a:spcAft>
             </a:pPr>
             <a:r>
-              <a:rPr sz="1080" b="0" i="0">
+              <a:rPr sz="1050" b="0" i="0">
                 <a:solidFill>
                   <a:srgbClr val="5B6674"/>
                 </a:solidFill>
@@ -35855,7 +35498,7 @@
         </p:nvSpPr>
         <p:spPr>
           <a:xfrm>
-            <a:off x="3685032" y="2601468"/>
+            <a:off x="3703320" y="2734056"/>
             <a:ext cx="118872" cy="118872"/>
           </a:xfrm>
           <a:prstGeom prst="roundRect">
@@ -35901,8 +35544,8 @@
         </p:nvSpPr>
         <p:spPr>
           <a:xfrm>
-            <a:off x="3941064" y="2555748"/>
-            <a:ext cx="7269480" cy="310896"/>
+            <a:off x="3959352" y="2688336"/>
+            <a:ext cx="7269480" cy="292608"/>
           </a:xfrm>
           <a:prstGeom prst="rect">
             <a:avLst/>
@@ -35927,7 +35570,7 @@
               </a:spcAft>
             </a:pPr>
             <a:r>
-              <a:rPr sz="1080" b="0" i="0">
+              <a:rPr sz="1050" b="0" i="0">
                 <a:solidFill>
                   <a:srgbClr val="5B6674"/>
                 </a:solidFill>
@@ -35946,7 +35589,7 @@
         </p:nvSpPr>
         <p:spPr>
           <a:xfrm>
-            <a:off x="3685032" y="2907792"/>
+            <a:off x="3703320" y="3008376"/>
             <a:ext cx="118872" cy="118872"/>
           </a:xfrm>
           <a:prstGeom prst="roundRect">
@@ -35992,8 +35635,8 @@
         </p:nvSpPr>
         <p:spPr>
           <a:xfrm>
-            <a:off x="3941064" y="2862072"/>
-            <a:ext cx="7269480" cy="310896"/>
+            <a:off x="3959352" y="2962656"/>
+            <a:ext cx="7269480" cy="292608"/>
           </a:xfrm>
           <a:prstGeom prst="rect">
             <a:avLst/>
@@ -36018,7 +35661,7 @@
               </a:spcAft>
             </a:pPr>
             <a:r>
-              <a:rPr sz="1080" b="0" i="0">
+              <a:rPr sz="1050" b="0" i="0">
                 <a:solidFill>
                   <a:srgbClr val="5B6674"/>
                 </a:solidFill>
@@ -36037,8 +35680,8 @@
         </p:nvSpPr>
         <p:spPr>
           <a:xfrm>
-            <a:off x="3685032" y="3090672"/>
-            <a:ext cx="3931920" cy="347472"/>
+            <a:off x="3703320" y="3273552"/>
+            <a:ext cx="3931920" cy="292608"/>
           </a:xfrm>
           <a:prstGeom prst="rect">
             <a:avLst/>
@@ -36091,8 +35734,8 @@
         </p:nvSpPr>
         <p:spPr>
           <a:xfrm>
-            <a:off x="7662671" y="3090672"/>
-            <a:ext cx="3566160" cy="347472"/>
+            <a:off x="7680959" y="3273552"/>
+            <a:ext cx="3566160" cy="292608"/>
           </a:xfrm>
           <a:prstGeom prst="rect">
             <a:avLst/>
@@ -36146,7 +35789,7 @@
         <p:spPr>
           <a:xfrm>
             <a:off x="713232" y="3703320"/>
-            <a:ext cx="10771632" cy="2212848"/>
+            <a:ext cx="10771632" cy="2286000"/>
           </a:xfrm>
           <a:prstGeom prst="roundRect">
             <a:avLst>
@@ -36192,7 +35835,7 @@
         <p:spPr>
           <a:xfrm>
             <a:off x="713232" y="3703320"/>
-            <a:ext cx="2788920" cy="2212848"/>
+            <a:ext cx="2788920" cy="2286000"/>
           </a:xfrm>
           <a:prstGeom prst="roundRect">
             <a:avLst>
@@ -36238,7 +35881,7 @@
         <p:spPr>
           <a:xfrm>
             <a:off x="3374136" y="3721608"/>
-            <a:ext cx="128016" cy="2176272"/>
+            <a:ext cx="128016" cy="2249424"/>
           </a:xfrm>
           <a:prstGeom prst="rect">
             <a:avLst/>
@@ -36273,16 +35916,94 @@
           </a:p>
         </p:txBody>
       </p:sp>
-      <p:sp>
-        <p:nvSpPr>
-          <p:cNvPr id="26" name="TextBox 25"/>
-          <p:cNvSpPr txBox="1"/>
-          <p:nvPr/>
-        </p:nvSpPr>
-        <p:spPr>
-          <a:xfrm>
-            <a:off x="914400" y="3886200"/>
-            <a:ext cx="2404872" cy="1005840"/>
+      <p:pic>
+        <p:nvPicPr>
+          <p:cNvPr id="26" name="Picture 25" descr="no_cortadora_cubos.png"/>
+          <p:cNvPicPr>
+            <a:picLocks noChangeAspect="1"/>
+          </p:cNvPicPr>
+          <p:nvPr/>
+        </p:nvPicPr>
+        <p:blipFill>
+          <a:blip r:embed="rId3"/>
+          <a:stretch>
+            <a:fillRect/>
+          </a:stretch>
+        </p:blipFill>
+        <p:spPr>
+          <a:xfrm>
+            <a:off x="969264" y="3849624"/>
+            <a:ext cx="2286000" cy="1413662"/>
+          </a:xfrm>
+          <a:prstGeom prst="rect">
+            <a:avLst/>
+          </a:prstGeom>
+        </p:spPr>
+      </p:pic>
+      <p:sp>
+        <p:nvSpPr>
+          <p:cNvPr id="27" name="TextBox 26"/>
+          <p:cNvSpPr txBox="1"/>
+          <p:nvPr/>
+        </p:nvSpPr>
+        <p:spPr>
+          <a:xfrm>
+            <a:off x="877824" y="5605272"/>
+            <a:ext cx="2514600" cy="292608"/>
+          </a:xfrm>
+          <a:prstGeom prst="rect">
+            <a:avLst/>
+          </a:prstGeom>
+          <a:noFill/>
+        </p:spPr>
+        <p:txBody>
+          <a:bodyPr wrap="square" anchor="ctr" lIns="0" rIns="0" tIns="0" bIns="0">
+            <a:spAutoFit/>
+          </a:bodyPr>
+          <a:lstStyle/>
+          <a:p>
+            <a:pPr algn="ctr">
+              <a:lnSpc>
+                <a:spcPct val="100000"/>
+              </a:lnSpc>
+              <a:spcBef>
+                <a:spcPts val="0"/>
+              </a:spcBef>
+              <a:spcAft>
+                <a:spcPts val="300"/>
+              </a:spcAft>
+            </a:pPr>
+            <a:r>
+              <a:rPr sz="900" b="0" i="0">
+                <a:solidFill>
+                  <a:srgbClr val="FFFFFF"/>
+                </a:solidFill>
+                <a:latin typeface="Calibri"/>
+              </a:rPr>
+              <a:t>● </a:t>
+            </a:r>
+            <a:r>
+              <a:rPr sz="1000" b="0" i="0">
+                <a:solidFill>
+                  <a:srgbClr val="FFFFFF"/>
+                </a:solidFill>
+                <a:latin typeface="Calibri"/>
+              </a:rPr>
+              <a:t>Italia (referencia)</a:t>
+            </a:r>
+          </a:p>
+        </p:txBody>
+      </p:sp>
+      <p:sp>
+        <p:nvSpPr>
+          <p:cNvPr id="28" name="TextBox 27"/>
+          <p:cNvSpPr txBox="1"/>
+          <p:nvPr/>
+        </p:nvSpPr>
+        <p:spPr>
+          <a:xfrm>
+            <a:off x="3703320" y="3831336"/>
+            <a:ext cx="7543800" cy="457200"/>
           </a:xfrm>
           <a:prstGeom prst="rect">
             <a:avLst/>
@@ -36297,19 +36018,19 @@
           <a:p>
             <a:pPr algn="l">
               <a:lnSpc>
-                <a:spcPct val="102000"/>
-              </a:lnSpc>
-              <a:spcBef>
-                <a:spcPts val="0"/>
-              </a:spcBef>
-              <a:spcAft>
-                <a:spcPts val="300"/>
-              </a:spcAft>
-            </a:pPr>
-            <a:r>
-              <a:rPr sz="1500" b="1" i="0">
-                <a:solidFill>
-                  <a:srgbClr val="FFFFFF"/>
+                <a:spcPct val="100000"/>
+              </a:lnSpc>
+              <a:spcBef>
+                <a:spcPts val="0"/>
+              </a:spcBef>
+              <a:spcAft>
+                <a:spcPts val="300"/>
+              </a:spcAft>
+            </a:pPr>
+            <a:r>
+              <a:rPr sz="1400" b="1" i="0">
+                <a:solidFill>
+                  <a:srgbClr val="0E213A"/>
                 </a:solidFill>
                 <a:latin typeface="Calibri"/>
               </a:rPr>
@@ -36320,127 +36041,28 @@
       </p:sp>
       <p:sp>
         <p:nvSpPr>
-          <p:cNvPr id="27" name="TextBox 26"/>
-          <p:cNvSpPr txBox="1"/>
-          <p:nvPr/>
-        </p:nvSpPr>
-        <p:spPr>
-          <a:xfrm>
-            <a:off x="914400" y="5385816"/>
-            <a:ext cx="2404872" cy="365760"/>
-          </a:xfrm>
-          <a:prstGeom prst="rect">
-            <a:avLst/>
-          </a:prstGeom>
-          <a:noFill/>
-        </p:spPr>
-        <p:txBody>
-          <a:bodyPr wrap="square" anchor="ctr" lIns="0" rIns="0" tIns="0" bIns="0">
+          <p:cNvPr id="29" name="TextBox 28"/>
+          <p:cNvSpPr txBox="1"/>
+          <p:nvPr/>
+        </p:nvSpPr>
+        <p:spPr>
+          <a:xfrm>
+            <a:off x="3703320" y="4343400"/>
+            <a:ext cx="7543800" cy="457200"/>
+          </a:xfrm>
+          <a:prstGeom prst="rect">
+            <a:avLst/>
+          </a:prstGeom>
+          <a:noFill/>
+        </p:spPr>
+        <p:txBody>
+          <a:bodyPr wrap="square" anchor="t" lIns="0" rIns="0" tIns="0" bIns="0">
             <a:spAutoFit/>
           </a:bodyPr>
           <a:lstStyle/>
           <a:p>
             <a:pPr algn="l">
               <a:lnSpc>
-                <a:spcPct val="100000"/>
-              </a:lnSpc>
-              <a:spcBef>
-                <a:spcPts val="0"/>
-              </a:spcBef>
-              <a:spcAft>
-                <a:spcPts val="300"/>
-              </a:spcAft>
-            </a:pPr>
-            <a:r>
-              <a:rPr sz="1000" b="0" i="0">
-                <a:solidFill>
-                  <a:srgbClr val="FFFFFF"/>
-                </a:solidFill>
-                <a:latin typeface="Calibri"/>
-              </a:rPr>
-              <a:t>● </a:t>
-            </a:r>
-            <a:r>
-              <a:rPr sz="1050" b="0" i="0">
-                <a:solidFill>
-                  <a:srgbClr val="FFFFFF"/>
-                </a:solidFill>
-                <a:latin typeface="Calibri"/>
-              </a:rPr>
-              <a:t>Italia (referencia)</a:t>
-            </a:r>
-          </a:p>
-        </p:txBody>
-      </p:sp>
-      <p:sp>
-        <p:nvSpPr>
-          <p:cNvPr id="28" name="TextBox 27"/>
-          <p:cNvSpPr txBox="1"/>
-          <p:nvPr/>
-        </p:nvSpPr>
-        <p:spPr>
-          <a:xfrm>
-            <a:off x="3685032" y="3849624"/>
-            <a:ext cx="7543800" cy="219456"/>
-          </a:xfrm>
-          <a:prstGeom prst="rect">
-            <a:avLst/>
-          </a:prstGeom>
-          <a:noFill/>
-        </p:spPr>
-        <p:txBody>
-          <a:bodyPr wrap="square" anchor="t" lIns="0" rIns="0" tIns="0" bIns="0">
-            <a:spAutoFit/>
-          </a:bodyPr>
-          <a:lstStyle/>
-          <a:p>
-            <a:pPr algn="l">
-              <a:lnSpc>
-                <a:spcPct val="100000"/>
-              </a:lnSpc>
-              <a:spcBef>
-                <a:spcPts val="0"/>
-              </a:spcBef>
-              <a:spcAft>
-                <a:spcPts val="300"/>
-              </a:spcAft>
-            </a:pPr>
-            <a:r>
-              <a:rPr sz="950" b="1" i="0">
-                <a:solidFill>
-                  <a:srgbClr val="2D6CDF"/>
-                </a:solidFill>
-                <a:latin typeface="Calibri"/>
-              </a:rPr>
-              <a:t>FUNCIÓN</a:t>
-            </a:r>
-          </a:p>
-        </p:txBody>
-      </p:sp>
-      <p:sp>
-        <p:nvSpPr>
-          <p:cNvPr id="29" name="TextBox 28"/>
-          <p:cNvSpPr txBox="1"/>
-          <p:nvPr/>
-        </p:nvSpPr>
-        <p:spPr>
-          <a:xfrm>
-            <a:off x="3685032" y="4069080"/>
-            <a:ext cx="7543800" cy="566928"/>
-          </a:xfrm>
-          <a:prstGeom prst="rect">
-            <a:avLst/>
-          </a:prstGeom>
-          <a:noFill/>
-        </p:spPr>
-        <p:txBody>
-          <a:bodyPr wrap="square" anchor="t" lIns="0" rIns="0" tIns="0" bIns="0">
-            <a:spAutoFit/>
-          </a:bodyPr>
-          <a:lstStyle/>
-          <a:p>
-            <a:pPr algn="l">
-              <a:lnSpc>
                 <a:spcPct val="105000"/>
               </a:lnSpc>
               <a:spcBef>
@@ -36451,7 +36073,7 @@
               </a:spcAft>
             </a:pPr>
             <a:r>
-              <a:rPr sz="1150" b="0" i="0">
+              <a:rPr sz="1100" b="0" i="0">
                 <a:solidFill>
                   <a:srgbClr val="1A2432"/>
                 </a:solidFill>
@@ -36470,7 +36092,7 @@
         </p:nvSpPr>
         <p:spPr>
           <a:xfrm>
-            <a:off x="3685032" y="4718304"/>
+            <a:off x="3703320" y="4882896"/>
             <a:ext cx="118872" cy="118872"/>
           </a:xfrm>
           <a:prstGeom prst="roundRect">
@@ -36516,8 +36138,8 @@
         </p:nvSpPr>
         <p:spPr>
           <a:xfrm>
-            <a:off x="3941064" y="4672584"/>
-            <a:ext cx="7269480" cy="310896"/>
+            <a:off x="3959352" y="4837176"/>
+            <a:ext cx="7269480" cy="292608"/>
           </a:xfrm>
           <a:prstGeom prst="rect">
             <a:avLst/>
@@ -36542,7 +36164,7 @@
               </a:spcAft>
             </a:pPr>
             <a:r>
-              <a:rPr sz="1080" b="0" i="0">
+              <a:rPr sz="1050" b="0" i="0">
                 <a:solidFill>
                   <a:srgbClr val="5B6674"/>
                 </a:solidFill>
@@ -36561,7 +36183,7 @@
         </p:nvSpPr>
         <p:spPr>
           <a:xfrm>
-            <a:off x="3685032" y="5024628"/>
+            <a:off x="3703320" y="5157216"/>
             <a:ext cx="118872" cy="118872"/>
           </a:xfrm>
           <a:prstGeom prst="roundRect">
@@ -36607,8 +36229,8 @@
         </p:nvSpPr>
         <p:spPr>
           <a:xfrm>
-            <a:off x="3941064" y="4978908"/>
-            <a:ext cx="7269480" cy="310896"/>
+            <a:off x="3959352" y="5111496"/>
+            <a:ext cx="7269480" cy="292608"/>
           </a:xfrm>
           <a:prstGeom prst="rect">
             <a:avLst/>
@@ -36633,7 +36255,7 @@
               </a:spcAft>
             </a:pPr>
             <a:r>
-              <a:rPr sz="1080" b="0" i="0">
+              <a:rPr sz="1050" b="0" i="0">
                 <a:solidFill>
                   <a:srgbClr val="5B6674"/>
                 </a:solidFill>
@@ -36652,7 +36274,7 @@
         </p:nvSpPr>
         <p:spPr>
           <a:xfrm>
-            <a:off x="3685032" y="5330952"/>
+            <a:off x="3703320" y="5431536"/>
             <a:ext cx="118872" cy="118872"/>
           </a:xfrm>
           <a:prstGeom prst="roundRect">
@@ -36698,8 +36320,8 @@
         </p:nvSpPr>
         <p:spPr>
           <a:xfrm>
-            <a:off x="3941064" y="5285232"/>
-            <a:ext cx="7269480" cy="310896"/>
+            <a:off x="3959352" y="5385816"/>
+            <a:ext cx="7269480" cy="292608"/>
           </a:xfrm>
           <a:prstGeom prst="rect">
             <a:avLst/>
@@ -36724,7 +36346,7 @@
               </a:spcAft>
             </a:pPr>
             <a:r>
-              <a:rPr sz="1080" b="0" i="0">
+              <a:rPr sz="1050" b="0" i="0">
                 <a:solidFill>
                   <a:srgbClr val="5B6674"/>
                 </a:solidFill>
@@ -36743,8 +36365,8 @@
         </p:nvSpPr>
         <p:spPr>
           <a:xfrm>
-            <a:off x="3685032" y="5513832"/>
-            <a:ext cx="3931920" cy="347472"/>
+            <a:off x="3703320" y="5696712"/>
+            <a:ext cx="3931920" cy="292608"/>
           </a:xfrm>
           <a:prstGeom prst="rect">
             <a:avLst/>
@@ -36797,8 +36419,8 @@
         </p:nvSpPr>
         <p:spPr>
           <a:xfrm>
-            <a:off x="7662671" y="5513832"/>
-            <a:ext cx="3566160" cy="347472"/>
+            <a:off x="7680959" y="5696712"/>
+            <a:ext cx="3566160" cy="292608"/>
           </a:xfrm>
           <a:prstGeom prst="rect">
             <a:avLst/>
@@ -37147,7 +36769,7 @@
         <p:spPr>
           <a:xfrm>
             <a:off x="713232" y="1280160"/>
-            <a:ext cx="10771632" cy="2212848"/>
+            <a:ext cx="10771632" cy="2286000"/>
           </a:xfrm>
           <a:prstGeom prst="roundRect">
             <a:avLst>
@@ -37193,7 +36815,7 @@
         <p:spPr>
           <a:xfrm>
             <a:off x="713232" y="1280160"/>
-            <a:ext cx="2788920" cy="2212848"/>
+            <a:ext cx="2788920" cy="2286000"/>
           </a:xfrm>
           <a:prstGeom prst="roundRect">
             <a:avLst>
@@ -37239,7 +36861,7 @@
         <p:spPr>
           <a:xfrm>
             <a:off x="3374136" y="1298448"/>
-            <a:ext cx="128016" cy="2176272"/>
+            <a:ext cx="128016" cy="2249424"/>
           </a:xfrm>
           <a:prstGeom prst="rect">
             <a:avLst/>
@@ -37274,16 +36896,94 @@
           </a:p>
         </p:txBody>
       </p:sp>
-      <p:sp>
-        <p:nvSpPr>
-          <p:cNvPr id="11" name="TextBox 10"/>
-          <p:cNvSpPr txBox="1"/>
-          <p:nvPr/>
-        </p:nvSpPr>
-        <p:spPr>
-          <a:xfrm>
-            <a:off x="914400" y="1463040"/>
-            <a:ext cx="2404872" cy="1005840"/>
+      <p:pic>
+        <p:nvPicPr>
+          <p:cNvPr id="11" name="Picture 10" descr="no_escaldado.png"/>
+          <p:cNvPicPr>
+            <a:picLocks noChangeAspect="1"/>
+          </p:cNvPicPr>
+          <p:nvPr/>
+        </p:nvPicPr>
+        <p:blipFill>
+          <a:blip r:embed="rId2"/>
+          <a:stretch>
+            <a:fillRect/>
+          </a:stretch>
+        </p:blipFill>
+        <p:spPr>
+          <a:xfrm>
+            <a:off x="969264" y="1426464"/>
+            <a:ext cx="2286000" cy="1413662"/>
+          </a:xfrm>
+          <a:prstGeom prst="rect">
+            <a:avLst/>
+          </a:prstGeom>
+        </p:spPr>
+      </p:pic>
+      <p:sp>
+        <p:nvSpPr>
+          <p:cNvPr id="12" name="TextBox 11"/>
+          <p:cNvSpPr txBox="1"/>
+          <p:nvPr/>
+        </p:nvSpPr>
+        <p:spPr>
+          <a:xfrm>
+            <a:off x="877824" y="3182112"/>
+            <a:ext cx="2514600" cy="292608"/>
+          </a:xfrm>
+          <a:prstGeom prst="rect">
+            <a:avLst/>
+          </a:prstGeom>
+          <a:noFill/>
+        </p:spPr>
+        <p:txBody>
+          <a:bodyPr wrap="square" anchor="ctr" lIns="0" rIns="0" tIns="0" bIns="0">
+            <a:spAutoFit/>
+          </a:bodyPr>
+          <a:lstStyle/>
+          <a:p>
+            <a:pPr algn="ctr">
+              <a:lnSpc>
+                <a:spcPct val="100000"/>
+              </a:lnSpc>
+              <a:spcBef>
+                <a:spcPts val="0"/>
+              </a:spcBef>
+              <a:spcAft>
+                <a:spcPts val="300"/>
+              </a:spcAft>
+            </a:pPr>
+            <a:r>
+              <a:rPr sz="900" b="0" i="0">
+                <a:solidFill>
+                  <a:srgbClr val="FFFFFF"/>
+                </a:solidFill>
+                <a:latin typeface="Calibri"/>
+              </a:rPr>
+              <a:t>● </a:t>
+            </a:r>
+            <a:r>
+              <a:rPr sz="1000" b="0" i="0">
+                <a:solidFill>
+                  <a:srgbClr val="FFFFFF"/>
+                </a:solidFill>
+                <a:latin typeface="Calibri"/>
+              </a:rPr>
+              <a:t>Nacional (a medida)</a:t>
+            </a:r>
+          </a:p>
+        </p:txBody>
+      </p:sp>
+      <p:sp>
+        <p:nvSpPr>
+          <p:cNvPr id="13" name="TextBox 12"/>
+          <p:cNvSpPr txBox="1"/>
+          <p:nvPr/>
+        </p:nvSpPr>
+        <p:spPr>
+          <a:xfrm>
+            <a:off x="3703320" y="1408176"/>
+            <a:ext cx="7543800" cy="457200"/>
           </a:xfrm>
           <a:prstGeom prst="rect">
             <a:avLst/>
@@ -37298,19 +36998,19 @@
           <a:p>
             <a:pPr algn="l">
               <a:lnSpc>
-                <a:spcPct val="102000"/>
-              </a:lnSpc>
-              <a:spcBef>
-                <a:spcPts val="0"/>
-              </a:spcBef>
-              <a:spcAft>
-                <a:spcPts val="300"/>
-              </a:spcAft>
-            </a:pPr>
-            <a:r>
-              <a:rPr sz="1500" b="1" i="0">
-                <a:solidFill>
-                  <a:srgbClr val="FFFFFF"/>
+                <a:spcPct val="100000"/>
+              </a:lnSpc>
+              <a:spcBef>
+                <a:spcPts val="0"/>
+              </a:spcBef>
+              <a:spcAft>
+                <a:spcPts val="300"/>
+              </a:spcAft>
+            </a:pPr>
+            <a:r>
+              <a:rPr sz="1400" b="1" i="0">
+                <a:solidFill>
+                  <a:srgbClr val="0E213A"/>
                 </a:solidFill>
                 <a:latin typeface="Calibri"/>
               </a:rPr>
@@ -37321,127 +37021,28 @@
       </p:sp>
       <p:sp>
         <p:nvSpPr>
-          <p:cNvPr id="12" name="TextBox 11"/>
-          <p:cNvSpPr txBox="1"/>
-          <p:nvPr/>
-        </p:nvSpPr>
-        <p:spPr>
-          <a:xfrm>
-            <a:off x="914400" y="2962656"/>
-            <a:ext cx="2404872" cy="365760"/>
-          </a:xfrm>
-          <a:prstGeom prst="rect">
-            <a:avLst/>
-          </a:prstGeom>
-          <a:noFill/>
-        </p:spPr>
-        <p:txBody>
-          <a:bodyPr wrap="square" anchor="ctr" lIns="0" rIns="0" tIns="0" bIns="0">
+          <p:cNvPr id="14" name="TextBox 13"/>
+          <p:cNvSpPr txBox="1"/>
+          <p:nvPr/>
+        </p:nvSpPr>
+        <p:spPr>
+          <a:xfrm>
+            <a:off x="3703320" y="1920240"/>
+            <a:ext cx="7543800" cy="457200"/>
+          </a:xfrm>
+          <a:prstGeom prst="rect">
+            <a:avLst/>
+          </a:prstGeom>
+          <a:noFill/>
+        </p:spPr>
+        <p:txBody>
+          <a:bodyPr wrap="square" anchor="t" lIns="0" rIns="0" tIns="0" bIns="0">
             <a:spAutoFit/>
           </a:bodyPr>
           <a:lstStyle/>
           <a:p>
             <a:pPr algn="l">
               <a:lnSpc>
-                <a:spcPct val="100000"/>
-              </a:lnSpc>
-              <a:spcBef>
-                <a:spcPts val="0"/>
-              </a:spcBef>
-              <a:spcAft>
-                <a:spcPts val="300"/>
-              </a:spcAft>
-            </a:pPr>
-            <a:r>
-              <a:rPr sz="1000" b="0" i="0">
-                <a:solidFill>
-                  <a:srgbClr val="FFFFFF"/>
-                </a:solidFill>
-                <a:latin typeface="Calibri"/>
-              </a:rPr>
-              <a:t>● </a:t>
-            </a:r>
-            <a:r>
-              <a:rPr sz="1050" b="0" i="0">
-                <a:solidFill>
-                  <a:srgbClr val="FFFFFF"/>
-                </a:solidFill>
-                <a:latin typeface="Calibri"/>
-              </a:rPr>
-              <a:t>Nacional (a medida)</a:t>
-            </a:r>
-          </a:p>
-        </p:txBody>
-      </p:sp>
-      <p:sp>
-        <p:nvSpPr>
-          <p:cNvPr id="13" name="TextBox 12"/>
-          <p:cNvSpPr txBox="1"/>
-          <p:nvPr/>
-        </p:nvSpPr>
-        <p:spPr>
-          <a:xfrm>
-            <a:off x="3685032" y="1426464"/>
-            <a:ext cx="7543800" cy="219456"/>
-          </a:xfrm>
-          <a:prstGeom prst="rect">
-            <a:avLst/>
-          </a:prstGeom>
-          <a:noFill/>
-        </p:spPr>
-        <p:txBody>
-          <a:bodyPr wrap="square" anchor="t" lIns="0" rIns="0" tIns="0" bIns="0">
-            <a:spAutoFit/>
-          </a:bodyPr>
-          <a:lstStyle/>
-          <a:p>
-            <a:pPr algn="l">
-              <a:lnSpc>
-                <a:spcPct val="100000"/>
-              </a:lnSpc>
-              <a:spcBef>
-                <a:spcPts val="0"/>
-              </a:spcBef>
-              <a:spcAft>
-                <a:spcPts val="300"/>
-              </a:spcAft>
-            </a:pPr>
-            <a:r>
-              <a:rPr sz="950" b="1" i="0">
-                <a:solidFill>
-                  <a:srgbClr val="2D6CDF"/>
-                </a:solidFill>
-                <a:latin typeface="Calibri"/>
-              </a:rPr>
-              <a:t>FUNCIÓN</a:t>
-            </a:r>
-          </a:p>
-        </p:txBody>
-      </p:sp>
-      <p:sp>
-        <p:nvSpPr>
-          <p:cNvPr id="14" name="TextBox 13"/>
-          <p:cNvSpPr txBox="1"/>
-          <p:nvPr/>
-        </p:nvSpPr>
-        <p:spPr>
-          <a:xfrm>
-            <a:off x="3685032" y="1645920"/>
-            <a:ext cx="7543800" cy="566928"/>
-          </a:xfrm>
-          <a:prstGeom prst="rect">
-            <a:avLst/>
-          </a:prstGeom>
-          <a:noFill/>
-        </p:spPr>
-        <p:txBody>
-          <a:bodyPr wrap="square" anchor="t" lIns="0" rIns="0" tIns="0" bIns="0">
-            <a:spAutoFit/>
-          </a:bodyPr>
-          <a:lstStyle/>
-          <a:p>
-            <a:pPr algn="l">
-              <a:lnSpc>
                 <a:spcPct val="105000"/>
               </a:lnSpc>
               <a:spcBef>
@@ -37452,7 +37053,7 @@
               </a:spcAft>
             </a:pPr>
             <a:r>
-              <a:rPr sz="1150" b="0" i="0">
+              <a:rPr sz="1100" b="0" i="0">
                 <a:solidFill>
                   <a:srgbClr val="1A2432"/>
                 </a:solidFill>
@@ -37471,7 +37072,7 @@
         </p:nvSpPr>
         <p:spPr>
           <a:xfrm>
-            <a:off x="3685032" y="2295144"/>
+            <a:off x="3703320" y="2459736"/>
             <a:ext cx="118872" cy="118872"/>
           </a:xfrm>
           <a:prstGeom prst="roundRect">
@@ -37517,8 +37118,8 @@
         </p:nvSpPr>
         <p:spPr>
           <a:xfrm>
-            <a:off x="3941064" y="2249424"/>
-            <a:ext cx="7269480" cy="310896"/>
+            <a:off x="3959352" y="2414016"/>
+            <a:ext cx="7269480" cy="292608"/>
           </a:xfrm>
           <a:prstGeom prst="rect">
             <a:avLst/>
@@ -37543,7 +37144,7 @@
               </a:spcAft>
             </a:pPr>
             <a:r>
-              <a:rPr sz="1080" b="0" i="0">
+              <a:rPr sz="1050" b="0" i="0">
                 <a:solidFill>
                   <a:srgbClr val="5B6674"/>
                 </a:solidFill>
@@ -37562,7 +37163,7 @@
         </p:nvSpPr>
         <p:spPr>
           <a:xfrm>
-            <a:off x="3685032" y="2601468"/>
+            <a:off x="3703320" y="2734056"/>
             <a:ext cx="118872" cy="118872"/>
           </a:xfrm>
           <a:prstGeom prst="roundRect">
@@ -37608,8 +37209,8 @@
         </p:nvSpPr>
         <p:spPr>
           <a:xfrm>
-            <a:off x="3941064" y="2555748"/>
-            <a:ext cx="7269480" cy="310896"/>
+            <a:off x="3959352" y="2688336"/>
+            <a:ext cx="7269480" cy="292608"/>
           </a:xfrm>
           <a:prstGeom prst="rect">
             <a:avLst/>
@@ -37634,7 +37235,7 @@
               </a:spcAft>
             </a:pPr>
             <a:r>
-              <a:rPr sz="1080" b="0" i="0">
+              <a:rPr sz="1050" b="0" i="0">
                 <a:solidFill>
                   <a:srgbClr val="5B6674"/>
                 </a:solidFill>
@@ -37653,7 +37254,7 @@
         </p:nvSpPr>
         <p:spPr>
           <a:xfrm>
-            <a:off x="3685032" y="2907792"/>
+            <a:off x="3703320" y="3008376"/>
             <a:ext cx="118872" cy="118872"/>
           </a:xfrm>
           <a:prstGeom prst="roundRect">
@@ -37699,8 +37300,8 @@
         </p:nvSpPr>
         <p:spPr>
           <a:xfrm>
-            <a:off x="3941064" y="2862072"/>
-            <a:ext cx="7269480" cy="310896"/>
+            <a:off x="3959352" y="2962656"/>
+            <a:ext cx="7269480" cy="292608"/>
           </a:xfrm>
           <a:prstGeom prst="rect">
             <a:avLst/>
@@ -37725,7 +37326,7 @@
               </a:spcAft>
             </a:pPr>
             <a:r>
-              <a:rPr sz="1080" b="0" i="0">
+              <a:rPr sz="1050" b="0" i="0">
                 <a:solidFill>
                   <a:srgbClr val="5B6674"/>
                 </a:solidFill>
@@ -37744,8 +37345,8 @@
         </p:nvSpPr>
         <p:spPr>
           <a:xfrm>
-            <a:off x="3685032" y="3090672"/>
-            <a:ext cx="3931920" cy="347472"/>
+            <a:off x="3703320" y="3273552"/>
+            <a:ext cx="3931920" cy="292608"/>
           </a:xfrm>
           <a:prstGeom prst="rect">
             <a:avLst/>
@@ -37798,8 +37399,8 @@
         </p:nvSpPr>
         <p:spPr>
           <a:xfrm>
-            <a:off x="7662671" y="3090672"/>
-            <a:ext cx="3566160" cy="347472"/>
+            <a:off x="7680959" y="3273552"/>
+            <a:ext cx="3566160" cy="292608"/>
           </a:xfrm>
           <a:prstGeom prst="rect">
             <a:avLst/>
@@ -37853,7 +37454,7 @@
         <p:spPr>
           <a:xfrm>
             <a:off x="713232" y="3703320"/>
-            <a:ext cx="10771632" cy="2212848"/>
+            <a:ext cx="10771632" cy="2286000"/>
           </a:xfrm>
           <a:prstGeom prst="roundRect">
             <a:avLst>
@@ -37899,7 +37500,7 @@
         <p:spPr>
           <a:xfrm>
             <a:off x="713232" y="3703320"/>
-            <a:ext cx="2788920" cy="2212848"/>
+            <a:ext cx="2788920" cy="2286000"/>
           </a:xfrm>
           <a:prstGeom prst="roundRect">
             <a:avLst>
@@ -37945,7 +37546,7 @@
         <p:spPr>
           <a:xfrm>
             <a:off x="3374136" y="3721608"/>
-            <a:ext cx="128016" cy="2176272"/>
+            <a:ext cx="128016" cy="2249424"/>
           </a:xfrm>
           <a:prstGeom prst="rect">
             <a:avLst/>
@@ -37980,16 +37581,94 @@
           </a:p>
         </p:txBody>
       </p:sp>
-      <p:sp>
-        <p:nvSpPr>
-          <p:cNvPr id="26" name="TextBox 25"/>
-          <p:cNvSpPr txBox="1"/>
-          <p:nvPr/>
-        </p:nvSpPr>
-        <p:spPr>
-          <a:xfrm>
-            <a:off x="914400" y="3886200"/>
-            <a:ext cx="2404872" cy="1005840"/>
+      <p:pic>
+        <p:nvPicPr>
+          <p:cNvPr id="26" name="Picture 25" descr="no_bandas.png"/>
+          <p:cNvPicPr>
+            <a:picLocks noChangeAspect="1"/>
+          </p:cNvPicPr>
+          <p:nvPr/>
+        </p:nvPicPr>
+        <p:blipFill>
+          <a:blip r:embed="rId3"/>
+          <a:stretch>
+            <a:fillRect/>
+          </a:stretch>
+        </p:blipFill>
+        <p:spPr>
+          <a:xfrm>
+            <a:off x="969264" y="3849624"/>
+            <a:ext cx="2286000" cy="1413662"/>
+          </a:xfrm>
+          <a:prstGeom prst="rect">
+            <a:avLst/>
+          </a:prstGeom>
+        </p:spPr>
+      </p:pic>
+      <p:sp>
+        <p:nvSpPr>
+          <p:cNvPr id="27" name="TextBox 26"/>
+          <p:cNvSpPr txBox="1"/>
+          <p:nvPr/>
+        </p:nvSpPr>
+        <p:spPr>
+          <a:xfrm>
+            <a:off x="877824" y="5605272"/>
+            <a:ext cx="2514600" cy="292608"/>
+          </a:xfrm>
+          <a:prstGeom prst="rect">
+            <a:avLst/>
+          </a:prstGeom>
+          <a:noFill/>
+        </p:spPr>
+        <p:txBody>
+          <a:bodyPr wrap="square" anchor="ctr" lIns="0" rIns="0" tIns="0" bIns="0">
+            <a:spAutoFit/>
+          </a:bodyPr>
+          <a:lstStyle/>
+          <a:p>
+            <a:pPr algn="ctr">
+              <a:lnSpc>
+                <a:spcPct val="100000"/>
+              </a:lnSpc>
+              <a:spcBef>
+                <a:spcPts val="0"/>
+              </a:spcBef>
+              <a:spcAft>
+                <a:spcPts val="300"/>
+              </a:spcAft>
+            </a:pPr>
+            <a:r>
+              <a:rPr sz="900" b="0" i="0">
+                <a:solidFill>
+                  <a:srgbClr val="FFFFFF"/>
+                </a:solidFill>
+                <a:latin typeface="Calibri"/>
+              </a:rPr>
+              <a:t>● </a:t>
+            </a:r>
+            <a:r>
+              <a:rPr sz="1000" b="0" i="0">
+                <a:solidFill>
+                  <a:srgbClr val="FFFFFF"/>
+                </a:solidFill>
+                <a:latin typeface="Calibri"/>
+              </a:rPr>
+              <a:t>México</a:t>
+            </a:r>
+          </a:p>
+        </p:txBody>
+      </p:sp>
+      <p:sp>
+        <p:nvSpPr>
+          <p:cNvPr id="28" name="TextBox 27"/>
+          <p:cNvSpPr txBox="1"/>
+          <p:nvPr/>
+        </p:nvSpPr>
+        <p:spPr>
+          <a:xfrm>
+            <a:off x="3703320" y="3831336"/>
+            <a:ext cx="7543800" cy="457200"/>
           </a:xfrm>
           <a:prstGeom prst="rect">
             <a:avLst/>
@@ -38004,19 +37683,19 @@
           <a:p>
             <a:pPr algn="l">
               <a:lnSpc>
-                <a:spcPct val="102000"/>
-              </a:lnSpc>
-              <a:spcBef>
-                <a:spcPts val="0"/>
-              </a:spcBef>
-              <a:spcAft>
-                <a:spcPts val="300"/>
-              </a:spcAft>
-            </a:pPr>
-            <a:r>
-              <a:rPr sz="1500" b="1" i="0">
-                <a:solidFill>
-                  <a:srgbClr val="FFFFFF"/>
+                <a:spcPct val="100000"/>
+              </a:lnSpc>
+              <a:spcBef>
+                <a:spcPts val="0"/>
+              </a:spcBef>
+              <a:spcAft>
+                <a:spcPts val="300"/>
+              </a:spcAft>
+            </a:pPr>
+            <a:r>
+              <a:rPr sz="1400" b="1" i="0">
+                <a:solidFill>
+                  <a:srgbClr val="0E213A"/>
                 </a:solidFill>
                 <a:latin typeface="Calibri"/>
               </a:rPr>
@@ -38027,127 +37706,28 @@
       </p:sp>
       <p:sp>
         <p:nvSpPr>
-          <p:cNvPr id="27" name="TextBox 26"/>
-          <p:cNvSpPr txBox="1"/>
-          <p:nvPr/>
-        </p:nvSpPr>
-        <p:spPr>
-          <a:xfrm>
-            <a:off x="914400" y="5385816"/>
-            <a:ext cx="2404872" cy="365760"/>
-          </a:xfrm>
-          <a:prstGeom prst="rect">
-            <a:avLst/>
-          </a:prstGeom>
-          <a:noFill/>
-        </p:spPr>
-        <p:txBody>
-          <a:bodyPr wrap="square" anchor="ctr" lIns="0" rIns="0" tIns="0" bIns="0">
+          <p:cNvPr id="29" name="TextBox 28"/>
+          <p:cNvSpPr txBox="1"/>
+          <p:nvPr/>
+        </p:nvSpPr>
+        <p:spPr>
+          <a:xfrm>
+            <a:off x="3703320" y="4343400"/>
+            <a:ext cx="7543800" cy="457200"/>
+          </a:xfrm>
+          <a:prstGeom prst="rect">
+            <a:avLst/>
+          </a:prstGeom>
+          <a:noFill/>
+        </p:spPr>
+        <p:txBody>
+          <a:bodyPr wrap="square" anchor="t" lIns="0" rIns="0" tIns="0" bIns="0">
             <a:spAutoFit/>
           </a:bodyPr>
           <a:lstStyle/>
           <a:p>
             <a:pPr algn="l">
               <a:lnSpc>
-                <a:spcPct val="100000"/>
-              </a:lnSpc>
-              <a:spcBef>
-                <a:spcPts val="0"/>
-              </a:spcBef>
-              <a:spcAft>
-                <a:spcPts val="300"/>
-              </a:spcAft>
-            </a:pPr>
-            <a:r>
-              <a:rPr sz="1000" b="0" i="0">
-                <a:solidFill>
-                  <a:srgbClr val="FFFFFF"/>
-                </a:solidFill>
-                <a:latin typeface="Calibri"/>
-              </a:rPr>
-              <a:t>● </a:t>
-            </a:r>
-            <a:r>
-              <a:rPr sz="1050" b="0" i="0">
-                <a:solidFill>
-                  <a:srgbClr val="FFFFFF"/>
-                </a:solidFill>
-                <a:latin typeface="Calibri"/>
-              </a:rPr>
-              <a:t>México</a:t>
-            </a:r>
-          </a:p>
-        </p:txBody>
-      </p:sp>
-      <p:sp>
-        <p:nvSpPr>
-          <p:cNvPr id="28" name="TextBox 27"/>
-          <p:cNvSpPr txBox="1"/>
-          <p:nvPr/>
-        </p:nvSpPr>
-        <p:spPr>
-          <a:xfrm>
-            <a:off x="3685032" y="3849624"/>
-            <a:ext cx="7543800" cy="219456"/>
-          </a:xfrm>
-          <a:prstGeom prst="rect">
-            <a:avLst/>
-          </a:prstGeom>
-          <a:noFill/>
-        </p:spPr>
-        <p:txBody>
-          <a:bodyPr wrap="square" anchor="t" lIns="0" rIns="0" tIns="0" bIns="0">
-            <a:spAutoFit/>
-          </a:bodyPr>
-          <a:lstStyle/>
-          <a:p>
-            <a:pPr algn="l">
-              <a:lnSpc>
-                <a:spcPct val="100000"/>
-              </a:lnSpc>
-              <a:spcBef>
-                <a:spcPts val="0"/>
-              </a:spcBef>
-              <a:spcAft>
-                <a:spcPts val="300"/>
-              </a:spcAft>
-            </a:pPr>
-            <a:r>
-              <a:rPr sz="950" b="1" i="0">
-                <a:solidFill>
-                  <a:srgbClr val="2D6CDF"/>
-                </a:solidFill>
-                <a:latin typeface="Calibri"/>
-              </a:rPr>
-              <a:t>FUNCIÓN</a:t>
-            </a:r>
-          </a:p>
-        </p:txBody>
-      </p:sp>
-      <p:sp>
-        <p:nvSpPr>
-          <p:cNvPr id="29" name="TextBox 28"/>
-          <p:cNvSpPr txBox="1"/>
-          <p:nvPr/>
-        </p:nvSpPr>
-        <p:spPr>
-          <a:xfrm>
-            <a:off x="3685032" y="4069080"/>
-            <a:ext cx="7543800" cy="566928"/>
-          </a:xfrm>
-          <a:prstGeom prst="rect">
-            <a:avLst/>
-          </a:prstGeom>
-          <a:noFill/>
-        </p:spPr>
-        <p:txBody>
-          <a:bodyPr wrap="square" anchor="t" lIns="0" rIns="0" tIns="0" bIns="0">
-            <a:spAutoFit/>
-          </a:bodyPr>
-          <a:lstStyle/>
-          <a:p>
-            <a:pPr algn="l">
-              <a:lnSpc>
                 <a:spcPct val="105000"/>
               </a:lnSpc>
               <a:spcBef>
@@ -38158,7 +37738,7 @@
               </a:spcAft>
             </a:pPr>
             <a:r>
-              <a:rPr sz="1150" b="0" i="0">
+              <a:rPr sz="1100" b="0" i="0">
                 <a:solidFill>
                   <a:srgbClr val="1A2432"/>
                 </a:solidFill>
@@ -38177,7 +37757,7 @@
         </p:nvSpPr>
         <p:spPr>
           <a:xfrm>
-            <a:off x="3685032" y="4718304"/>
+            <a:off x="3703320" y="4882896"/>
             <a:ext cx="118872" cy="118872"/>
           </a:xfrm>
           <a:prstGeom prst="roundRect">
@@ -38223,8 +37803,8 @@
         </p:nvSpPr>
         <p:spPr>
           <a:xfrm>
-            <a:off x="3941064" y="4672584"/>
-            <a:ext cx="7269480" cy="310896"/>
+            <a:off x="3959352" y="4837176"/>
+            <a:ext cx="7269480" cy="292608"/>
           </a:xfrm>
           <a:prstGeom prst="rect">
             <a:avLst/>
@@ -38249,7 +37829,7 @@
               </a:spcAft>
             </a:pPr>
             <a:r>
-              <a:rPr sz="1080" b="0" i="0">
+              <a:rPr sz="1050" b="0" i="0">
                 <a:solidFill>
                   <a:srgbClr val="5B6674"/>
                 </a:solidFill>
@@ -38268,7 +37848,7 @@
         </p:nvSpPr>
         <p:spPr>
           <a:xfrm>
-            <a:off x="3685032" y="5024628"/>
+            <a:off x="3703320" y="5157216"/>
             <a:ext cx="118872" cy="118872"/>
           </a:xfrm>
           <a:prstGeom prst="roundRect">
@@ -38314,8 +37894,8 @@
         </p:nvSpPr>
         <p:spPr>
           <a:xfrm>
-            <a:off x="3941064" y="4978908"/>
-            <a:ext cx="7269480" cy="310896"/>
+            <a:off x="3959352" y="5111496"/>
+            <a:ext cx="7269480" cy="292608"/>
           </a:xfrm>
           <a:prstGeom prst="rect">
             <a:avLst/>
@@ -38340,7 +37920,7 @@
               </a:spcAft>
             </a:pPr>
             <a:r>
-              <a:rPr sz="1080" b="0" i="0">
+              <a:rPr sz="1050" b="0" i="0">
                 <a:solidFill>
                   <a:srgbClr val="5B6674"/>
                 </a:solidFill>
@@ -38359,7 +37939,7 @@
         </p:nvSpPr>
         <p:spPr>
           <a:xfrm>
-            <a:off x="3685032" y="5330952"/>
+            <a:off x="3703320" y="5431536"/>
             <a:ext cx="118872" cy="118872"/>
           </a:xfrm>
           <a:prstGeom prst="roundRect">
@@ -38405,8 +37985,8 @@
         </p:nvSpPr>
         <p:spPr>
           <a:xfrm>
-            <a:off x="3941064" y="5285232"/>
-            <a:ext cx="7269480" cy="310896"/>
+            <a:off x="3959352" y="5385816"/>
+            <a:ext cx="7269480" cy="292608"/>
           </a:xfrm>
           <a:prstGeom prst="rect">
             <a:avLst/>
@@ -38431,7 +38011,7 @@
               </a:spcAft>
             </a:pPr>
             <a:r>
-              <a:rPr sz="1080" b="0" i="0">
+              <a:rPr sz="1050" b="0" i="0">
                 <a:solidFill>
                   <a:srgbClr val="5B6674"/>
                 </a:solidFill>
@@ -38450,8 +38030,8 @@
         </p:nvSpPr>
         <p:spPr>
           <a:xfrm>
-            <a:off x="3685032" y="5513832"/>
-            <a:ext cx="3931920" cy="347472"/>
+            <a:off x="3703320" y="5696712"/>
+            <a:ext cx="3931920" cy="292608"/>
           </a:xfrm>
           <a:prstGeom prst="rect">
             <a:avLst/>
@@ -38504,8 +38084,8 @@
         </p:nvSpPr>
         <p:spPr>
           <a:xfrm>
-            <a:off x="7662671" y="5513832"/>
-            <a:ext cx="3566160" cy="347472"/>
+            <a:off x="7680959" y="5696712"/>
+            <a:ext cx="3566160" cy="292608"/>
           </a:xfrm>
           <a:prstGeom prst="rect">
             <a:avLst/>
